--- a/poster/Poster_Landslide_Segmentation.pptx
+++ b/poster/Poster_Landslide_Segmentation.pptx
@@ -216,89 +216,87 @@
             </c:spPr>
           </c:marker>
           <c:cat>
-            <c:multiLvlStrRef>
+            <c:strRef>
               <c:f>Sheet1!$A$2:$A$26</c:f>
-              <c:multiLvlStrCache>
+              <c:strCache>
                 <c:ptCount val="25"/>
-                <c:lvl>
-                  <c:pt idx="0">
-                    <c:v>1</c:v>
-                  </c:pt>
-                  <c:pt idx="1">
-                    <c:v>2</c:v>
-                  </c:pt>
-                  <c:pt idx="2">
-                    <c:v>3</c:v>
-                  </c:pt>
-                  <c:pt idx="3">
-                    <c:v>4</c:v>
-                  </c:pt>
-                  <c:pt idx="4">
-                    <c:v>5</c:v>
-                  </c:pt>
-                  <c:pt idx="5">
-                    <c:v>6</c:v>
-                  </c:pt>
-                  <c:pt idx="6">
-                    <c:v>7</c:v>
-                  </c:pt>
-                  <c:pt idx="7">
-                    <c:v>8</c:v>
-                  </c:pt>
-                  <c:pt idx="8">
-                    <c:v>9</c:v>
-                  </c:pt>
-                  <c:pt idx="9">
-                    <c:v>10</c:v>
-                  </c:pt>
-                  <c:pt idx="10">
-                    <c:v>11</c:v>
-                  </c:pt>
-                  <c:pt idx="11">
-                    <c:v>12</c:v>
-                  </c:pt>
-                  <c:pt idx="12">
-                    <c:v>13</c:v>
-                  </c:pt>
-                  <c:pt idx="13">
-                    <c:v>14</c:v>
-                  </c:pt>
-                  <c:pt idx="14">
-                    <c:v>15</c:v>
-                  </c:pt>
-                  <c:pt idx="15">
-                    <c:v>16</c:v>
-                  </c:pt>
-                  <c:pt idx="16">
-                    <c:v>17</c:v>
-                  </c:pt>
-                  <c:pt idx="17">
-                    <c:v>18</c:v>
-                  </c:pt>
-                  <c:pt idx="18">
-                    <c:v>19</c:v>
-                  </c:pt>
-                  <c:pt idx="19">
-                    <c:v>20</c:v>
-                  </c:pt>
-                  <c:pt idx="20">
-                    <c:v>21</c:v>
-                  </c:pt>
-                  <c:pt idx="21">
-                    <c:v>22</c:v>
-                  </c:pt>
-                  <c:pt idx="22">
-                    <c:v>23</c:v>
-                  </c:pt>
-                  <c:pt idx="23">
-                    <c:v>24</c:v>
-                  </c:pt>
-                  <c:pt idx="24">
-                    <c:v>25</c:v>
-                  </c:pt>
-                </c:lvl>
-              </c:multiLvlStrCache>
-            </c:multiLvlStrRef>
+                <c:pt idx="0">
+                  <c:v>1</c:v>
+                </c:pt>
+                <c:pt idx="1">
+                  <c:v>2</c:v>
+                </c:pt>
+                <c:pt idx="2">
+                  <c:v>3</c:v>
+                </c:pt>
+                <c:pt idx="3">
+                  <c:v>4</c:v>
+                </c:pt>
+                <c:pt idx="4">
+                  <c:v>5</c:v>
+                </c:pt>
+                <c:pt idx="5">
+                  <c:v>6</c:v>
+                </c:pt>
+                <c:pt idx="6">
+                  <c:v>7</c:v>
+                </c:pt>
+                <c:pt idx="7">
+                  <c:v>8</c:v>
+                </c:pt>
+                <c:pt idx="8">
+                  <c:v>9</c:v>
+                </c:pt>
+                <c:pt idx="9">
+                  <c:v>10</c:v>
+                </c:pt>
+                <c:pt idx="10">
+                  <c:v>11</c:v>
+                </c:pt>
+                <c:pt idx="11">
+                  <c:v>12</c:v>
+                </c:pt>
+                <c:pt idx="12">
+                  <c:v>13</c:v>
+                </c:pt>
+                <c:pt idx="13">
+                  <c:v>14</c:v>
+                </c:pt>
+                <c:pt idx="14">
+                  <c:v>15</c:v>
+                </c:pt>
+                <c:pt idx="15">
+                  <c:v>16</c:v>
+                </c:pt>
+                <c:pt idx="16">
+                  <c:v>17</c:v>
+                </c:pt>
+                <c:pt idx="17">
+                  <c:v>18</c:v>
+                </c:pt>
+                <c:pt idx="18">
+                  <c:v>19</c:v>
+                </c:pt>
+                <c:pt idx="19">
+                  <c:v>20</c:v>
+                </c:pt>
+                <c:pt idx="20">
+                  <c:v>21</c:v>
+                </c:pt>
+                <c:pt idx="21">
+                  <c:v>22</c:v>
+                </c:pt>
+                <c:pt idx="22">
+                  <c:v>23</c:v>
+                </c:pt>
+                <c:pt idx="23">
+                  <c:v>24</c:v>
+                </c:pt>
+                <c:pt idx="24">
+                  <c:v>25</c:v>
+                </c:pt>
+              </c:strCache>
+            </c:strRef>
           </c:cat>
           <c:val>
             <c:numRef>
@@ -307,79 +305,79 @@
                 <c:formatCode>General</c:formatCode>
                 <c:ptCount val="25"/>
                 <c:pt idx="0">
-                  <c:v>0.6865</c:v>
+                  <c:v>0.7131122958794865</c:v>
                 </c:pt>
                 <c:pt idx="1">
-                  <c:v>0.6199</c:v>
+                  <c:v>0.6298013586398039</c:v>
                 </c:pt>
                 <c:pt idx="2">
-                  <c:v>0.3949</c:v>
+                  <c:v>0.6107145034082584</c:v>
                 </c:pt>
                 <c:pt idx="3">
-                  <c:v>0.2517</c:v>
+                  <c:v>0.6018807290566244</c:v>
                 </c:pt>
                 <c:pt idx="4">
-                  <c:v>0.2325</c:v>
+                  <c:v>0.5907195656871171</c:v>
                 </c:pt>
                 <c:pt idx="5">
-                  <c:v>0.2159</c:v>
+                  <c:v>0.5747166356821984</c:v>
                 </c:pt>
                 <c:pt idx="6">
-                  <c:v>0.2027</c:v>
+                  <c:v>0.5617352598377241</c:v>
                 </c:pt>
                 <c:pt idx="7">
-                  <c:v>0.1942</c:v>
+                  <c:v>0.5522425049724216</c:v>
                 </c:pt>
                 <c:pt idx="8">
-                  <c:v>0.1846</c:v>
+                  <c:v>0.5299414638640411</c:v>
                 </c:pt>
                 <c:pt idx="9">
-                  <c:v>0.1704</c:v>
+                  <c:v>0.5250442004643474</c:v>
                 </c:pt>
                 <c:pt idx="10">
-                  <c:v>0.1555</c:v>
+                  <c:v>0.5206698197328499</c:v>
                 </c:pt>
                 <c:pt idx="11">
-                  <c:v>0.1449</c:v>
+                  <c:v>0.5119207905453631</c:v>
                 </c:pt>
                 <c:pt idx="12">
-                  <c:v>0.1377</c:v>
+                  <c:v>0.4509953427960091</c:v>
                 </c:pt>
                 <c:pt idx="13">
-                  <c:v>0.1333</c:v>
+                  <c:v>0.33100673238204426</c:v>
                 </c:pt>
                 <c:pt idx="14">
-                  <c:v>0.1302</c:v>
+                  <c:v>0.24823288770380347</c:v>
                 </c:pt>
                 <c:pt idx="15">
-                  <c:v>0.128</c:v>
+                  <c:v>0.21923550816971957</c:v>
                 </c:pt>
                 <c:pt idx="16">
-                  <c:v>0.1263</c:v>
+                  <c:v>0.1943245231070606</c:v>
                 </c:pt>
                 <c:pt idx="17">
-                  <c:v>0.1252</c:v>
+                  <c:v>0.18544329840031712</c:v>
                 </c:pt>
                 <c:pt idx="18">
-                  <c:v>0.1238</c:v>
+                  <c:v>0.17838737131154594</c:v>
                 </c:pt>
                 <c:pt idx="19">
-                  <c:v>0.1227</c:v>
+                  <c:v>0.15857151831902735</c:v>
                 </c:pt>
                 <c:pt idx="20">
-                  <c:v>0.1216</c:v>
+                  <c:v>0.16328424794879476</c:v>
                 </c:pt>
                 <c:pt idx="21">
-                  <c:v>0.1205</c:v>
+                  <c:v>0.14981447624935726</c:v>
                 </c:pt>
                 <c:pt idx="22">
-                  <c:v>0.119</c:v>
+                  <c:v>0.13884069606034913</c:v>
                 </c:pt>
                 <c:pt idx="23">
-                  <c:v>0.1179</c:v>
+                  <c:v>0.1362881456389037</c:v>
                 </c:pt>
                 <c:pt idx="24">
-                  <c:v>0.1162</c:v>
+                  <c:v>0.13037981687312816</c:v>
                 </c:pt>
               </c:numCache>
             </c:numRef>
@@ -456,89 +454,87 @@
             </c:spPr>
           </c:marker>
           <c:cat>
-            <c:multiLvlStrRef>
+            <c:strRef>
               <c:f>Sheet1!$A$2:$A$26</c:f>
-              <c:multiLvlStrCache>
+              <c:strCache>
                 <c:ptCount val="25"/>
-                <c:lvl>
-                  <c:pt idx="0">
-                    <c:v>1</c:v>
-                  </c:pt>
-                  <c:pt idx="1">
-                    <c:v>2</c:v>
-                  </c:pt>
-                  <c:pt idx="2">
-                    <c:v>3</c:v>
-                  </c:pt>
-                  <c:pt idx="3">
-                    <c:v>4</c:v>
-                  </c:pt>
-                  <c:pt idx="4">
-                    <c:v>5</c:v>
-                  </c:pt>
-                  <c:pt idx="5">
-                    <c:v>6</c:v>
-                  </c:pt>
-                  <c:pt idx="6">
-                    <c:v>7</c:v>
-                  </c:pt>
-                  <c:pt idx="7">
-                    <c:v>8</c:v>
-                  </c:pt>
-                  <c:pt idx="8">
-                    <c:v>9</c:v>
-                  </c:pt>
-                  <c:pt idx="9">
-                    <c:v>10</c:v>
-                  </c:pt>
-                  <c:pt idx="10">
-                    <c:v>11</c:v>
-                  </c:pt>
-                  <c:pt idx="11">
-                    <c:v>12</c:v>
-                  </c:pt>
-                  <c:pt idx="12">
-                    <c:v>13</c:v>
-                  </c:pt>
-                  <c:pt idx="13">
-                    <c:v>14</c:v>
-                  </c:pt>
-                  <c:pt idx="14">
-                    <c:v>15</c:v>
-                  </c:pt>
-                  <c:pt idx="15">
-                    <c:v>16</c:v>
-                  </c:pt>
-                  <c:pt idx="16">
-                    <c:v>17</c:v>
-                  </c:pt>
-                  <c:pt idx="17">
-                    <c:v>18</c:v>
-                  </c:pt>
-                  <c:pt idx="18">
-                    <c:v>19</c:v>
-                  </c:pt>
-                  <c:pt idx="19">
-                    <c:v>20</c:v>
-                  </c:pt>
-                  <c:pt idx="20">
-                    <c:v>21</c:v>
-                  </c:pt>
-                  <c:pt idx="21">
-                    <c:v>22</c:v>
-                  </c:pt>
-                  <c:pt idx="22">
-                    <c:v>23</c:v>
-                  </c:pt>
-                  <c:pt idx="23">
-                    <c:v>24</c:v>
-                  </c:pt>
-                  <c:pt idx="24">
-                    <c:v>25</c:v>
-                  </c:pt>
-                </c:lvl>
-              </c:multiLvlStrCache>
-            </c:multiLvlStrRef>
+                <c:pt idx="0">
+                  <c:v>1</c:v>
+                </c:pt>
+                <c:pt idx="1">
+                  <c:v>2</c:v>
+                </c:pt>
+                <c:pt idx="2">
+                  <c:v>3</c:v>
+                </c:pt>
+                <c:pt idx="3">
+                  <c:v>4</c:v>
+                </c:pt>
+                <c:pt idx="4">
+                  <c:v>5</c:v>
+                </c:pt>
+                <c:pt idx="5">
+                  <c:v>6</c:v>
+                </c:pt>
+                <c:pt idx="6">
+                  <c:v>7</c:v>
+                </c:pt>
+                <c:pt idx="7">
+                  <c:v>8</c:v>
+                </c:pt>
+                <c:pt idx="8">
+                  <c:v>9</c:v>
+                </c:pt>
+                <c:pt idx="9">
+                  <c:v>10</c:v>
+                </c:pt>
+                <c:pt idx="10">
+                  <c:v>11</c:v>
+                </c:pt>
+                <c:pt idx="11">
+                  <c:v>12</c:v>
+                </c:pt>
+                <c:pt idx="12">
+                  <c:v>13</c:v>
+                </c:pt>
+                <c:pt idx="13">
+                  <c:v>14</c:v>
+                </c:pt>
+                <c:pt idx="14">
+                  <c:v>15</c:v>
+                </c:pt>
+                <c:pt idx="15">
+                  <c:v>16</c:v>
+                </c:pt>
+                <c:pt idx="16">
+                  <c:v>17</c:v>
+                </c:pt>
+                <c:pt idx="17">
+                  <c:v>18</c:v>
+                </c:pt>
+                <c:pt idx="18">
+                  <c:v>19</c:v>
+                </c:pt>
+                <c:pt idx="19">
+                  <c:v>20</c:v>
+                </c:pt>
+                <c:pt idx="20">
+                  <c:v>21</c:v>
+                </c:pt>
+                <c:pt idx="21">
+                  <c:v>22</c:v>
+                </c:pt>
+                <c:pt idx="22">
+                  <c:v>23</c:v>
+                </c:pt>
+                <c:pt idx="23">
+                  <c:v>24</c:v>
+                </c:pt>
+                <c:pt idx="24">
+                  <c:v>25</c:v>
+                </c:pt>
+              </c:strCache>
+            </c:strRef>
           </c:cat>
           <c:val>
             <c:numRef>
@@ -547,79 +543,79 @@
                 <c:formatCode>General</c:formatCode>
                 <c:ptCount val="25"/>
                 <c:pt idx="0">
-                  <c:v>0.7096</c:v>
+                  <c:v>0.6447884746272154</c:v>
                 </c:pt>
                 <c:pt idx="1">
-                  <c:v>0.565</c:v>
+                  <c:v>0.6440097632432225</c:v>
                 </c:pt>
                 <c:pt idx="2">
-                  <c:v>0.1656</c:v>
+                  <c:v>0.6494576545074733</c:v>
                 </c:pt>
                 <c:pt idx="3">
-                  <c:v>0.1463</c:v>
+                  <c:v>0.6377489098996827</c:v>
                 </c:pt>
                 <c:pt idx="4">
-                  <c:v>0.1374</c:v>
+                  <c:v>0.6476496703094906</c:v>
                 </c:pt>
                 <c:pt idx="5">
-                  <c:v>0.131</c:v>
+                  <c:v>0.6676246547939801</c:v>
                 </c:pt>
                 <c:pt idx="6">
-                  <c:v>0.1234</c:v>
+                  <c:v>0.6328027349529844</c:v>
                 </c:pt>
                 <c:pt idx="7">
-                  <c:v>0.1169</c:v>
+                  <c:v>0.6529013446485153</c:v>
                 </c:pt>
                 <c:pt idx="8">
-                  <c:v>0.1119</c:v>
+                  <c:v>0.6287349587137049</c:v>
                 </c:pt>
                 <c:pt idx="9">
-                  <c:v>0.1023</c:v>
+                  <c:v>0.6856425695949131</c:v>
                 </c:pt>
                 <c:pt idx="10">
-                  <c:v>0.096</c:v>
+                  <c:v>0.6657709232484451</c:v>
                 </c:pt>
                 <c:pt idx="11">
-                  <c:v>0.0884</c:v>
+                  <c:v>0.6416196805058103</c:v>
                 </c:pt>
                 <c:pt idx="12">
-                  <c:v>0.0836</c:v>
+                  <c:v>0.5288712398873435</c:v>
                 </c:pt>
                 <c:pt idx="13">
-                  <c:v>0.0817</c:v>
+                  <c:v>0.803873710389804</c:v>
                 </c:pt>
                 <c:pt idx="14">
-                  <c:v>0.08</c:v>
+                  <c:v>0.7223091111302957</c:v>
                 </c:pt>
                 <c:pt idx="15">
-                  <c:v>0.0791</c:v>
+                  <c:v>0.5373965756150992</c:v>
                 </c:pt>
                 <c:pt idx="16">
-                  <c:v>0.0782</c:v>
+                  <c:v>0.6722878413307589</c:v>
                 </c:pt>
                 <c:pt idx="17">
-                  <c:v>0.0779</c:v>
+                  <c:v>0.8402428486449016</c:v>
                 </c:pt>
                 <c:pt idx="18">
-                  <c:v>0.0772</c:v>
+                  <c:v>0.5364891306271933</c:v>
                 </c:pt>
                 <c:pt idx="19">
-                  <c:v>0.0768</c:v>
+                  <c:v>0.7019095726314735</c:v>
                 </c:pt>
                 <c:pt idx="20">
-                  <c:v>0.0772</c:v>
+                  <c:v>0.6937437509088965</c:v>
                 </c:pt>
                 <c:pt idx="21">
-                  <c:v>0.0761</c:v>
+                  <c:v>0.8549772685267721</c:v>
                 </c:pt>
                 <c:pt idx="22">
-                  <c:v>0.0775</c:v>
+                  <c:v>0.7121892117996755</c:v>
                 </c:pt>
                 <c:pt idx="23">
-                  <c:v>0.074</c:v>
+                  <c:v>0.6043322367691449</c:v>
                 </c:pt>
                 <c:pt idx="24">
-                  <c:v>0.0764</c:v>
+                  <c:v>0.7237688235279046</c:v>
                 </c:pt>
               </c:numCache>
             </c:numRef>
@@ -895,170 +891,174 @@
             </c:spPr>
           </c:marker>
           <c:cat>
-            <c:multiLvlStrRef>
-              <c:f>Sheet1!$A$2:$A$26</c:f>
-              <c:multiLvlStrCache>
-                <c:ptCount val="25"/>
-                <c:lvl>
-                  <c:pt idx="0">
-                    <c:v>1</c:v>
-                  </c:pt>
-                  <c:pt idx="1">
-                    <c:v>2</c:v>
-                  </c:pt>
-                  <c:pt idx="2">
-                    <c:v>3</c:v>
-                  </c:pt>
-                  <c:pt idx="3">
-                    <c:v>4</c:v>
-                  </c:pt>
-                  <c:pt idx="4">
-                    <c:v>5</c:v>
-                  </c:pt>
-                  <c:pt idx="5">
-                    <c:v>6</c:v>
-                  </c:pt>
-                  <c:pt idx="6">
-                    <c:v>7</c:v>
-                  </c:pt>
-                  <c:pt idx="7">
-                    <c:v>8</c:v>
-                  </c:pt>
-                  <c:pt idx="8">
-                    <c:v>9</c:v>
-                  </c:pt>
-                  <c:pt idx="9">
-                    <c:v>10</c:v>
-                  </c:pt>
-                  <c:pt idx="10">
-                    <c:v>11</c:v>
-                  </c:pt>
-                  <c:pt idx="11">
-                    <c:v>12</c:v>
-                  </c:pt>
-                  <c:pt idx="12">
-                    <c:v>13</c:v>
-                  </c:pt>
-                  <c:pt idx="13">
-                    <c:v>14</c:v>
-                  </c:pt>
-                  <c:pt idx="14">
-                    <c:v>15</c:v>
-                  </c:pt>
-                  <c:pt idx="15">
-                    <c:v>16</c:v>
-                  </c:pt>
-                  <c:pt idx="16">
-                    <c:v>17</c:v>
-                  </c:pt>
-                  <c:pt idx="17">
-                    <c:v>18</c:v>
-                  </c:pt>
-                  <c:pt idx="18">
-                    <c:v>19</c:v>
-                  </c:pt>
-                  <c:pt idx="19">
-                    <c:v>20</c:v>
-                  </c:pt>
-                  <c:pt idx="20">
-                    <c:v>21</c:v>
-                  </c:pt>
-                  <c:pt idx="21">
-                    <c:v>22</c:v>
-                  </c:pt>
-                  <c:pt idx="22">
-                    <c:v>23</c:v>
-                  </c:pt>
-                  <c:pt idx="23">
-                    <c:v>24</c:v>
-                  </c:pt>
-                  <c:pt idx="24">
-                    <c:v>25</c:v>
-                  </c:pt>
-                </c:lvl>
-              </c:multiLvlStrCache>
-            </c:multiLvlStrRef>
+            <c:strRef>
+              <c:f>Sheet1!$A$2:$A$27</c:f>
+              <c:strCache>
+                <c:ptCount val="26"/>
+                <c:pt idx="0">
+                  <c:v>1</c:v>
+                </c:pt>
+                <c:pt idx="1">
+                  <c:v>2</c:v>
+                </c:pt>
+                <c:pt idx="2">
+                  <c:v>3</c:v>
+                </c:pt>
+                <c:pt idx="3">
+                  <c:v>4</c:v>
+                </c:pt>
+                <c:pt idx="4">
+                  <c:v>5</c:v>
+                </c:pt>
+                <c:pt idx="5">
+                  <c:v>6</c:v>
+                </c:pt>
+                <c:pt idx="6">
+                  <c:v>7</c:v>
+                </c:pt>
+                <c:pt idx="7">
+                  <c:v>8</c:v>
+                </c:pt>
+                <c:pt idx="8">
+                  <c:v>9</c:v>
+                </c:pt>
+                <c:pt idx="9">
+                  <c:v>10</c:v>
+                </c:pt>
+                <c:pt idx="10">
+                  <c:v>11</c:v>
+                </c:pt>
+                <c:pt idx="11">
+                  <c:v>12</c:v>
+                </c:pt>
+                <c:pt idx="12">
+                  <c:v>13</c:v>
+                </c:pt>
+                <c:pt idx="13">
+                  <c:v>14</c:v>
+                </c:pt>
+                <c:pt idx="14">
+                  <c:v>15</c:v>
+                </c:pt>
+                <c:pt idx="15">
+                  <c:v>16</c:v>
+                </c:pt>
+                <c:pt idx="16">
+                  <c:v>17</c:v>
+                </c:pt>
+                <c:pt idx="17">
+                  <c:v>18</c:v>
+                </c:pt>
+                <c:pt idx="18">
+                  <c:v>19</c:v>
+                </c:pt>
+                <c:pt idx="19">
+                  <c:v>20</c:v>
+                </c:pt>
+                <c:pt idx="20">
+                  <c:v>21</c:v>
+                </c:pt>
+                <c:pt idx="21">
+                  <c:v>22</c:v>
+                </c:pt>
+                <c:pt idx="22">
+                  <c:v>23</c:v>
+                </c:pt>
+                <c:pt idx="23">
+                  <c:v>24</c:v>
+                </c:pt>
+                <c:pt idx="24">
+                  <c:v>25</c:v>
+                </c:pt>
+                <c:pt idx="25">
+                  <c:v>26</c:v>
+                </c:pt>
+              </c:strCache>
+            </c:strRef>
           </c:cat>
           <c:val>
             <c:numRef>
-              <c:f>Sheet1!$B$2:$B$26</c:f>
+              <c:f>Sheet1!$B$2:$B$27</c:f>
               <c:numCache>
                 <c:formatCode>General</c:formatCode>
-                <c:ptCount val="25"/>
+                <c:ptCount val="26"/>
                 <c:pt idx="0">
-                  <c:v>0.7757</c:v>
+                  <c:v>0.7590519866370361</c:v>
                 </c:pt>
                 <c:pt idx="1">
-                  <c:v>0.6698</c:v>
+                  <c:v>0.6716862982366143</c:v>
                 </c:pt>
                 <c:pt idx="2">
-                  <c:v>0.3061</c:v>
+                  <c:v>0.6405396660228062</c:v>
                 </c:pt>
                 <c:pt idx="3">
-                  <c:v>0.2482</c:v>
+                  <c:v>0.6258775186389773</c:v>
                 </c:pt>
                 <c:pt idx="4">
-                  <c:v>0.2387</c:v>
+                  <c:v>0.6054324236992638</c:v>
                 </c:pt>
                 <c:pt idx="5">
-                  <c:v>0.232</c:v>
+                  <c:v>0.5852474948432317</c:v>
                 </c:pt>
                 <c:pt idx="6">
-                  <c:v>0.226</c:v>
+                  <c:v>0.5719685397426122</c:v>
                 </c:pt>
                 <c:pt idx="7">
-                  <c:v>0.2204</c:v>
+                  <c:v>0.559595369675697</c:v>
                 </c:pt>
                 <c:pt idx="8">
-                  <c:v>0.2144</c:v>
+                  <c:v>0.5511809337678089</c:v>
                 </c:pt>
                 <c:pt idx="9">
-                  <c:v>0.2069</c:v>
+                  <c:v>0.5457582214380715</c:v>
                 </c:pt>
                 <c:pt idx="10">
-                  <c:v>0.1954</c:v>
+                  <c:v>0.5333534825209845</c:v>
                 </c:pt>
                 <c:pt idx="11">
-                  <c:v>0.176</c:v>
+                  <c:v>0.530439733111525</c:v>
                 </c:pt>
                 <c:pt idx="12">
-                  <c:v>0.1518</c:v>
+                  <c:v>0.5241033297823271</c:v>
                 </c:pt>
                 <c:pt idx="13">
-                  <c:v>0.1387</c:v>
+                  <c:v>0.5040970203654529</c:v>
                 </c:pt>
                 <c:pt idx="14">
-                  <c:v>0.1351</c:v>
+                  <c:v>0.39331626447260043</c:v>
                 </c:pt>
                 <c:pt idx="15">
-                  <c:v>0.1321</c:v>
+                  <c:v>0.27440228162207053</c:v>
                 </c:pt>
                 <c:pt idx="16">
-                  <c:v>0.1305</c:v>
+                  <c:v>0.22166575661293636</c:v>
                 </c:pt>
                 <c:pt idx="17">
-                  <c:v>0.1288</c:v>
+                  <c:v>0.2118567515000898</c:v>
                 </c:pt>
                 <c:pt idx="18">
-                  <c:v>0.1277</c:v>
+                  <c:v>0.1983696106582512</c:v>
                 </c:pt>
                 <c:pt idx="19">
-                  <c:v>0.1267</c:v>
+                  <c:v>0.18769289642232506</c:v>
                 </c:pt>
                 <c:pt idx="20">
-                  <c:v>0.1256</c:v>
+                  <c:v>0.15552580333560687</c:v>
                 </c:pt>
                 <c:pt idx="21">
-                  <c:v>0.1246</c:v>
+                  <c:v>0.15120095926991944</c:v>
                 </c:pt>
                 <c:pt idx="22">
-                  <c:v>0.124</c:v>
+                  <c:v>0.13551735248084107</c:v>
                 </c:pt>
                 <c:pt idx="23">
-                  <c:v>0.123</c:v>
+                  <c:v>0.13312302983679256</c:v>
                 </c:pt>
                 <c:pt idx="24">
-                  <c:v>0.1225</c:v>
+                  <c:v>0.12495550930222739</c:v>
+                </c:pt>
+                <c:pt idx="25">
+                  <c:v>0.1323844160013443</c:v>
                 </c:pt>
               </c:numCache>
             </c:numRef>
@@ -1135,170 +1135,174 @@
             </c:spPr>
           </c:marker>
           <c:cat>
-            <c:multiLvlStrRef>
-              <c:f>Sheet1!$A$2:$A$26</c:f>
-              <c:multiLvlStrCache>
-                <c:ptCount val="25"/>
-                <c:lvl>
-                  <c:pt idx="0">
-                    <c:v>1</c:v>
-                  </c:pt>
-                  <c:pt idx="1">
-                    <c:v>2</c:v>
-                  </c:pt>
-                  <c:pt idx="2">
-                    <c:v>3</c:v>
-                  </c:pt>
-                  <c:pt idx="3">
-                    <c:v>4</c:v>
-                  </c:pt>
-                  <c:pt idx="4">
-                    <c:v>5</c:v>
-                  </c:pt>
-                  <c:pt idx="5">
-                    <c:v>6</c:v>
-                  </c:pt>
-                  <c:pt idx="6">
-                    <c:v>7</c:v>
-                  </c:pt>
-                  <c:pt idx="7">
-                    <c:v>8</c:v>
-                  </c:pt>
-                  <c:pt idx="8">
-                    <c:v>9</c:v>
-                  </c:pt>
-                  <c:pt idx="9">
-                    <c:v>10</c:v>
-                  </c:pt>
-                  <c:pt idx="10">
-                    <c:v>11</c:v>
-                  </c:pt>
-                  <c:pt idx="11">
-                    <c:v>12</c:v>
-                  </c:pt>
-                  <c:pt idx="12">
-                    <c:v>13</c:v>
-                  </c:pt>
-                  <c:pt idx="13">
-                    <c:v>14</c:v>
-                  </c:pt>
-                  <c:pt idx="14">
-                    <c:v>15</c:v>
-                  </c:pt>
-                  <c:pt idx="15">
-                    <c:v>16</c:v>
-                  </c:pt>
-                  <c:pt idx="16">
-                    <c:v>17</c:v>
-                  </c:pt>
-                  <c:pt idx="17">
-                    <c:v>18</c:v>
-                  </c:pt>
-                  <c:pt idx="18">
-                    <c:v>19</c:v>
-                  </c:pt>
-                  <c:pt idx="19">
-                    <c:v>20</c:v>
-                  </c:pt>
-                  <c:pt idx="20">
-                    <c:v>21</c:v>
-                  </c:pt>
-                  <c:pt idx="21">
-                    <c:v>22</c:v>
-                  </c:pt>
-                  <c:pt idx="22">
-                    <c:v>23</c:v>
-                  </c:pt>
-                  <c:pt idx="23">
-                    <c:v>24</c:v>
-                  </c:pt>
-                  <c:pt idx="24">
-                    <c:v>25</c:v>
-                  </c:pt>
-                </c:lvl>
-              </c:multiLvlStrCache>
-            </c:multiLvlStrRef>
+            <c:strRef>
+              <c:f>Sheet1!$A$2:$A$27</c:f>
+              <c:strCache>
+                <c:ptCount val="26"/>
+                <c:pt idx="0">
+                  <c:v>1</c:v>
+                </c:pt>
+                <c:pt idx="1">
+                  <c:v>2</c:v>
+                </c:pt>
+                <c:pt idx="2">
+                  <c:v>3</c:v>
+                </c:pt>
+                <c:pt idx="3">
+                  <c:v>4</c:v>
+                </c:pt>
+                <c:pt idx="4">
+                  <c:v>5</c:v>
+                </c:pt>
+                <c:pt idx="5">
+                  <c:v>6</c:v>
+                </c:pt>
+                <c:pt idx="6">
+                  <c:v>7</c:v>
+                </c:pt>
+                <c:pt idx="7">
+                  <c:v>8</c:v>
+                </c:pt>
+                <c:pt idx="8">
+                  <c:v>9</c:v>
+                </c:pt>
+                <c:pt idx="9">
+                  <c:v>10</c:v>
+                </c:pt>
+                <c:pt idx="10">
+                  <c:v>11</c:v>
+                </c:pt>
+                <c:pt idx="11">
+                  <c:v>12</c:v>
+                </c:pt>
+                <c:pt idx="12">
+                  <c:v>13</c:v>
+                </c:pt>
+                <c:pt idx="13">
+                  <c:v>14</c:v>
+                </c:pt>
+                <c:pt idx="14">
+                  <c:v>15</c:v>
+                </c:pt>
+                <c:pt idx="15">
+                  <c:v>16</c:v>
+                </c:pt>
+                <c:pt idx="16">
+                  <c:v>17</c:v>
+                </c:pt>
+                <c:pt idx="17">
+                  <c:v>18</c:v>
+                </c:pt>
+                <c:pt idx="18">
+                  <c:v>19</c:v>
+                </c:pt>
+                <c:pt idx="19">
+                  <c:v>20</c:v>
+                </c:pt>
+                <c:pt idx="20">
+                  <c:v>21</c:v>
+                </c:pt>
+                <c:pt idx="21">
+                  <c:v>22</c:v>
+                </c:pt>
+                <c:pt idx="22">
+                  <c:v>23</c:v>
+                </c:pt>
+                <c:pt idx="23">
+                  <c:v>24</c:v>
+                </c:pt>
+                <c:pt idx="24">
+                  <c:v>25</c:v>
+                </c:pt>
+                <c:pt idx="25">
+                  <c:v>26</c:v>
+                </c:pt>
+              </c:strCache>
+            </c:strRef>
           </c:cat>
           <c:val>
             <c:numRef>
-              <c:f>Sheet1!$C$2:$C$26</c:f>
+              <c:f>Sheet1!$C$2:$C$27</c:f>
               <c:numCache>
                 <c:formatCode>General</c:formatCode>
-                <c:ptCount val="25"/>
+                <c:ptCount val="26"/>
                 <c:pt idx="0">
-                  <c:v>0.7948</c:v>
+                  <c:v>0.7241976733761605</c:v>
                 </c:pt>
                 <c:pt idx="1">
-                  <c:v>0.5577</c:v>
+                  <c:v>0.6850392628197718</c:v>
                 </c:pt>
                 <c:pt idx="2">
-                  <c:v>0.2151</c:v>
+                  <c:v>0.6959452468939502</c:v>
                 </c:pt>
                 <c:pt idx="3">
-                  <c:v>0.1954</c:v>
+                  <c:v>0.682761547842411</c:v>
                 </c:pt>
                 <c:pt idx="4">
-                  <c:v>0.1851</c:v>
+                  <c:v>0.6599839728890043</c:v>
                 </c:pt>
                 <c:pt idx="5">
-                  <c:v>0.1743</c:v>
+                  <c:v>0.7340150889724192</c:v>
                 </c:pt>
                 <c:pt idx="6">
-                  <c:v>0.1639</c:v>
+                  <c:v>0.6364823413015616</c:v>
                 </c:pt>
                 <c:pt idx="7">
-                  <c:v>0.1545</c:v>
+                  <c:v>0.6686184111869696</c:v>
                 </c:pt>
                 <c:pt idx="8">
-                  <c:v>0.1425</c:v>
+                  <c:v>0.6190387472359821</c:v>
                 </c:pt>
                 <c:pt idx="9">
-                  <c:v>0.1305</c:v>
+                  <c:v>0.6756226591991655</c:v>
                 </c:pt>
                 <c:pt idx="10">
-                  <c:v>0.114</c:v>
+                  <c:v>0.6636489960280332</c:v>
                 </c:pt>
                 <c:pt idx="11">
-                  <c:v>0.0992</c:v>
+                  <c:v>0.6497670922014448</c:v>
                 </c:pt>
                 <c:pt idx="12">
-                  <c:v>0.0828</c:v>
+                  <c:v>0.6405030076551919</c:v>
                 </c:pt>
                 <c:pt idx="13">
-                  <c:v>0.0777</c:v>
+                  <c:v>0.6142508258873766</c:v>
                 </c:pt>
                 <c:pt idx="14">
-                  <c:v>0.076</c:v>
+                  <c:v>0.7783243935698093</c:v>
                 </c:pt>
                 <c:pt idx="15">
-                  <c:v>0.0743</c:v>
+                  <c:v>0.6540343891739736</c:v>
                 </c:pt>
                 <c:pt idx="16">
-                  <c:v>0.0729</c:v>
+                  <c:v>0.4788734911928057</c:v>
                 </c:pt>
                 <c:pt idx="17">
-                  <c:v>0.072</c:v>
+                  <c:v>0.917313073438885</c:v>
                 </c:pt>
                 <c:pt idx="18">
-                  <c:v>0.0709</c:v>
+                  <c:v>0.46188998705821555</c:v>
                 </c:pt>
                 <c:pt idx="19">
-                  <c:v>0.07</c:v>
+                  <c:v>0.645144132113865</c:v>
                 </c:pt>
                 <c:pt idx="20">
-                  <c:v>0.0697</c:v>
+                  <c:v>0.7205391848697962</c:v>
                 </c:pt>
                 <c:pt idx="21">
-                  <c:v>0.0684</c:v>
+                  <c:v>0.8649230360868387</c:v>
                 </c:pt>
                 <c:pt idx="22">
-                  <c:v>0.068</c:v>
+                  <c:v>0.6426219131372386</c:v>
                 </c:pt>
                 <c:pt idx="23">
-                  <c:v>0.0673</c:v>
+                  <c:v>0.9602486543974653</c:v>
                 </c:pt>
                 <c:pt idx="24">
-                  <c:v>0.0666</c:v>
+                  <c:v>0.734017995961657</c:v>
+                </c:pt>
+                <c:pt idx="25">
+                  <c:v>0.834212543764575</c:v>
                 </c:pt>
               </c:numCache>
             </c:numRef>
@@ -1491,7 +1495,7 @@
                 </a:solidFill>
                 <a:latin typeface="Arial"/>
               </a:rPr>
-              <a:t>RGB + DTM + Hillshade</a:t>
+              <a:t>RGB + Hillshade</a:t>
             </a:r>
           </a:p>
         </c:rich>
@@ -1574,170 +1578,186 @@
             </c:spPr>
           </c:marker>
           <c:cat>
-            <c:multiLvlStrRef>
-              <c:f>Sheet1!$A$2:$A$26</c:f>
-              <c:multiLvlStrCache>
-                <c:ptCount val="25"/>
-                <c:lvl>
-                  <c:pt idx="0">
-                    <c:v>1</c:v>
-                  </c:pt>
-                  <c:pt idx="1">
-                    <c:v>2</c:v>
-                  </c:pt>
-                  <c:pt idx="2">
-                    <c:v>3</c:v>
-                  </c:pt>
-                  <c:pt idx="3">
-                    <c:v>4</c:v>
-                  </c:pt>
-                  <c:pt idx="4">
-                    <c:v>5</c:v>
-                  </c:pt>
-                  <c:pt idx="5">
-                    <c:v>6</c:v>
-                  </c:pt>
-                  <c:pt idx="6">
-                    <c:v>7</c:v>
-                  </c:pt>
-                  <c:pt idx="7">
-                    <c:v>8</c:v>
-                  </c:pt>
-                  <c:pt idx="8">
-                    <c:v>9</c:v>
-                  </c:pt>
-                  <c:pt idx="9">
-                    <c:v>10</c:v>
-                  </c:pt>
-                  <c:pt idx="10">
-                    <c:v>11</c:v>
-                  </c:pt>
-                  <c:pt idx="11">
-                    <c:v>12</c:v>
-                  </c:pt>
-                  <c:pt idx="12">
-                    <c:v>13</c:v>
-                  </c:pt>
-                  <c:pt idx="13">
-                    <c:v>14</c:v>
-                  </c:pt>
-                  <c:pt idx="14">
-                    <c:v>15</c:v>
-                  </c:pt>
-                  <c:pt idx="15">
-                    <c:v>16</c:v>
-                  </c:pt>
-                  <c:pt idx="16">
-                    <c:v>17</c:v>
-                  </c:pt>
-                  <c:pt idx="17">
-                    <c:v>18</c:v>
-                  </c:pt>
-                  <c:pt idx="18">
-                    <c:v>19</c:v>
-                  </c:pt>
-                  <c:pt idx="19">
-                    <c:v>20</c:v>
-                  </c:pt>
-                  <c:pt idx="20">
-                    <c:v>21</c:v>
-                  </c:pt>
-                  <c:pt idx="21">
-                    <c:v>22</c:v>
-                  </c:pt>
-                  <c:pt idx="22">
-                    <c:v>23</c:v>
-                  </c:pt>
-                  <c:pt idx="23">
-                    <c:v>24</c:v>
-                  </c:pt>
-                  <c:pt idx="24">
-                    <c:v>25</c:v>
-                  </c:pt>
-                </c:lvl>
-              </c:multiLvlStrCache>
-            </c:multiLvlStrRef>
+            <c:strRef>
+              <c:f>Sheet1!$A$2:$A$29</c:f>
+              <c:strCache>
+                <c:ptCount val="28"/>
+                <c:pt idx="0">
+                  <c:v>1</c:v>
+                </c:pt>
+                <c:pt idx="1">
+                  <c:v>2</c:v>
+                </c:pt>
+                <c:pt idx="2">
+                  <c:v>3</c:v>
+                </c:pt>
+                <c:pt idx="3">
+                  <c:v>4</c:v>
+                </c:pt>
+                <c:pt idx="4">
+                  <c:v>5</c:v>
+                </c:pt>
+                <c:pt idx="5">
+                  <c:v>6</c:v>
+                </c:pt>
+                <c:pt idx="6">
+                  <c:v>7</c:v>
+                </c:pt>
+                <c:pt idx="7">
+                  <c:v>8</c:v>
+                </c:pt>
+                <c:pt idx="8">
+                  <c:v>9</c:v>
+                </c:pt>
+                <c:pt idx="9">
+                  <c:v>10</c:v>
+                </c:pt>
+                <c:pt idx="10">
+                  <c:v>11</c:v>
+                </c:pt>
+                <c:pt idx="11">
+                  <c:v>12</c:v>
+                </c:pt>
+                <c:pt idx="12">
+                  <c:v>13</c:v>
+                </c:pt>
+                <c:pt idx="13">
+                  <c:v>14</c:v>
+                </c:pt>
+                <c:pt idx="14">
+                  <c:v>15</c:v>
+                </c:pt>
+                <c:pt idx="15">
+                  <c:v>16</c:v>
+                </c:pt>
+                <c:pt idx="16">
+                  <c:v>17</c:v>
+                </c:pt>
+                <c:pt idx="17">
+                  <c:v>18</c:v>
+                </c:pt>
+                <c:pt idx="18">
+                  <c:v>19</c:v>
+                </c:pt>
+                <c:pt idx="19">
+                  <c:v>20</c:v>
+                </c:pt>
+                <c:pt idx="20">
+                  <c:v>21</c:v>
+                </c:pt>
+                <c:pt idx="21">
+                  <c:v>22</c:v>
+                </c:pt>
+                <c:pt idx="22">
+                  <c:v>23</c:v>
+                </c:pt>
+                <c:pt idx="23">
+                  <c:v>24</c:v>
+                </c:pt>
+                <c:pt idx="24">
+                  <c:v>25</c:v>
+                </c:pt>
+                <c:pt idx="25">
+                  <c:v>26</c:v>
+                </c:pt>
+                <c:pt idx="26">
+                  <c:v>27</c:v>
+                </c:pt>
+                <c:pt idx="27">
+                  <c:v>28</c:v>
+                </c:pt>
+              </c:strCache>
+            </c:strRef>
           </c:cat>
           <c:val>
             <c:numRef>
-              <c:f>Sheet1!$B$2:$B$26</c:f>
+              <c:f>Sheet1!$B$2:$B$29</c:f>
               <c:numCache>
                 <c:formatCode>General</c:formatCode>
-                <c:ptCount val="25"/>
+                <c:ptCount val="28"/>
                 <c:pt idx="0">
-                  <c:v>0.6026</c:v>
+                  <c:v>0.7698671238043704</c:v>
                 </c:pt>
                 <c:pt idx="1">
-                  <c:v>0.5567</c:v>
+                  <c:v>0.6833745073804112</c:v>
                 </c:pt>
                 <c:pt idx="2">
-                  <c:v>0.3731</c:v>
+                  <c:v>0.6493184771089594</c:v>
                 </c:pt>
                 <c:pt idx="3">
-                  <c:v>0.2449</c:v>
+                  <c:v>0.6353986186154325</c:v>
                 </c:pt>
                 <c:pt idx="4">
-                  <c:v>0.2195</c:v>
+                  <c:v>0.6084982565759832</c:v>
                 </c:pt>
                 <c:pt idx="5">
-                  <c:v>0.203</c:v>
+                  <c:v>0.5835710102819673</c:v>
                 </c:pt>
                 <c:pt idx="6">
-                  <c:v>0.1905</c:v>
+                  <c:v>0.5702433413440879</c:v>
                 </c:pt>
                 <c:pt idx="7">
-                  <c:v>0.1816</c:v>
+                  <c:v>0.5624179231808485</c:v>
                 </c:pt>
                 <c:pt idx="8">
-                  <c:v>0.1745</c:v>
+                  <c:v>0.556961748906362</c:v>
                 </c:pt>
                 <c:pt idx="9">
-                  <c:v>0.1612</c:v>
+                  <c:v>0.5455115362691567</c:v>
                 </c:pt>
                 <c:pt idx="10">
-                  <c:v>0.1431</c:v>
+                  <c:v>0.53648944194653</c:v>
                 </c:pt>
                 <c:pt idx="11">
-                  <c:v>0.1279</c:v>
+                  <c:v>0.5312945966490814</c:v>
                 </c:pt>
                 <c:pt idx="12">
-                  <c:v>0.1188</c:v>
+                  <c:v>0.5235293481159891</c:v>
                 </c:pt>
                 <c:pt idx="13">
-                  <c:v>0.1141</c:v>
+                  <c:v>0.479555700175965</c:v>
                 </c:pt>
                 <c:pt idx="14">
-                  <c:v>0.1119</c:v>
+                  <c:v>0.2882149956498798</c:v>
                 </c:pt>
                 <c:pt idx="15">
-                  <c:v>0.1103</c:v>
+                  <c:v>0.21759968585512562</c:v>
                 </c:pt>
                 <c:pt idx="16">
-                  <c:v>0.1091</c:v>
+                  <c:v>0.1926735968341201</c:v>
                 </c:pt>
                 <c:pt idx="17">
-                  <c:v>0.1078</c:v>
+                  <c:v>0.18302044064800463</c:v>
                 </c:pt>
                 <c:pt idx="18">
-                  <c:v>0.1069</c:v>
+                  <c:v>0.1759034129932239</c:v>
                 </c:pt>
                 <c:pt idx="19">
-                  <c:v>0.1062</c:v>
+                  <c:v>0.1696429017007449</c:v>
                 </c:pt>
                 <c:pt idx="20">
-                  <c:v>0.1053</c:v>
+                  <c:v>0.17426053329649593</c:v>
                 </c:pt>
                 <c:pt idx="21">
-                  <c:v>0.1048</c:v>
+                  <c:v>0.16545036966511956</c:v>
                 </c:pt>
                 <c:pt idx="22">
-                  <c:v>0.1042</c:v>
+                  <c:v>0.14277895272936303</c:v>
                 </c:pt>
                 <c:pt idx="23">
-                  <c:v>0.1037</c:v>
+                  <c:v>0.13862660482456848</c:v>
                 </c:pt>
                 <c:pt idx="24">
-                  <c:v>0.1034</c:v>
+                  <c:v>0.129146654248566</c:v>
+                </c:pt>
+                <c:pt idx="25">
+                  <c:v>0.12404041283855775</c:v>
+                </c:pt>
+                <c:pt idx="26">
+                  <c:v>0.1294507235101289</c:v>
+                </c:pt>
+                <c:pt idx="27">
+                  <c:v>0.12694307415915684</c:v>
                 </c:pt>
               </c:numCache>
             </c:numRef>
@@ -1814,170 +1834,186 @@
             </c:spPr>
           </c:marker>
           <c:cat>
-            <c:multiLvlStrRef>
-              <c:f>Sheet1!$A$2:$A$26</c:f>
-              <c:multiLvlStrCache>
-                <c:ptCount val="25"/>
-                <c:lvl>
-                  <c:pt idx="0">
-                    <c:v>1</c:v>
-                  </c:pt>
-                  <c:pt idx="1">
-                    <c:v>2</c:v>
-                  </c:pt>
-                  <c:pt idx="2">
-                    <c:v>3</c:v>
-                  </c:pt>
-                  <c:pt idx="3">
-                    <c:v>4</c:v>
-                  </c:pt>
-                  <c:pt idx="4">
-                    <c:v>5</c:v>
-                  </c:pt>
-                  <c:pt idx="5">
-                    <c:v>6</c:v>
-                  </c:pt>
-                  <c:pt idx="6">
-                    <c:v>7</c:v>
-                  </c:pt>
-                  <c:pt idx="7">
-                    <c:v>8</c:v>
-                  </c:pt>
-                  <c:pt idx="8">
-                    <c:v>9</c:v>
-                  </c:pt>
-                  <c:pt idx="9">
-                    <c:v>10</c:v>
-                  </c:pt>
-                  <c:pt idx="10">
-                    <c:v>11</c:v>
-                  </c:pt>
-                  <c:pt idx="11">
-                    <c:v>12</c:v>
-                  </c:pt>
-                  <c:pt idx="12">
-                    <c:v>13</c:v>
-                  </c:pt>
-                  <c:pt idx="13">
-                    <c:v>14</c:v>
-                  </c:pt>
-                  <c:pt idx="14">
-                    <c:v>15</c:v>
-                  </c:pt>
-                  <c:pt idx="15">
-                    <c:v>16</c:v>
-                  </c:pt>
-                  <c:pt idx="16">
-                    <c:v>17</c:v>
-                  </c:pt>
-                  <c:pt idx="17">
-                    <c:v>18</c:v>
-                  </c:pt>
-                  <c:pt idx="18">
-                    <c:v>19</c:v>
-                  </c:pt>
-                  <c:pt idx="19">
-                    <c:v>20</c:v>
-                  </c:pt>
-                  <c:pt idx="20">
-                    <c:v>21</c:v>
-                  </c:pt>
-                  <c:pt idx="21">
-                    <c:v>22</c:v>
-                  </c:pt>
-                  <c:pt idx="22">
-                    <c:v>23</c:v>
-                  </c:pt>
-                  <c:pt idx="23">
-                    <c:v>24</c:v>
-                  </c:pt>
-                  <c:pt idx="24">
-                    <c:v>25</c:v>
-                  </c:pt>
-                </c:lvl>
-              </c:multiLvlStrCache>
-            </c:multiLvlStrRef>
+            <c:strRef>
+              <c:f>Sheet1!$A$2:$A$29</c:f>
+              <c:strCache>
+                <c:ptCount val="28"/>
+                <c:pt idx="0">
+                  <c:v>1</c:v>
+                </c:pt>
+                <c:pt idx="1">
+                  <c:v>2</c:v>
+                </c:pt>
+                <c:pt idx="2">
+                  <c:v>3</c:v>
+                </c:pt>
+                <c:pt idx="3">
+                  <c:v>4</c:v>
+                </c:pt>
+                <c:pt idx="4">
+                  <c:v>5</c:v>
+                </c:pt>
+                <c:pt idx="5">
+                  <c:v>6</c:v>
+                </c:pt>
+                <c:pt idx="6">
+                  <c:v>7</c:v>
+                </c:pt>
+                <c:pt idx="7">
+                  <c:v>8</c:v>
+                </c:pt>
+                <c:pt idx="8">
+                  <c:v>9</c:v>
+                </c:pt>
+                <c:pt idx="9">
+                  <c:v>10</c:v>
+                </c:pt>
+                <c:pt idx="10">
+                  <c:v>11</c:v>
+                </c:pt>
+                <c:pt idx="11">
+                  <c:v>12</c:v>
+                </c:pt>
+                <c:pt idx="12">
+                  <c:v>13</c:v>
+                </c:pt>
+                <c:pt idx="13">
+                  <c:v>14</c:v>
+                </c:pt>
+                <c:pt idx="14">
+                  <c:v>15</c:v>
+                </c:pt>
+                <c:pt idx="15">
+                  <c:v>16</c:v>
+                </c:pt>
+                <c:pt idx="16">
+                  <c:v>17</c:v>
+                </c:pt>
+                <c:pt idx="17">
+                  <c:v>18</c:v>
+                </c:pt>
+                <c:pt idx="18">
+                  <c:v>19</c:v>
+                </c:pt>
+                <c:pt idx="19">
+                  <c:v>20</c:v>
+                </c:pt>
+                <c:pt idx="20">
+                  <c:v>21</c:v>
+                </c:pt>
+                <c:pt idx="21">
+                  <c:v>22</c:v>
+                </c:pt>
+                <c:pt idx="22">
+                  <c:v>23</c:v>
+                </c:pt>
+                <c:pt idx="23">
+                  <c:v>24</c:v>
+                </c:pt>
+                <c:pt idx="24">
+                  <c:v>25</c:v>
+                </c:pt>
+                <c:pt idx="25">
+                  <c:v>26</c:v>
+                </c:pt>
+                <c:pt idx="26">
+                  <c:v>27</c:v>
+                </c:pt>
+                <c:pt idx="27">
+                  <c:v>28</c:v>
+                </c:pt>
+              </c:strCache>
+            </c:strRef>
           </c:cat>
           <c:val>
             <c:numRef>
-              <c:f>Sheet1!$C$2:$C$26</c:f>
+              <c:f>Sheet1!$C$2:$C$29</c:f>
               <c:numCache>
                 <c:formatCode>General</c:formatCode>
-                <c:ptCount val="25"/>
+                <c:ptCount val="28"/>
                 <c:pt idx="0">
-                  <c:v>0.623</c:v>
+                  <c:v>0.7609095744111322</c:v>
                 </c:pt>
                 <c:pt idx="1">
-                  <c:v>0.5247</c:v>
+                  <c:v>0.6832659858645815</c:v>
                 </c:pt>
                 <c:pt idx="2">
-                  <c:v>0.1441</c:v>
+                  <c:v>0.6849814166926375</c:v>
                 </c:pt>
                 <c:pt idx="3">
-                  <c:v>0.1327</c:v>
+                  <c:v>0.6620209049094807</c:v>
                 </c:pt>
                 <c:pt idx="4">
-                  <c:v>0.1271</c:v>
+                  <c:v>0.6556426493808477</c:v>
                 </c:pt>
                 <c:pt idx="5">
-                  <c:v>0.1227</c:v>
+                  <c:v>0.6774610560349744</c:v>
                 </c:pt>
                 <c:pt idx="6">
-                  <c:v>0.1234</c:v>
+                  <c:v>0.6541085795320646</c:v>
                 </c:pt>
                 <c:pt idx="7">
-                  <c:v>0.1217</c:v>
+                  <c:v>0.6423479660291864</c:v>
                 </c:pt>
                 <c:pt idx="8">
-                  <c:v>0.1187</c:v>
+                  <c:v>0.6227386364431092</c:v>
                 </c:pt>
                 <c:pt idx="9">
-                  <c:v>0.123</c:v>
+                  <c:v>0.7233509865674106</c:v>
                 </c:pt>
                 <c:pt idx="10">
-                  <c:v>0.1121</c:v>
+                  <c:v>0.6485494456507943</c:v>
                 </c:pt>
                 <c:pt idx="11">
-                  <c:v>0.1048</c:v>
+                  <c:v>0.6533757502382452</c:v>
                 </c:pt>
                 <c:pt idx="12">
-                  <c:v>0.0929</c:v>
+                  <c:v>0.6405634343022047</c:v>
                 </c:pt>
                 <c:pt idx="13">
-                  <c:v>0.0892</c:v>
+                  <c:v>0.599212779971357</c:v>
                 </c:pt>
                 <c:pt idx="14">
-                  <c:v>0.0811</c:v>
+                  <c:v>1.291609896732626</c:v>
                 </c:pt>
                 <c:pt idx="15">
-                  <c:v>0.0794</c:v>
+                  <c:v>0.4980591382548234</c:v>
                 </c:pt>
                 <c:pt idx="16">
-                  <c:v>0.0791</c:v>
+                  <c:v>1.0409070548550812</c:v>
                 </c:pt>
                 <c:pt idx="17">
-                  <c:v>0.0758</c:v>
+                  <c:v>1.3964907768910604</c:v>
                 </c:pt>
                 <c:pt idx="18">
-                  <c:v>0.0756</c:v>
+                  <c:v>0.5722050778011585</c:v>
                 </c:pt>
                 <c:pt idx="19">
-                  <c:v>0.0713</c:v>
+                  <c:v>0.566979760861057</c:v>
                 </c:pt>
                 <c:pt idx="20">
-                  <c:v>0.0686</c:v>
+                  <c:v>1.0291081860607194</c:v>
                 </c:pt>
                 <c:pt idx="21">
-                  <c:v>0.0679</c:v>
+                  <c:v>1.04127157956744</c:v>
                 </c:pt>
                 <c:pt idx="22">
-                  <c:v>0.0677</c:v>
+                  <c:v>0.9083429423472908</c:v>
                 </c:pt>
                 <c:pt idx="23">
-                  <c:v>0.0675</c:v>
+                  <c:v>1.1569247885265654</c:v>
                 </c:pt>
                 <c:pt idx="24">
-                  <c:v>0.0661</c:v>
+                  <c:v>1.1536557988604315</c:v>
+                </c:pt>
+                <c:pt idx="25">
+                  <c:v>0.9476527245781846</c:v>
+                </c:pt>
+                <c:pt idx="26">
+                  <c:v>1.073492283956269</c:v>
+                </c:pt>
+                <c:pt idx="27">
+                  <c:v>0.7963167386106679</c:v>
                 </c:pt>
               </c:numCache>
             </c:numRef>
@@ -2170,7 +2206,7 @@
                 </a:solidFill>
                 <a:latin typeface="Arial"/>
               </a:rPr>
-              <a:t>RGB + DTM + Hillshade + Slope</a:t>
+              <a:t>RGB + Slope</a:t>
             </a:r>
           </a:p>
         </c:rich>
@@ -2253,170 +2289,144 @@
             </c:spPr>
           </c:marker>
           <c:cat>
-            <c:multiLvlStrRef>
-              <c:f>Sheet1!$A$2:$A$26</c:f>
-              <c:multiLvlStrCache>
-                <c:ptCount val="25"/>
-                <c:lvl>
-                  <c:pt idx="0">
-                    <c:v>1</c:v>
-                  </c:pt>
-                  <c:pt idx="1">
-                    <c:v>2</c:v>
-                  </c:pt>
-                  <c:pt idx="2">
-                    <c:v>3</c:v>
-                  </c:pt>
-                  <c:pt idx="3">
-                    <c:v>4</c:v>
-                  </c:pt>
-                  <c:pt idx="4">
-                    <c:v>5</c:v>
-                  </c:pt>
-                  <c:pt idx="5">
-                    <c:v>6</c:v>
-                  </c:pt>
-                  <c:pt idx="6">
-                    <c:v>7</c:v>
-                  </c:pt>
-                  <c:pt idx="7">
-                    <c:v>8</c:v>
-                  </c:pt>
-                  <c:pt idx="8">
-                    <c:v>9</c:v>
-                  </c:pt>
-                  <c:pt idx="9">
-                    <c:v>10</c:v>
-                  </c:pt>
-                  <c:pt idx="10">
-                    <c:v>11</c:v>
-                  </c:pt>
-                  <c:pt idx="11">
-                    <c:v>12</c:v>
-                  </c:pt>
-                  <c:pt idx="12">
-                    <c:v>13</c:v>
-                  </c:pt>
-                  <c:pt idx="13">
-                    <c:v>14</c:v>
-                  </c:pt>
-                  <c:pt idx="14">
-                    <c:v>15</c:v>
-                  </c:pt>
-                  <c:pt idx="15">
-                    <c:v>16</c:v>
-                  </c:pt>
-                  <c:pt idx="16">
-                    <c:v>17</c:v>
-                  </c:pt>
-                  <c:pt idx="17">
-                    <c:v>18</c:v>
-                  </c:pt>
-                  <c:pt idx="18">
-                    <c:v>19</c:v>
-                  </c:pt>
-                  <c:pt idx="19">
-                    <c:v>20</c:v>
-                  </c:pt>
-                  <c:pt idx="20">
-                    <c:v>21</c:v>
-                  </c:pt>
-                  <c:pt idx="21">
-                    <c:v>22</c:v>
-                  </c:pt>
-                  <c:pt idx="22">
-                    <c:v>23</c:v>
-                  </c:pt>
-                  <c:pt idx="23">
-                    <c:v>24</c:v>
-                  </c:pt>
-                  <c:pt idx="24">
-                    <c:v>25</c:v>
-                  </c:pt>
-                </c:lvl>
-              </c:multiLvlStrCache>
-            </c:multiLvlStrRef>
+            <c:strRef>
+              <c:f>Sheet1!$A$2:$A$22</c:f>
+              <c:strCache>
+                <c:ptCount val="21"/>
+                <c:pt idx="0">
+                  <c:v>1</c:v>
+                </c:pt>
+                <c:pt idx="1">
+                  <c:v>2</c:v>
+                </c:pt>
+                <c:pt idx="2">
+                  <c:v>3</c:v>
+                </c:pt>
+                <c:pt idx="3">
+                  <c:v>4</c:v>
+                </c:pt>
+                <c:pt idx="4">
+                  <c:v>5</c:v>
+                </c:pt>
+                <c:pt idx="5">
+                  <c:v>6</c:v>
+                </c:pt>
+                <c:pt idx="6">
+                  <c:v>7</c:v>
+                </c:pt>
+                <c:pt idx="7">
+                  <c:v>8</c:v>
+                </c:pt>
+                <c:pt idx="8">
+                  <c:v>9</c:v>
+                </c:pt>
+                <c:pt idx="9">
+                  <c:v>10</c:v>
+                </c:pt>
+                <c:pt idx="10">
+                  <c:v>11</c:v>
+                </c:pt>
+                <c:pt idx="11">
+                  <c:v>12</c:v>
+                </c:pt>
+                <c:pt idx="12">
+                  <c:v>13</c:v>
+                </c:pt>
+                <c:pt idx="13">
+                  <c:v>14</c:v>
+                </c:pt>
+                <c:pt idx="14">
+                  <c:v>15</c:v>
+                </c:pt>
+                <c:pt idx="15">
+                  <c:v>16</c:v>
+                </c:pt>
+                <c:pt idx="16">
+                  <c:v>17</c:v>
+                </c:pt>
+                <c:pt idx="17">
+                  <c:v>18</c:v>
+                </c:pt>
+                <c:pt idx="18">
+                  <c:v>19</c:v>
+                </c:pt>
+                <c:pt idx="19">
+                  <c:v>20</c:v>
+                </c:pt>
+                <c:pt idx="20">
+                  <c:v>21</c:v>
+                </c:pt>
+              </c:strCache>
+            </c:strRef>
           </c:cat>
           <c:val>
             <c:numRef>
-              <c:f>Sheet1!$B$2:$B$26</c:f>
+              <c:f>Sheet1!$B$2:$B$22</c:f>
               <c:numCache>
                 <c:formatCode>General</c:formatCode>
-                <c:ptCount val="25"/>
+                <c:ptCount val="21"/>
                 <c:pt idx="0">
-                  <c:v>0.8073</c:v>
+                  <c:v>0.7455932287358585</c:v>
                 </c:pt>
                 <c:pt idx="1">
-                  <c:v>0.7596</c:v>
+                  <c:v>0.6599940990033</c:v>
                 </c:pt>
                 <c:pt idx="2">
-                  <c:v>0.4254</c:v>
+                  <c:v>0.6274634214258846</c:v>
                 </c:pt>
                 <c:pt idx="3">
-                  <c:v>0.2613</c:v>
+                  <c:v>0.6153720917622295</c:v>
                 </c:pt>
                 <c:pt idx="4">
-                  <c:v>0.239</c:v>
+                  <c:v>0.6032217238752137</c:v>
                 </c:pt>
                 <c:pt idx="5">
-                  <c:v>0.2265</c:v>
+                  <c:v>0.5762532156255542</c:v>
                 </c:pt>
                 <c:pt idx="6">
-                  <c:v>0.2183</c:v>
+                  <c:v>0.5658331434156553</c:v>
                 </c:pt>
                 <c:pt idx="7">
-                  <c:v>0.2122</c:v>
+                  <c:v>0.5544435120564993</c:v>
                 </c:pt>
                 <c:pt idx="8">
-                  <c:v>0.2071</c:v>
+                  <c:v>0.5463607085914146</c:v>
                 </c:pt>
                 <c:pt idx="9">
-                  <c:v>0.2027</c:v>
+                  <c:v>0.5401093544596933</c:v>
                 </c:pt>
                 <c:pt idx="10">
-                  <c:v>0.1982</c:v>
+                  <c:v>0.5285683743908319</c:v>
                 </c:pt>
                 <c:pt idx="11">
-                  <c:v>0.1928</c:v>
+                  <c:v>0.5173978157549796</c:v>
                 </c:pt>
                 <c:pt idx="12">
-                  <c:v>0.187</c:v>
+                  <c:v>0.42749255305241435</c:v>
                 </c:pt>
                 <c:pt idx="13">
-                  <c:v>0.1768</c:v>
+                  <c:v>0.3414271529553406</c:v>
                 </c:pt>
                 <c:pt idx="14">
-                  <c:v>0.1604</c:v>
+                  <c:v>0.29669199405921703</c:v>
                 </c:pt>
                 <c:pt idx="15">
-                  <c:v>0.149</c:v>
+                  <c:v>0.21166352089660675</c:v>
                 </c:pt>
                 <c:pt idx="16">
-                  <c:v>0.1411</c:v>
+                  <c:v>0.1847305812868514</c:v>
                 </c:pt>
                 <c:pt idx="17">
-                  <c:v>0.136</c:v>
+                  <c:v>0.1766832626426392</c:v>
                 </c:pt>
                 <c:pt idx="18">
-                  <c:v>0.132</c:v>
+                  <c:v>0.17261353407351823</c:v>
                 </c:pt>
                 <c:pt idx="19">
-                  <c:v>0.1283</c:v>
+                  <c:v>0.15360945192738262</c:v>
                 </c:pt>
                 <c:pt idx="20">
-                  <c:v>0.1244</c:v>
-                </c:pt>
-                <c:pt idx="21">
-                  <c:v>0.1216</c:v>
-                </c:pt>
-                <c:pt idx="22">
-                  <c:v>0.12</c:v>
-                </c:pt>
-                <c:pt idx="23">
-                  <c:v>0.1189</c:v>
-                </c:pt>
-                <c:pt idx="24">
-                  <c:v>0.118</c:v>
+                  <c:v>0.17036141411990402</c:v>
                 </c:pt>
               </c:numCache>
             </c:numRef>
@@ -2493,170 +2503,144 @@
             </c:spPr>
           </c:marker>
           <c:cat>
-            <c:multiLvlStrRef>
-              <c:f>Sheet1!$A$2:$A$26</c:f>
-              <c:multiLvlStrCache>
-                <c:ptCount val="25"/>
-                <c:lvl>
-                  <c:pt idx="0">
-                    <c:v>1</c:v>
-                  </c:pt>
-                  <c:pt idx="1">
-                    <c:v>2</c:v>
-                  </c:pt>
-                  <c:pt idx="2">
-                    <c:v>3</c:v>
-                  </c:pt>
-                  <c:pt idx="3">
-                    <c:v>4</c:v>
-                  </c:pt>
-                  <c:pt idx="4">
-                    <c:v>5</c:v>
-                  </c:pt>
-                  <c:pt idx="5">
-                    <c:v>6</c:v>
-                  </c:pt>
-                  <c:pt idx="6">
-                    <c:v>7</c:v>
-                  </c:pt>
-                  <c:pt idx="7">
-                    <c:v>8</c:v>
-                  </c:pt>
-                  <c:pt idx="8">
-                    <c:v>9</c:v>
-                  </c:pt>
-                  <c:pt idx="9">
-                    <c:v>10</c:v>
-                  </c:pt>
-                  <c:pt idx="10">
-                    <c:v>11</c:v>
-                  </c:pt>
-                  <c:pt idx="11">
-                    <c:v>12</c:v>
-                  </c:pt>
-                  <c:pt idx="12">
-                    <c:v>13</c:v>
-                  </c:pt>
-                  <c:pt idx="13">
-                    <c:v>14</c:v>
-                  </c:pt>
-                  <c:pt idx="14">
-                    <c:v>15</c:v>
-                  </c:pt>
-                  <c:pt idx="15">
-                    <c:v>16</c:v>
-                  </c:pt>
-                  <c:pt idx="16">
-                    <c:v>17</c:v>
-                  </c:pt>
-                  <c:pt idx="17">
-                    <c:v>18</c:v>
-                  </c:pt>
-                  <c:pt idx="18">
-                    <c:v>19</c:v>
-                  </c:pt>
-                  <c:pt idx="19">
-                    <c:v>20</c:v>
-                  </c:pt>
-                  <c:pt idx="20">
-                    <c:v>21</c:v>
-                  </c:pt>
-                  <c:pt idx="21">
-                    <c:v>22</c:v>
-                  </c:pt>
-                  <c:pt idx="22">
-                    <c:v>23</c:v>
-                  </c:pt>
-                  <c:pt idx="23">
-                    <c:v>24</c:v>
-                  </c:pt>
-                  <c:pt idx="24">
-                    <c:v>25</c:v>
-                  </c:pt>
-                </c:lvl>
-              </c:multiLvlStrCache>
-            </c:multiLvlStrRef>
+            <c:strRef>
+              <c:f>Sheet1!$A$2:$A$22</c:f>
+              <c:strCache>
+                <c:ptCount val="21"/>
+                <c:pt idx="0">
+                  <c:v>1</c:v>
+                </c:pt>
+                <c:pt idx="1">
+                  <c:v>2</c:v>
+                </c:pt>
+                <c:pt idx="2">
+                  <c:v>3</c:v>
+                </c:pt>
+                <c:pt idx="3">
+                  <c:v>4</c:v>
+                </c:pt>
+                <c:pt idx="4">
+                  <c:v>5</c:v>
+                </c:pt>
+                <c:pt idx="5">
+                  <c:v>6</c:v>
+                </c:pt>
+                <c:pt idx="6">
+                  <c:v>7</c:v>
+                </c:pt>
+                <c:pt idx="7">
+                  <c:v>8</c:v>
+                </c:pt>
+                <c:pt idx="8">
+                  <c:v>9</c:v>
+                </c:pt>
+                <c:pt idx="9">
+                  <c:v>10</c:v>
+                </c:pt>
+                <c:pt idx="10">
+                  <c:v>11</c:v>
+                </c:pt>
+                <c:pt idx="11">
+                  <c:v>12</c:v>
+                </c:pt>
+                <c:pt idx="12">
+                  <c:v>13</c:v>
+                </c:pt>
+                <c:pt idx="13">
+                  <c:v>14</c:v>
+                </c:pt>
+                <c:pt idx="14">
+                  <c:v>15</c:v>
+                </c:pt>
+                <c:pt idx="15">
+                  <c:v>16</c:v>
+                </c:pt>
+                <c:pt idx="16">
+                  <c:v>17</c:v>
+                </c:pt>
+                <c:pt idx="17">
+                  <c:v>18</c:v>
+                </c:pt>
+                <c:pt idx="18">
+                  <c:v>19</c:v>
+                </c:pt>
+                <c:pt idx="19">
+                  <c:v>20</c:v>
+                </c:pt>
+                <c:pt idx="20">
+                  <c:v>21</c:v>
+                </c:pt>
+              </c:strCache>
+            </c:strRef>
           </c:cat>
           <c:val>
             <c:numRef>
-              <c:f>Sheet1!$C$2:$C$26</c:f>
+              <c:f>Sheet1!$C$2:$C$22</c:f>
               <c:numCache>
                 <c:formatCode>General</c:formatCode>
-                <c:ptCount val="25"/>
+                <c:ptCount val="21"/>
                 <c:pt idx="0">
-                  <c:v>0.8467</c:v>
+                  <c:v>0.6955695228143172</c:v>
                 </c:pt>
                 <c:pt idx="1">
-                  <c:v>0.7361</c:v>
+                  <c:v>0.6578097156804017</c:v>
                 </c:pt>
                 <c:pt idx="2">
-                  <c:v>0.1732</c:v>
+                  <c:v>0.6611928092710899</c:v>
                 </c:pt>
                 <c:pt idx="3">
-                  <c:v>0.1918</c:v>
+                  <c:v>0.6410858780446679</c:v>
                 </c:pt>
                 <c:pt idx="4">
-                  <c:v>0.1831</c:v>
+                  <c:v>0.641723370130616</c:v>
                 </c:pt>
                 <c:pt idx="5">
-                  <c:v>0.1743</c:v>
+                  <c:v>0.6815913969820196</c:v>
                 </c:pt>
                 <c:pt idx="6">
-                  <c:v>0.1726</c:v>
+                  <c:v>0.6276080864848512</c:v>
                 </c:pt>
                 <c:pt idx="7">
-                  <c:v>0.1703</c:v>
+                  <c:v>0.6503788040141867</c:v>
                 </c:pt>
                 <c:pt idx="8">
-                  <c:v>0.1811</c:v>
+                  <c:v>0.6117429849475321</c:v>
                 </c:pt>
                 <c:pt idx="9">
-                  <c:v>0.1791</c:v>
+                  <c:v>0.6233222805490397</c:v>
                 </c:pt>
                 <c:pt idx="10">
-                  <c:v>0.1795</c:v>
+                  <c:v>0.6689406585813773</c:v>
                 </c:pt>
                 <c:pt idx="11">
-                  <c:v>0.179</c:v>
+                  <c:v>0.5743710392578082</c:v>
                 </c:pt>
                 <c:pt idx="12">
-                  <c:v>0.1575</c:v>
+                  <c:v>0.4328018363546392</c:v>
                 </c:pt>
                 <c:pt idx="13">
-                  <c:v>0.1189</c:v>
+                  <c:v>0.6073791781311026</c:v>
                 </c:pt>
                 <c:pt idx="14">
-                  <c:v>0.1084</c:v>
+                  <c:v>0.4942218600622392</c:v>
                 </c:pt>
                 <c:pt idx="15">
-                  <c:v>0.0978</c:v>
+                  <c:v>0.42994444187804925</c:v>
                 </c:pt>
                 <c:pt idx="16">
-                  <c:v>0.0959</c:v>
+                  <c:v>0.48472943321301665</c:v>
                 </c:pt>
                 <c:pt idx="17">
-                  <c:v>0.095</c:v>
+                  <c:v>0.5262223783260986</c:v>
                 </c:pt>
                 <c:pt idx="18">
-                  <c:v>0.095</c:v>
+                  <c:v>0.4628253514315686</c:v>
                 </c:pt>
                 <c:pt idx="19">
-                  <c:v>0.0966</c:v>
+                  <c:v>0.4542454427696125</c:v>
                 </c:pt>
                 <c:pt idx="20">
-                  <c:v>0.1016</c:v>
-                </c:pt>
-                <c:pt idx="21">
-                  <c:v>0.1084</c:v>
-                </c:pt>
-                <c:pt idx="22">
-                  <c:v>0.1228</c:v>
-                </c:pt>
-                <c:pt idx="23">
-                  <c:v>0.1342</c:v>
-                </c:pt>
-                <c:pt idx="24">
-                  <c:v>0.1355</c:v>
+                  <c:v>0.4870400851400748</c:v>
                 </c:pt>
               </c:numCache>
             </c:numRef>
@@ -2881,28 +2865,24 @@
             <c:showLeaderLines val="0"/>
           </c:dLbls>
           <c:cat>
-            <c:multiLvlStrRef>
+            <c:strRef>
               <c:f>Sheet1!$A$2:$A$5</c:f>
-              <c:multiLvlStrCache>
+              <c:strCache>
                 <c:ptCount val="4"/>
-                <c:lvl>
-                  <c:pt idx="0">
-                    <c:v>RGB</c:v>
-                  </c:pt>
-                  <c:pt idx="1">
-                    <c:v>RGB+DTM</c:v>
-                  </c:pt>
-                  <c:pt idx="2">
-                    <c:v>RGB+DTM
-+Hillshade</c:v>
-                  </c:pt>
-                  <c:pt idx="3">
-                    <c:v>RGB+DTM
-+Hillshade+Slope</c:v>
-                  </c:pt>
-                </c:lvl>
-              </c:multiLvlStrCache>
-            </c:multiLvlStrRef>
+                <c:pt idx="0">
+                  <c:v>RGB</c:v>
+                </c:pt>
+                <c:pt idx="1">
+                  <c:v>RGB + DTM</c:v>
+                </c:pt>
+                <c:pt idx="2">
+                  <c:v>RGB + Hillshade</c:v>
+                </c:pt>
+                <c:pt idx="3">
+                  <c:v>RGB + Slope</c:v>
+                </c:pt>
+              </c:strCache>
+            </c:strRef>
           </c:cat>
           <c:val>
             <c:numRef>
@@ -2911,16 +2891,16 @@
                 <c:formatCode>General</c:formatCode>
                 <c:ptCount val="4"/>
                 <c:pt idx="0">
-                  <c:v>0</c:v>
+                  <c:v>0.44</c:v>
                 </c:pt>
                 <c:pt idx="1">
-                  <c:v>0.482</c:v>
+                  <c:v>0.593</c:v>
                 </c:pt>
                 <c:pt idx="2">
-                  <c:v>0</c:v>
+                  <c:v>0.42</c:v>
                 </c:pt>
                 <c:pt idx="3">
-                  <c:v>0.491</c:v>
+                  <c:v>0.439</c:v>
                 </c:pt>
               </c:numCache>
             </c:numRef>
@@ -2972,28 +2952,24 @@
             <c:showLeaderLines val="0"/>
           </c:dLbls>
           <c:cat>
-            <c:multiLvlStrRef>
+            <c:strRef>
               <c:f>Sheet1!$A$2:$A$5</c:f>
-              <c:multiLvlStrCache>
+              <c:strCache>
                 <c:ptCount val="4"/>
-                <c:lvl>
-                  <c:pt idx="0">
-                    <c:v>RGB</c:v>
-                  </c:pt>
-                  <c:pt idx="1">
-                    <c:v>RGB+DTM</c:v>
-                  </c:pt>
-                  <c:pt idx="2">
-                    <c:v>RGB+DTM
-+Hillshade</c:v>
-                  </c:pt>
-                  <c:pt idx="3">
-                    <c:v>RGB+DTM
-+Hillshade+Slope</c:v>
-                  </c:pt>
-                </c:lvl>
-              </c:multiLvlStrCache>
-            </c:multiLvlStrRef>
+                <c:pt idx="0">
+                  <c:v>RGB</c:v>
+                </c:pt>
+                <c:pt idx="1">
+                  <c:v>RGB + DTM</c:v>
+                </c:pt>
+                <c:pt idx="2">
+                  <c:v>RGB + Hillshade</c:v>
+                </c:pt>
+                <c:pt idx="3">
+                  <c:v>RGB + Slope</c:v>
+                </c:pt>
+              </c:strCache>
+            </c:strRef>
           </c:cat>
           <c:val>
             <c:numRef>
@@ -3002,16 +2978,16 @@
                 <c:formatCode>General</c:formatCode>
                 <c:ptCount val="4"/>
                 <c:pt idx="0">
-                  <c:v>0</c:v>
+                  <c:v>0.949</c:v>
                 </c:pt>
                 <c:pt idx="1">
-                  <c:v>0.0002</c:v>
+                  <c:v>0.825</c:v>
                 </c:pt>
                 <c:pt idx="2">
-                  <c:v>0</c:v>
+                  <c:v>0.932</c:v>
                 </c:pt>
                 <c:pt idx="3">
-                  <c:v>0.736</c:v>
+                  <c:v>0.911</c:v>
                 </c:pt>
               </c:numCache>
             </c:numRef>
@@ -3063,28 +3039,24 @@
             <c:showLeaderLines val="0"/>
           </c:dLbls>
           <c:cat>
-            <c:multiLvlStrRef>
+            <c:strRef>
               <c:f>Sheet1!$A$2:$A$5</c:f>
-              <c:multiLvlStrCache>
+              <c:strCache>
                 <c:ptCount val="4"/>
-                <c:lvl>
-                  <c:pt idx="0">
-                    <c:v>RGB</c:v>
-                  </c:pt>
-                  <c:pt idx="1">
-                    <c:v>RGB+DTM</c:v>
-                  </c:pt>
-                  <c:pt idx="2">
-                    <c:v>RGB+DTM
-+Hillshade</c:v>
-                  </c:pt>
-                  <c:pt idx="3">
-                    <c:v>RGB+DTM
-+Hillshade+Slope</c:v>
-                  </c:pt>
-                </c:lvl>
-              </c:multiLvlStrCache>
-            </c:multiLvlStrRef>
+                <c:pt idx="0">
+                  <c:v>RGB</c:v>
+                </c:pt>
+                <c:pt idx="1">
+                  <c:v>RGB + DTM</c:v>
+                </c:pt>
+                <c:pt idx="2">
+                  <c:v>RGB + Hillshade</c:v>
+                </c:pt>
+                <c:pt idx="3">
+                  <c:v>RGB + Slope</c:v>
+                </c:pt>
+              </c:strCache>
+            </c:strRef>
           </c:cat>
           <c:val>
             <c:numRef>
@@ -3093,13 +3065,13 @@
                 <c:formatCode>General</c:formatCode>
                 <c:ptCount val="4"/>
                 <c:pt idx="0">
-                  <c:v>0</c:v>
+                  <c:v>0.599</c:v>
                 </c:pt>
                 <c:pt idx="1">
-                  <c:v>0.0005</c:v>
+                  <c:v>0.69</c:v>
                 </c:pt>
                 <c:pt idx="2">
-                  <c:v>0</c:v>
+                  <c:v>0.577</c:v>
                 </c:pt>
                 <c:pt idx="3">
                   <c:v>0.589</c:v>
@@ -5439,7 +5411,7 @@
                 <a:ea typeface="Arial" pitchFamily="34" charset="-122"/>
                 <a:cs typeface="Arial" pitchFamily="34" charset="-120"/>
               </a:rPr>
-              <a:t>3 – 6 ch</a:t>
+              <a:t>3 – 4 ch</a:t>
             </a:r>
             <a:endParaRPr lang="en-US" sz="1400" dirty="0"/>
           </a:p>
@@ -6022,7 +5994,7 @@
                 <a:ea typeface="Arial" pitchFamily="34" charset="-122"/>
                 <a:cs typeface="Arial" pitchFamily="34" charset="-120"/>
               </a:rPr>
-              <a:t>RGB + DTM + Hillshade
+              <a:t>RGB + Hillshade
 </a:t>
             </a:r>
             <a:pPr indent="0" marL="0">
@@ -6040,7 +6012,7 @@
                 <a:ea typeface="Arial" pitchFamily="34" charset="-122"/>
                 <a:cs typeface="Arial" pitchFamily="34" charset="-120"/>
               </a:rPr>
-              <a:t>5 channels: + terrain illumination</a:t>
+              <a:t>4 channels: + terrain illumination (independent variant)</a:t>
             </a:r>
             <a:endParaRPr lang="en-US" sz="1600" dirty="0"/>
           </a:p>
@@ -6107,7 +6079,7 @@
                 <a:ea typeface="Arial" pitchFamily="34" charset="-122"/>
                 <a:cs typeface="Arial" pitchFamily="34" charset="-120"/>
               </a:rPr>
-              <a:t>RGB + DTM + Hillshade + Slope
+              <a:t>RGB + Slope
 </a:t>
             </a:r>
             <a:pPr indent="0" marL="0">
@@ -6125,7 +6097,7 @@
                 <a:ea typeface="Arial" pitchFamily="34" charset="-122"/>
                 <a:cs typeface="Arial" pitchFamily="34" charset="-120"/>
               </a:rPr>
-              <a:t>6 channels: + slope gradient (best performer)</a:t>
+              <a:t>4 channels: + slope gradient (independent variant)</a:t>
             </a:r>
             <a:endParaRPr lang="en-US" sz="1600" dirty="0"/>
           </a:p>
@@ -6702,7 +6674,7 @@
                 <a:ea typeface="Arial" pitchFamily="34" charset="-122"/>
                 <a:cs typeface="Arial" pitchFamily="34" charset="-120"/>
               </a:rPr>
-              <a:t>Training and Validation Loss (25 epochs)</a:t>
+              <a:t>Training and Validation Loss (early stopping, 21–28 epochs)</a:t>
             </a:r>
             <a:endParaRPr lang="en-US" sz="1600" dirty="0"/>
           </a:p>
@@ -7219,7 +7191,7 @@
                         <a:buNone/>
                       </a:pPr>
                       <a:r>
-                        <a:rPr lang="en-US" sz="1600" dirty="0">
+                        <a:rPr lang="en-US" sz="1600" dirty="0" b="0">
                           <a:solidFill>
                             <a:srgbClr val="1A1A1A"/>
                           </a:solidFill>
@@ -7273,6 +7245,7 @@
                       <a:headEnd type="none" w="med" len="med"/>
                       <a:tailEnd type="none" w="med" len="med"/>
                     </a:lnB>
+                    <a:noFill/>
                   </a:tcPr>
                 </a:tc>
                 <a:tc>
@@ -7284,7 +7257,7 @@
                         <a:buNone/>
                       </a:pPr>
                       <a:r>
-                        <a:rPr lang="en-US" sz="1600" dirty="0">
+                        <a:rPr lang="en-US" sz="1600" dirty="0" b="0">
                           <a:solidFill>
                             <a:srgbClr val="1A1A1A"/>
                           </a:solidFill>
@@ -7292,7 +7265,7 @@
                           <a:ea typeface="Arial" pitchFamily="34" charset="-122"/>
                           <a:cs typeface="Arial" pitchFamily="34" charset="-120"/>
                         </a:rPr>
-                        <a:t>0.978</a:t>
+                        <a:t>0.972</a:t>
                       </a:r>
                       <a:endParaRPr lang="en-US" sz="1600" dirty="0">
                         <a:latin typeface="Arial" charset="0"/>
@@ -7338,6 +7311,7 @@
                       <a:headEnd type="none" w="med" len="med"/>
                       <a:tailEnd type="none" w="med" len="med"/>
                     </a:lnB>
+                    <a:noFill/>
                   </a:tcPr>
                 </a:tc>
                 <a:tc>
@@ -7349,7 +7323,7 @@
                         <a:buNone/>
                       </a:pPr>
                       <a:r>
-                        <a:rPr lang="en-US" sz="1600" dirty="0">
+                        <a:rPr lang="en-US" sz="1600" dirty="0" b="0">
                           <a:solidFill>
                             <a:srgbClr val="1A1A1A"/>
                           </a:solidFill>
@@ -7357,7 +7331,7 @@
                           <a:ea typeface="Arial" pitchFamily="34" charset="-122"/>
                           <a:cs typeface="Arial" pitchFamily="34" charset="-120"/>
                         </a:rPr>
-                        <a:t>n/a</a:t>
+                        <a:t>0.440</a:t>
                       </a:r>
                       <a:endParaRPr lang="en-US" sz="1600" dirty="0">
                         <a:latin typeface="Arial" charset="0"/>
@@ -7403,6 +7377,7 @@
                       <a:headEnd type="none" w="med" len="med"/>
                       <a:tailEnd type="none" w="med" len="med"/>
                     </a:lnB>
+                    <a:noFill/>
                   </a:tcPr>
                 </a:tc>
                 <a:tc>
@@ -7414,7 +7389,7 @@
                         <a:buNone/>
                       </a:pPr>
                       <a:r>
-                        <a:rPr lang="en-US" sz="1600" dirty="0">
+                        <a:rPr lang="en-US" sz="1600" dirty="0" b="0">
                           <a:solidFill>
                             <a:srgbClr val="1A1A1A"/>
                           </a:solidFill>
@@ -7422,7 +7397,7 @@
                           <a:ea typeface="Arial" pitchFamily="34" charset="-122"/>
                           <a:cs typeface="Arial" pitchFamily="34" charset="-120"/>
                         </a:rPr>
-                        <a:t>≈ 0</a:t>
+                        <a:t>0.949</a:t>
                       </a:r>
                       <a:endParaRPr lang="en-US" sz="1600" dirty="0">
                         <a:latin typeface="Arial" charset="0"/>
@@ -7468,6 +7443,7 @@
                       <a:headEnd type="none" w="med" len="med"/>
                       <a:tailEnd type="none" w="med" len="med"/>
                     </a:lnB>
+                    <a:noFill/>
                   </a:tcPr>
                 </a:tc>
                 <a:tc>
@@ -7479,7 +7455,7 @@
                         <a:buNone/>
                       </a:pPr>
                       <a:r>
-                        <a:rPr lang="en-US" sz="1600" dirty="0">
+                        <a:rPr lang="en-US" sz="1600" dirty="0" b="0">
                           <a:solidFill>
                             <a:srgbClr val="1A1A1A"/>
                           </a:solidFill>
@@ -7487,7 +7463,7 @@
                           <a:ea typeface="Arial" pitchFamily="34" charset="-122"/>
                           <a:cs typeface="Arial" pitchFamily="34" charset="-120"/>
                         </a:rPr>
-                        <a:t>n/a</a:t>
+                        <a:t>0.599</a:t>
                       </a:r>
                       <a:endParaRPr lang="en-US" sz="1600" dirty="0">
                         <a:latin typeface="Arial" charset="0"/>
@@ -7533,6 +7509,7 @@
                       <a:headEnd type="none" w="med" len="med"/>
                       <a:tailEnd type="none" w="med" len="med"/>
                     </a:lnB>
+                    <a:noFill/>
                   </a:tcPr>
                 </a:tc>
               </a:tr>
@@ -7546,7 +7523,7 @@
                         <a:buNone/>
                       </a:pPr>
                       <a:r>
-                        <a:rPr lang="en-US" sz="1600" dirty="0">
+                        <a:rPr lang="en-US" sz="1600" dirty="0" b="1">
                           <a:solidFill>
                             <a:srgbClr val="1A1A1A"/>
                           </a:solidFill>
@@ -7554,661 +7531,7 @@
                           <a:ea typeface="Arial" pitchFamily="34" charset="-122"/>
                           <a:cs typeface="Arial" pitchFamily="34" charset="-120"/>
                         </a:rPr>
-                        <a:t>RGB + DTM</a:t>
-                      </a:r>
-                      <a:endParaRPr lang="en-US" sz="1600" dirty="0">
-                        <a:latin typeface="Arial" charset="0"/>
-                        <a:ea typeface="Arial" charset="0"/>
-                        <a:cs typeface="Arial" charset="0"/>
-                      </a:endParaRPr>
-                    </a:p>
-                  </a:txBody>
-                  <a:tcPr marL="91440" marR="91440" marT="45720" marB="45720" anchor="ctr">
-                    <a:lnL w="6350" cap="flat" cmpd="sng" algn="ctr">
-                      <a:solidFill>
-                        <a:srgbClr val="DDDDDD"/>
-                      </a:solidFill>
-                      <a:prstDash val="solid"/>
-                      <a:round/>
-                      <a:headEnd type="none" w="med" len="med"/>
-                      <a:tailEnd type="none" w="med" len="med"/>
-                    </a:lnL>
-                    <a:lnR w="6350" cap="flat" cmpd="sng" algn="ctr">
-                      <a:solidFill>
-                        <a:srgbClr val="DDDDDD"/>
-                      </a:solidFill>
-                      <a:prstDash val="solid"/>
-                      <a:round/>
-                      <a:headEnd type="none" w="med" len="med"/>
-                      <a:tailEnd type="none" w="med" len="med"/>
-                    </a:lnR>
-                    <a:lnT w="6350" cap="flat" cmpd="sng" algn="ctr">
-                      <a:solidFill>
-                        <a:srgbClr val="DDDDDD"/>
-                      </a:solidFill>
-                      <a:prstDash val="solid"/>
-                      <a:round/>
-                      <a:headEnd type="none" w="med" len="med"/>
-                      <a:tailEnd type="none" w="med" len="med"/>
-                    </a:lnT>
-                    <a:lnB w="6350" cap="flat" cmpd="sng" algn="ctr">
-                      <a:solidFill>
-                        <a:srgbClr val="DDDDDD"/>
-                      </a:solidFill>
-                      <a:prstDash val="solid"/>
-                      <a:round/>
-                      <a:headEnd type="none" w="med" len="med"/>
-                      <a:tailEnd type="none" w="med" len="med"/>
-                    </a:lnB>
-                  </a:tcPr>
-                </a:tc>
-                <a:tc>
-                  <a:txBody>
-                    <a:bodyPr/>
-                    <a:lstStyle/>
-                    <a:p>
-                      <a:pPr algn="ctr" indent="0" marL="0">
-                        <a:buNone/>
-                      </a:pPr>
-                      <a:r>
-                        <a:rPr lang="en-US" sz="1600" dirty="0">
-                          <a:solidFill>
-                            <a:srgbClr val="1A1A1A"/>
-                          </a:solidFill>
-                          <a:latin typeface="Arial" pitchFamily="34" charset="0"/>
-                          <a:ea typeface="Arial" pitchFamily="34" charset="-122"/>
-                          <a:cs typeface="Arial" pitchFamily="34" charset="-120"/>
-                        </a:rPr>
-                        <a:t>0.978</a:t>
-                      </a:r>
-                      <a:endParaRPr lang="en-US" sz="1600" dirty="0">
-                        <a:latin typeface="Arial" charset="0"/>
-                        <a:ea typeface="Arial" charset="0"/>
-                        <a:cs typeface="Arial" charset="0"/>
-                      </a:endParaRPr>
-                    </a:p>
-                  </a:txBody>
-                  <a:tcPr marL="91440" marR="91440" marT="45720" marB="45720" anchor="ctr">
-                    <a:lnL w="6350" cap="flat" cmpd="sng" algn="ctr">
-                      <a:solidFill>
-                        <a:srgbClr val="DDDDDD"/>
-                      </a:solidFill>
-                      <a:prstDash val="solid"/>
-                      <a:round/>
-                      <a:headEnd type="none" w="med" len="med"/>
-                      <a:tailEnd type="none" w="med" len="med"/>
-                    </a:lnL>
-                    <a:lnR w="6350" cap="flat" cmpd="sng" algn="ctr">
-                      <a:solidFill>
-                        <a:srgbClr val="DDDDDD"/>
-                      </a:solidFill>
-                      <a:prstDash val="solid"/>
-                      <a:round/>
-                      <a:headEnd type="none" w="med" len="med"/>
-                      <a:tailEnd type="none" w="med" len="med"/>
-                    </a:lnR>
-                    <a:lnT w="6350" cap="flat" cmpd="sng" algn="ctr">
-                      <a:solidFill>
-                        <a:srgbClr val="DDDDDD"/>
-                      </a:solidFill>
-                      <a:prstDash val="solid"/>
-                      <a:round/>
-                      <a:headEnd type="none" w="med" len="med"/>
-                      <a:tailEnd type="none" w="med" len="med"/>
-                    </a:lnT>
-                    <a:lnB w="6350" cap="flat" cmpd="sng" algn="ctr">
-                      <a:solidFill>
-                        <a:srgbClr val="DDDDDD"/>
-                      </a:solidFill>
-                      <a:prstDash val="solid"/>
-                      <a:round/>
-                      <a:headEnd type="none" w="med" len="med"/>
-                      <a:tailEnd type="none" w="med" len="med"/>
-                    </a:lnB>
-                  </a:tcPr>
-                </a:tc>
-                <a:tc>
-                  <a:txBody>
-                    <a:bodyPr/>
-                    <a:lstStyle/>
-                    <a:p>
-                      <a:pPr algn="ctr" indent="0" marL="0">
-                        <a:buNone/>
-                      </a:pPr>
-                      <a:r>
-                        <a:rPr lang="en-US" sz="1600" dirty="0">
-                          <a:solidFill>
-                            <a:srgbClr val="1A1A1A"/>
-                          </a:solidFill>
-                          <a:latin typeface="Arial" pitchFamily="34" charset="0"/>
-                          <a:ea typeface="Arial" pitchFamily="34" charset="-122"/>
-                          <a:cs typeface="Arial" pitchFamily="34" charset="-120"/>
-                        </a:rPr>
-                        <a:t>0.482</a:t>
-                      </a:r>
-                      <a:endParaRPr lang="en-US" sz="1600" dirty="0">
-                        <a:latin typeface="Arial" charset="0"/>
-                        <a:ea typeface="Arial" charset="0"/>
-                        <a:cs typeface="Arial" charset="0"/>
-                      </a:endParaRPr>
-                    </a:p>
-                  </a:txBody>
-                  <a:tcPr marL="91440" marR="91440" marT="45720" marB="45720" anchor="ctr">
-                    <a:lnL w="6350" cap="flat" cmpd="sng" algn="ctr">
-                      <a:solidFill>
-                        <a:srgbClr val="DDDDDD"/>
-                      </a:solidFill>
-                      <a:prstDash val="solid"/>
-                      <a:round/>
-                      <a:headEnd type="none" w="med" len="med"/>
-                      <a:tailEnd type="none" w="med" len="med"/>
-                    </a:lnL>
-                    <a:lnR w="6350" cap="flat" cmpd="sng" algn="ctr">
-                      <a:solidFill>
-                        <a:srgbClr val="DDDDDD"/>
-                      </a:solidFill>
-                      <a:prstDash val="solid"/>
-                      <a:round/>
-                      <a:headEnd type="none" w="med" len="med"/>
-                      <a:tailEnd type="none" w="med" len="med"/>
-                    </a:lnR>
-                    <a:lnT w="6350" cap="flat" cmpd="sng" algn="ctr">
-                      <a:solidFill>
-                        <a:srgbClr val="DDDDDD"/>
-                      </a:solidFill>
-                      <a:prstDash val="solid"/>
-                      <a:round/>
-                      <a:headEnd type="none" w="med" len="med"/>
-                      <a:tailEnd type="none" w="med" len="med"/>
-                    </a:lnT>
-                    <a:lnB w="6350" cap="flat" cmpd="sng" algn="ctr">
-                      <a:solidFill>
-                        <a:srgbClr val="DDDDDD"/>
-                      </a:solidFill>
-                      <a:prstDash val="solid"/>
-                      <a:round/>
-                      <a:headEnd type="none" w="med" len="med"/>
-                      <a:tailEnd type="none" w="med" len="med"/>
-                    </a:lnB>
-                  </a:tcPr>
-                </a:tc>
-                <a:tc>
-                  <a:txBody>
-                    <a:bodyPr/>
-                    <a:lstStyle/>
-                    <a:p>
-                      <a:pPr algn="ctr" indent="0" marL="0">
-                        <a:buNone/>
-                      </a:pPr>
-                      <a:r>
-                        <a:rPr lang="en-US" sz="1600" dirty="0">
-                          <a:solidFill>
-                            <a:srgbClr val="1A1A1A"/>
-                          </a:solidFill>
-                          <a:latin typeface="Arial" pitchFamily="34" charset="0"/>
-                          <a:ea typeface="Arial" pitchFamily="34" charset="-122"/>
-                          <a:cs typeface="Arial" pitchFamily="34" charset="-120"/>
-                        </a:rPr>
-                        <a:t>≈ 0</a:t>
-                      </a:r>
-                      <a:endParaRPr lang="en-US" sz="1600" dirty="0">
-                        <a:latin typeface="Arial" charset="0"/>
-                        <a:ea typeface="Arial" charset="0"/>
-                        <a:cs typeface="Arial" charset="0"/>
-                      </a:endParaRPr>
-                    </a:p>
-                  </a:txBody>
-                  <a:tcPr marL="91440" marR="91440" marT="45720" marB="45720" anchor="ctr">
-                    <a:lnL w="6350" cap="flat" cmpd="sng" algn="ctr">
-                      <a:solidFill>
-                        <a:srgbClr val="DDDDDD"/>
-                      </a:solidFill>
-                      <a:prstDash val="solid"/>
-                      <a:round/>
-                      <a:headEnd type="none" w="med" len="med"/>
-                      <a:tailEnd type="none" w="med" len="med"/>
-                    </a:lnL>
-                    <a:lnR w="6350" cap="flat" cmpd="sng" algn="ctr">
-                      <a:solidFill>
-                        <a:srgbClr val="DDDDDD"/>
-                      </a:solidFill>
-                      <a:prstDash val="solid"/>
-                      <a:round/>
-                      <a:headEnd type="none" w="med" len="med"/>
-                      <a:tailEnd type="none" w="med" len="med"/>
-                    </a:lnR>
-                    <a:lnT w="6350" cap="flat" cmpd="sng" algn="ctr">
-                      <a:solidFill>
-                        <a:srgbClr val="DDDDDD"/>
-                      </a:solidFill>
-                      <a:prstDash val="solid"/>
-                      <a:round/>
-                      <a:headEnd type="none" w="med" len="med"/>
-                      <a:tailEnd type="none" w="med" len="med"/>
-                    </a:lnT>
-                    <a:lnB w="6350" cap="flat" cmpd="sng" algn="ctr">
-                      <a:solidFill>
-                        <a:srgbClr val="DDDDDD"/>
-                      </a:solidFill>
-                      <a:prstDash val="solid"/>
-                      <a:round/>
-                      <a:headEnd type="none" w="med" len="med"/>
-                      <a:tailEnd type="none" w="med" len="med"/>
-                    </a:lnB>
-                  </a:tcPr>
-                </a:tc>
-                <a:tc>
-                  <a:txBody>
-                    <a:bodyPr/>
-                    <a:lstStyle/>
-                    <a:p>
-                      <a:pPr algn="ctr" indent="0" marL="0">
-                        <a:buNone/>
-                      </a:pPr>
-                      <a:r>
-                        <a:rPr lang="en-US" sz="1600" dirty="0">
-                          <a:solidFill>
-                            <a:srgbClr val="1A1A1A"/>
-                          </a:solidFill>
-                          <a:latin typeface="Arial" pitchFamily="34" charset="0"/>
-                          <a:ea typeface="Arial" pitchFamily="34" charset="-122"/>
-                          <a:cs typeface="Arial" pitchFamily="34" charset="-120"/>
-                        </a:rPr>
-                        <a:t>≈ 0</a:t>
-                      </a:r>
-                      <a:endParaRPr lang="en-US" sz="1600" dirty="0">
-                        <a:latin typeface="Arial" charset="0"/>
-                        <a:ea typeface="Arial" charset="0"/>
-                        <a:cs typeface="Arial" charset="0"/>
-                      </a:endParaRPr>
-                    </a:p>
-                  </a:txBody>
-                  <a:tcPr marL="91440" marR="91440" marT="45720" marB="45720" anchor="ctr">
-                    <a:lnL w="6350" cap="flat" cmpd="sng" algn="ctr">
-                      <a:solidFill>
-                        <a:srgbClr val="DDDDDD"/>
-                      </a:solidFill>
-                      <a:prstDash val="solid"/>
-                      <a:round/>
-                      <a:headEnd type="none" w="med" len="med"/>
-                      <a:tailEnd type="none" w="med" len="med"/>
-                    </a:lnL>
-                    <a:lnR w="6350" cap="flat" cmpd="sng" algn="ctr">
-                      <a:solidFill>
-                        <a:srgbClr val="DDDDDD"/>
-                      </a:solidFill>
-                      <a:prstDash val="solid"/>
-                      <a:round/>
-                      <a:headEnd type="none" w="med" len="med"/>
-                      <a:tailEnd type="none" w="med" len="med"/>
-                    </a:lnR>
-                    <a:lnT w="6350" cap="flat" cmpd="sng" algn="ctr">
-                      <a:solidFill>
-                        <a:srgbClr val="DDDDDD"/>
-                      </a:solidFill>
-                      <a:prstDash val="solid"/>
-                      <a:round/>
-                      <a:headEnd type="none" w="med" len="med"/>
-                      <a:tailEnd type="none" w="med" len="med"/>
-                    </a:lnT>
-                    <a:lnB w="6350" cap="flat" cmpd="sng" algn="ctr">
-                      <a:solidFill>
-                        <a:srgbClr val="DDDDDD"/>
-                      </a:solidFill>
-                      <a:prstDash val="solid"/>
-                      <a:round/>
-                      <a:headEnd type="none" w="med" len="med"/>
-                      <a:tailEnd type="none" w="med" len="med"/>
-                    </a:lnB>
-                  </a:tcPr>
-                </a:tc>
-              </a:tr>
-              <a:tr h="457200">
-                <a:tc>
-                  <a:txBody>
-                    <a:bodyPr/>
-                    <a:lstStyle/>
-                    <a:p>
-                      <a:pPr algn="l" indent="0" marL="0">
-                        <a:buNone/>
-                      </a:pPr>
-                      <a:r>
-                        <a:rPr lang="en-US" sz="1600" dirty="0">
-                          <a:solidFill>
-                            <a:srgbClr val="1A1A1A"/>
-                          </a:solidFill>
-                          <a:latin typeface="Arial" pitchFamily="34" charset="0"/>
-                          <a:ea typeface="Arial" pitchFamily="34" charset="-122"/>
-                          <a:cs typeface="Arial" pitchFamily="34" charset="-120"/>
-                        </a:rPr>
-                        <a:t>RGB + DTM + Hillshade</a:t>
-                      </a:r>
-                      <a:endParaRPr lang="en-US" sz="1600" dirty="0">
-                        <a:latin typeface="Arial" charset="0"/>
-                        <a:ea typeface="Arial" charset="0"/>
-                        <a:cs typeface="Arial" charset="0"/>
-                      </a:endParaRPr>
-                    </a:p>
-                  </a:txBody>
-                  <a:tcPr marL="91440" marR="91440" marT="45720" marB="45720" anchor="ctr">
-                    <a:lnL w="6350" cap="flat" cmpd="sng" algn="ctr">
-                      <a:solidFill>
-                        <a:srgbClr val="DDDDDD"/>
-                      </a:solidFill>
-                      <a:prstDash val="solid"/>
-                      <a:round/>
-                      <a:headEnd type="none" w="med" len="med"/>
-                      <a:tailEnd type="none" w="med" len="med"/>
-                    </a:lnL>
-                    <a:lnR w="6350" cap="flat" cmpd="sng" algn="ctr">
-                      <a:solidFill>
-                        <a:srgbClr val="DDDDDD"/>
-                      </a:solidFill>
-                      <a:prstDash val="solid"/>
-                      <a:round/>
-                      <a:headEnd type="none" w="med" len="med"/>
-                      <a:tailEnd type="none" w="med" len="med"/>
-                    </a:lnR>
-                    <a:lnT w="6350" cap="flat" cmpd="sng" algn="ctr">
-                      <a:solidFill>
-                        <a:srgbClr val="DDDDDD"/>
-                      </a:solidFill>
-                      <a:prstDash val="solid"/>
-                      <a:round/>
-                      <a:headEnd type="none" w="med" len="med"/>
-                      <a:tailEnd type="none" w="med" len="med"/>
-                    </a:lnT>
-                    <a:lnB w="6350" cap="flat" cmpd="sng" algn="ctr">
-                      <a:solidFill>
-                        <a:srgbClr val="DDDDDD"/>
-                      </a:solidFill>
-                      <a:prstDash val="solid"/>
-                      <a:round/>
-                      <a:headEnd type="none" w="med" len="med"/>
-                      <a:tailEnd type="none" w="med" len="med"/>
-                    </a:lnB>
-                  </a:tcPr>
-                </a:tc>
-                <a:tc>
-                  <a:txBody>
-                    <a:bodyPr/>
-                    <a:lstStyle/>
-                    <a:p>
-                      <a:pPr algn="ctr" indent="0" marL="0">
-                        <a:buNone/>
-                      </a:pPr>
-                      <a:r>
-                        <a:rPr lang="en-US" sz="1600" dirty="0">
-                          <a:solidFill>
-                            <a:srgbClr val="1A1A1A"/>
-                          </a:solidFill>
-                          <a:latin typeface="Arial" pitchFamily="34" charset="0"/>
-                          <a:ea typeface="Arial" pitchFamily="34" charset="-122"/>
-                          <a:cs typeface="Arial" pitchFamily="34" charset="-120"/>
-                        </a:rPr>
-                        <a:t>0.978</a:t>
-                      </a:r>
-                      <a:endParaRPr lang="en-US" sz="1600" dirty="0">
-                        <a:latin typeface="Arial" charset="0"/>
-                        <a:ea typeface="Arial" charset="0"/>
-                        <a:cs typeface="Arial" charset="0"/>
-                      </a:endParaRPr>
-                    </a:p>
-                  </a:txBody>
-                  <a:tcPr marL="91440" marR="91440" marT="45720" marB="45720" anchor="ctr">
-                    <a:lnL w="6350" cap="flat" cmpd="sng" algn="ctr">
-                      <a:solidFill>
-                        <a:srgbClr val="DDDDDD"/>
-                      </a:solidFill>
-                      <a:prstDash val="solid"/>
-                      <a:round/>
-                      <a:headEnd type="none" w="med" len="med"/>
-                      <a:tailEnd type="none" w="med" len="med"/>
-                    </a:lnL>
-                    <a:lnR w="6350" cap="flat" cmpd="sng" algn="ctr">
-                      <a:solidFill>
-                        <a:srgbClr val="DDDDDD"/>
-                      </a:solidFill>
-                      <a:prstDash val="solid"/>
-                      <a:round/>
-                      <a:headEnd type="none" w="med" len="med"/>
-                      <a:tailEnd type="none" w="med" len="med"/>
-                    </a:lnR>
-                    <a:lnT w="6350" cap="flat" cmpd="sng" algn="ctr">
-                      <a:solidFill>
-                        <a:srgbClr val="DDDDDD"/>
-                      </a:solidFill>
-                      <a:prstDash val="solid"/>
-                      <a:round/>
-                      <a:headEnd type="none" w="med" len="med"/>
-                      <a:tailEnd type="none" w="med" len="med"/>
-                    </a:lnT>
-                    <a:lnB w="6350" cap="flat" cmpd="sng" algn="ctr">
-                      <a:solidFill>
-                        <a:srgbClr val="DDDDDD"/>
-                      </a:solidFill>
-                      <a:prstDash val="solid"/>
-                      <a:round/>
-                      <a:headEnd type="none" w="med" len="med"/>
-                      <a:tailEnd type="none" w="med" len="med"/>
-                    </a:lnB>
-                  </a:tcPr>
-                </a:tc>
-                <a:tc>
-                  <a:txBody>
-                    <a:bodyPr/>
-                    <a:lstStyle/>
-                    <a:p>
-                      <a:pPr algn="ctr" indent="0" marL="0">
-                        <a:buNone/>
-                      </a:pPr>
-                      <a:r>
-                        <a:rPr lang="en-US" sz="1600" dirty="0">
-                          <a:solidFill>
-                            <a:srgbClr val="1A1A1A"/>
-                          </a:solidFill>
-                          <a:latin typeface="Arial" pitchFamily="34" charset="0"/>
-                          <a:ea typeface="Arial" pitchFamily="34" charset="-122"/>
-                          <a:cs typeface="Arial" pitchFamily="34" charset="-120"/>
-                        </a:rPr>
-                        <a:t>n/a</a:t>
-                      </a:r>
-                      <a:endParaRPr lang="en-US" sz="1600" dirty="0">
-                        <a:latin typeface="Arial" charset="0"/>
-                        <a:ea typeface="Arial" charset="0"/>
-                        <a:cs typeface="Arial" charset="0"/>
-                      </a:endParaRPr>
-                    </a:p>
-                  </a:txBody>
-                  <a:tcPr marL="91440" marR="91440" marT="45720" marB="45720" anchor="ctr">
-                    <a:lnL w="6350" cap="flat" cmpd="sng" algn="ctr">
-                      <a:solidFill>
-                        <a:srgbClr val="DDDDDD"/>
-                      </a:solidFill>
-                      <a:prstDash val="solid"/>
-                      <a:round/>
-                      <a:headEnd type="none" w="med" len="med"/>
-                      <a:tailEnd type="none" w="med" len="med"/>
-                    </a:lnL>
-                    <a:lnR w="6350" cap="flat" cmpd="sng" algn="ctr">
-                      <a:solidFill>
-                        <a:srgbClr val="DDDDDD"/>
-                      </a:solidFill>
-                      <a:prstDash val="solid"/>
-                      <a:round/>
-                      <a:headEnd type="none" w="med" len="med"/>
-                      <a:tailEnd type="none" w="med" len="med"/>
-                    </a:lnR>
-                    <a:lnT w="6350" cap="flat" cmpd="sng" algn="ctr">
-                      <a:solidFill>
-                        <a:srgbClr val="DDDDDD"/>
-                      </a:solidFill>
-                      <a:prstDash val="solid"/>
-                      <a:round/>
-                      <a:headEnd type="none" w="med" len="med"/>
-                      <a:tailEnd type="none" w="med" len="med"/>
-                    </a:lnT>
-                    <a:lnB w="6350" cap="flat" cmpd="sng" algn="ctr">
-                      <a:solidFill>
-                        <a:srgbClr val="DDDDDD"/>
-                      </a:solidFill>
-                      <a:prstDash val="solid"/>
-                      <a:round/>
-                      <a:headEnd type="none" w="med" len="med"/>
-                      <a:tailEnd type="none" w="med" len="med"/>
-                    </a:lnB>
-                  </a:tcPr>
-                </a:tc>
-                <a:tc>
-                  <a:txBody>
-                    <a:bodyPr/>
-                    <a:lstStyle/>
-                    <a:p>
-                      <a:pPr algn="ctr" indent="0" marL="0">
-                        <a:buNone/>
-                      </a:pPr>
-                      <a:r>
-                        <a:rPr lang="en-US" sz="1600" dirty="0">
-                          <a:solidFill>
-                            <a:srgbClr val="1A1A1A"/>
-                          </a:solidFill>
-                          <a:latin typeface="Arial" pitchFamily="34" charset="0"/>
-                          <a:ea typeface="Arial" pitchFamily="34" charset="-122"/>
-                          <a:cs typeface="Arial" pitchFamily="34" charset="-120"/>
-                        </a:rPr>
-                        <a:t>≈ 0</a:t>
-                      </a:r>
-                      <a:endParaRPr lang="en-US" sz="1600" dirty="0">
-                        <a:latin typeface="Arial" charset="0"/>
-                        <a:ea typeface="Arial" charset="0"/>
-                        <a:cs typeface="Arial" charset="0"/>
-                      </a:endParaRPr>
-                    </a:p>
-                  </a:txBody>
-                  <a:tcPr marL="91440" marR="91440" marT="45720" marB="45720" anchor="ctr">
-                    <a:lnL w="6350" cap="flat" cmpd="sng" algn="ctr">
-                      <a:solidFill>
-                        <a:srgbClr val="DDDDDD"/>
-                      </a:solidFill>
-                      <a:prstDash val="solid"/>
-                      <a:round/>
-                      <a:headEnd type="none" w="med" len="med"/>
-                      <a:tailEnd type="none" w="med" len="med"/>
-                    </a:lnL>
-                    <a:lnR w="6350" cap="flat" cmpd="sng" algn="ctr">
-                      <a:solidFill>
-                        <a:srgbClr val="DDDDDD"/>
-                      </a:solidFill>
-                      <a:prstDash val="solid"/>
-                      <a:round/>
-                      <a:headEnd type="none" w="med" len="med"/>
-                      <a:tailEnd type="none" w="med" len="med"/>
-                    </a:lnR>
-                    <a:lnT w="6350" cap="flat" cmpd="sng" algn="ctr">
-                      <a:solidFill>
-                        <a:srgbClr val="DDDDDD"/>
-                      </a:solidFill>
-                      <a:prstDash val="solid"/>
-                      <a:round/>
-                      <a:headEnd type="none" w="med" len="med"/>
-                      <a:tailEnd type="none" w="med" len="med"/>
-                    </a:lnT>
-                    <a:lnB w="6350" cap="flat" cmpd="sng" algn="ctr">
-                      <a:solidFill>
-                        <a:srgbClr val="DDDDDD"/>
-                      </a:solidFill>
-                      <a:prstDash val="solid"/>
-                      <a:round/>
-                      <a:headEnd type="none" w="med" len="med"/>
-                      <a:tailEnd type="none" w="med" len="med"/>
-                    </a:lnB>
-                  </a:tcPr>
-                </a:tc>
-                <a:tc>
-                  <a:txBody>
-                    <a:bodyPr/>
-                    <a:lstStyle/>
-                    <a:p>
-                      <a:pPr algn="ctr" indent="0" marL="0">
-                        <a:buNone/>
-                      </a:pPr>
-                      <a:r>
-                        <a:rPr lang="en-US" sz="1600" dirty="0">
-                          <a:solidFill>
-                            <a:srgbClr val="1A1A1A"/>
-                          </a:solidFill>
-                          <a:latin typeface="Arial" pitchFamily="34" charset="0"/>
-                          <a:ea typeface="Arial" pitchFamily="34" charset="-122"/>
-                          <a:cs typeface="Arial" pitchFamily="34" charset="-120"/>
-                        </a:rPr>
-                        <a:t>n/a</a:t>
-                      </a:r>
-                      <a:endParaRPr lang="en-US" sz="1600" dirty="0">
-                        <a:latin typeface="Arial" charset="0"/>
-                        <a:ea typeface="Arial" charset="0"/>
-                        <a:cs typeface="Arial" charset="0"/>
-                      </a:endParaRPr>
-                    </a:p>
-                  </a:txBody>
-                  <a:tcPr marL="91440" marR="91440" marT="45720" marB="45720" anchor="ctr">
-                    <a:lnL w="6350" cap="flat" cmpd="sng" algn="ctr">
-                      <a:solidFill>
-                        <a:srgbClr val="DDDDDD"/>
-                      </a:solidFill>
-                      <a:prstDash val="solid"/>
-                      <a:round/>
-                      <a:headEnd type="none" w="med" len="med"/>
-                      <a:tailEnd type="none" w="med" len="med"/>
-                    </a:lnL>
-                    <a:lnR w="6350" cap="flat" cmpd="sng" algn="ctr">
-                      <a:solidFill>
-                        <a:srgbClr val="DDDDDD"/>
-                      </a:solidFill>
-                      <a:prstDash val="solid"/>
-                      <a:round/>
-                      <a:headEnd type="none" w="med" len="med"/>
-                      <a:tailEnd type="none" w="med" len="med"/>
-                    </a:lnR>
-                    <a:lnT w="6350" cap="flat" cmpd="sng" algn="ctr">
-                      <a:solidFill>
-                        <a:srgbClr val="DDDDDD"/>
-                      </a:solidFill>
-                      <a:prstDash val="solid"/>
-                      <a:round/>
-                      <a:headEnd type="none" w="med" len="med"/>
-                      <a:tailEnd type="none" w="med" len="med"/>
-                    </a:lnT>
-                    <a:lnB w="6350" cap="flat" cmpd="sng" algn="ctr">
-                      <a:solidFill>
-                        <a:srgbClr val="DDDDDD"/>
-                      </a:solidFill>
-                      <a:prstDash val="solid"/>
-                      <a:round/>
-                      <a:headEnd type="none" w="med" len="med"/>
-                      <a:tailEnd type="none" w="med" len="med"/>
-                    </a:lnB>
-                  </a:tcPr>
-                </a:tc>
-              </a:tr>
-              <a:tr h="457200">
-                <a:tc>
-                  <a:txBody>
-                    <a:bodyPr/>
-                    <a:lstStyle/>
-                    <a:p>
-                      <a:pPr algn="l" indent="0" marL="0">
-                        <a:buNone/>
-                      </a:pPr>
-                      <a:r>
-                        <a:rPr lang="en-US" sz="1600" b="1" dirty="0">
-                          <a:solidFill>
-                            <a:srgbClr val="1A1A1A"/>
-                          </a:solidFill>
-                          <a:latin typeface="Arial" pitchFamily="34" charset="0"/>
-                          <a:ea typeface="Arial" pitchFamily="34" charset="-122"/>
-                          <a:cs typeface="Arial" pitchFamily="34" charset="-120"/>
-                        </a:rPr>
-                        <a:t>RGB + DTM + Hillshade + Slope ★</a:t>
+                        <a:t>RGB + DTM ★</a:t>
                       </a:r>
                       <a:endParaRPr lang="en-US" sz="1600" dirty="0">
                         <a:latin typeface="Arial" charset="0"/>
@@ -8268,7 +7591,7 @@
                         <a:buNone/>
                       </a:pPr>
                       <a:r>
-                        <a:rPr lang="en-US" sz="1600" b="1" dirty="0">
+                        <a:rPr lang="en-US" sz="1600" dirty="0" b="1">
                           <a:solidFill>
                             <a:srgbClr val="1A1A1A"/>
                           </a:solidFill>
@@ -8276,7 +7599,7 @@
                           <a:ea typeface="Arial" pitchFamily="34" charset="-122"/>
                           <a:cs typeface="Arial" pitchFamily="34" charset="-120"/>
                         </a:rPr>
-                        <a:t>0.977</a:t>
+                        <a:t>0.985</a:t>
                       </a:r>
                       <a:endParaRPr lang="en-US" sz="1600" dirty="0">
                         <a:latin typeface="Arial" charset="0"/>
@@ -8336,7 +7659,7 @@
                         <a:buNone/>
                       </a:pPr>
                       <a:r>
-                        <a:rPr lang="en-US" sz="1600" b="1" dirty="0">
+                        <a:rPr lang="en-US" sz="1600" dirty="0" b="1">
                           <a:solidFill>
                             <a:srgbClr val="1A1A1A"/>
                           </a:solidFill>
@@ -8344,7 +7667,7 @@
                           <a:ea typeface="Arial" pitchFamily="34" charset="-122"/>
                           <a:cs typeface="Arial" pitchFamily="34" charset="-120"/>
                         </a:rPr>
-                        <a:t>0.491</a:t>
+                        <a:t>0.593</a:t>
                       </a:r>
                       <a:endParaRPr lang="en-US" sz="1600" dirty="0">
                         <a:latin typeface="Arial" charset="0"/>
@@ -8404,7 +7727,7 @@
                         <a:buNone/>
                       </a:pPr>
                       <a:r>
-                        <a:rPr lang="en-US" sz="1600" b="1" dirty="0">
+                        <a:rPr lang="en-US" sz="1600" dirty="0" b="1">
                           <a:solidFill>
                             <a:srgbClr val="1A1A1A"/>
                           </a:solidFill>
@@ -8412,7 +7735,7 @@
                           <a:ea typeface="Arial" pitchFamily="34" charset="-122"/>
                           <a:cs typeface="Arial" pitchFamily="34" charset="-120"/>
                         </a:rPr>
-                        <a:t>0.736</a:t>
+                        <a:t>0.825</a:t>
                       </a:r>
                       <a:endParaRPr lang="en-US" sz="1600" dirty="0">
                         <a:latin typeface="Arial" charset="0"/>
@@ -8472,7 +7795,1337 @@
                         <a:buNone/>
                       </a:pPr>
                       <a:r>
-                        <a:rPr lang="en-US" sz="1600" b="1" dirty="0">
+                        <a:rPr lang="en-US" sz="1600" dirty="0" b="1">
+                          <a:solidFill>
+                            <a:srgbClr val="1A1A1A"/>
+                          </a:solidFill>
+                          <a:latin typeface="Arial" pitchFamily="34" charset="0"/>
+                          <a:ea typeface="Arial" pitchFamily="34" charset="-122"/>
+                          <a:cs typeface="Arial" pitchFamily="34" charset="-120"/>
+                        </a:rPr>
+                        <a:t>0.690</a:t>
+                      </a:r>
+                      <a:endParaRPr lang="en-US" sz="1600" dirty="0">
+                        <a:latin typeface="Arial" charset="0"/>
+                        <a:ea typeface="Arial" charset="0"/>
+                        <a:cs typeface="Arial" charset="0"/>
+                      </a:endParaRPr>
+                    </a:p>
+                  </a:txBody>
+                  <a:tcPr marL="91440" marR="91440" marT="45720" marB="45720" anchor="ctr">
+                    <a:lnL w="6350" cap="flat" cmpd="sng" algn="ctr">
+                      <a:solidFill>
+                        <a:srgbClr val="DDDDDD"/>
+                      </a:solidFill>
+                      <a:prstDash val="solid"/>
+                      <a:round/>
+                      <a:headEnd type="none" w="med" len="med"/>
+                      <a:tailEnd type="none" w="med" len="med"/>
+                    </a:lnL>
+                    <a:lnR w="6350" cap="flat" cmpd="sng" algn="ctr">
+                      <a:solidFill>
+                        <a:srgbClr val="DDDDDD"/>
+                      </a:solidFill>
+                      <a:prstDash val="solid"/>
+                      <a:round/>
+                      <a:headEnd type="none" w="med" len="med"/>
+                      <a:tailEnd type="none" w="med" len="med"/>
+                    </a:lnR>
+                    <a:lnT w="6350" cap="flat" cmpd="sng" algn="ctr">
+                      <a:solidFill>
+                        <a:srgbClr val="DDDDDD"/>
+                      </a:solidFill>
+                      <a:prstDash val="solid"/>
+                      <a:round/>
+                      <a:headEnd type="none" w="med" len="med"/>
+                      <a:tailEnd type="none" w="med" len="med"/>
+                    </a:lnT>
+                    <a:lnB w="6350" cap="flat" cmpd="sng" algn="ctr">
+                      <a:solidFill>
+                        <a:srgbClr val="DDDDDD"/>
+                      </a:solidFill>
+                      <a:prstDash val="solid"/>
+                      <a:round/>
+                      <a:headEnd type="none" w="med" len="med"/>
+                      <a:tailEnd type="none" w="med" len="med"/>
+                    </a:lnB>
+                    <a:solidFill>
+                      <a:srgbClr val="FFFDE7"/>
+                    </a:solidFill>
+                  </a:tcPr>
+                </a:tc>
+              </a:tr>
+              <a:tr h="457200">
+                <a:tc>
+                  <a:txBody>
+                    <a:bodyPr/>
+                    <a:lstStyle/>
+                    <a:p>
+                      <a:pPr algn="l" indent="0" marL="0">
+                        <a:buNone/>
+                      </a:pPr>
+                      <a:r>
+                        <a:rPr lang="en-US" sz="1600" dirty="0" b="0">
+                          <a:solidFill>
+                            <a:srgbClr val="666666"/>
+                          </a:solidFill>
+                          <a:latin typeface="Arial" pitchFamily="34" charset="0"/>
+                          <a:ea typeface="Arial" pitchFamily="34" charset="-122"/>
+                          <a:cs typeface="Arial" pitchFamily="34" charset="-120"/>
+                        </a:rPr>
+                        <a:t>  Site 11 (Uthuwan Kanda)</a:t>
+                      </a:r>
+                      <a:endParaRPr lang="en-US" sz="1600" dirty="0">
+                        <a:latin typeface="Arial" charset="0"/>
+                        <a:ea typeface="Arial" charset="0"/>
+                        <a:cs typeface="Arial" charset="0"/>
+                      </a:endParaRPr>
+                    </a:p>
+                  </a:txBody>
+                  <a:tcPr marL="91440" marR="91440" marT="45720" marB="45720" anchor="ctr">
+                    <a:lnL w="6350" cap="flat" cmpd="sng" algn="ctr">
+                      <a:solidFill>
+                        <a:srgbClr val="DDDDDD"/>
+                      </a:solidFill>
+                      <a:prstDash val="solid"/>
+                      <a:round/>
+                      <a:headEnd type="none" w="med" len="med"/>
+                      <a:tailEnd type="none" w="med" len="med"/>
+                    </a:lnL>
+                    <a:lnR w="6350" cap="flat" cmpd="sng" algn="ctr">
+                      <a:solidFill>
+                        <a:srgbClr val="DDDDDD"/>
+                      </a:solidFill>
+                      <a:prstDash val="solid"/>
+                      <a:round/>
+                      <a:headEnd type="none" w="med" len="med"/>
+                      <a:tailEnd type="none" w="med" len="med"/>
+                    </a:lnR>
+                    <a:lnT w="6350" cap="flat" cmpd="sng" algn="ctr">
+                      <a:solidFill>
+                        <a:srgbClr val="DDDDDD"/>
+                      </a:solidFill>
+                      <a:prstDash val="solid"/>
+                      <a:round/>
+                      <a:headEnd type="none" w="med" len="med"/>
+                      <a:tailEnd type="none" w="med" len="med"/>
+                    </a:lnT>
+                    <a:lnB w="6350" cap="flat" cmpd="sng" algn="ctr">
+                      <a:solidFill>
+                        <a:srgbClr val="DDDDDD"/>
+                      </a:solidFill>
+                      <a:prstDash val="solid"/>
+                      <a:round/>
+                      <a:headEnd type="none" w="med" len="med"/>
+                      <a:tailEnd type="none" w="med" len="med"/>
+                    </a:lnB>
+                    <a:noFill/>
+                  </a:tcPr>
+                </a:tc>
+                <a:tc>
+                  <a:txBody>
+                    <a:bodyPr/>
+                    <a:lstStyle/>
+                    <a:p>
+                      <a:pPr algn="ctr" indent="0" marL="0">
+                        <a:buNone/>
+                      </a:pPr>
+                      <a:r>
+                        <a:rPr lang="en-US" sz="1600" dirty="0" b="0">
+                          <a:solidFill>
+                            <a:srgbClr val="666666"/>
+                          </a:solidFill>
+                          <a:latin typeface="Arial" pitchFamily="34" charset="0"/>
+                          <a:ea typeface="Arial" pitchFamily="34" charset="-122"/>
+                          <a:cs typeface="Arial" pitchFamily="34" charset="-120"/>
+                        </a:rPr>
+                        <a:t>0.987</a:t>
+                      </a:r>
+                      <a:endParaRPr lang="en-US" sz="1600" dirty="0">
+                        <a:latin typeface="Arial" charset="0"/>
+                        <a:ea typeface="Arial" charset="0"/>
+                        <a:cs typeface="Arial" charset="0"/>
+                      </a:endParaRPr>
+                    </a:p>
+                  </a:txBody>
+                  <a:tcPr marL="91440" marR="91440" marT="45720" marB="45720" anchor="ctr">
+                    <a:lnL w="6350" cap="flat" cmpd="sng" algn="ctr">
+                      <a:solidFill>
+                        <a:srgbClr val="DDDDDD"/>
+                      </a:solidFill>
+                      <a:prstDash val="solid"/>
+                      <a:round/>
+                      <a:headEnd type="none" w="med" len="med"/>
+                      <a:tailEnd type="none" w="med" len="med"/>
+                    </a:lnL>
+                    <a:lnR w="6350" cap="flat" cmpd="sng" algn="ctr">
+                      <a:solidFill>
+                        <a:srgbClr val="DDDDDD"/>
+                      </a:solidFill>
+                      <a:prstDash val="solid"/>
+                      <a:round/>
+                      <a:headEnd type="none" w="med" len="med"/>
+                      <a:tailEnd type="none" w="med" len="med"/>
+                    </a:lnR>
+                    <a:lnT w="6350" cap="flat" cmpd="sng" algn="ctr">
+                      <a:solidFill>
+                        <a:srgbClr val="DDDDDD"/>
+                      </a:solidFill>
+                      <a:prstDash val="solid"/>
+                      <a:round/>
+                      <a:headEnd type="none" w="med" len="med"/>
+                      <a:tailEnd type="none" w="med" len="med"/>
+                    </a:lnT>
+                    <a:lnB w="6350" cap="flat" cmpd="sng" algn="ctr">
+                      <a:solidFill>
+                        <a:srgbClr val="DDDDDD"/>
+                      </a:solidFill>
+                      <a:prstDash val="solid"/>
+                      <a:round/>
+                      <a:headEnd type="none" w="med" len="med"/>
+                      <a:tailEnd type="none" w="med" len="med"/>
+                    </a:lnB>
+                    <a:noFill/>
+                  </a:tcPr>
+                </a:tc>
+                <a:tc>
+                  <a:txBody>
+                    <a:bodyPr/>
+                    <a:lstStyle/>
+                    <a:p>
+                      <a:pPr algn="ctr" indent="0" marL="0">
+                        <a:buNone/>
+                      </a:pPr>
+                      <a:r>
+                        <a:rPr lang="en-US" sz="1600" dirty="0" b="0">
+                          <a:solidFill>
+                            <a:srgbClr val="666666"/>
+                          </a:solidFill>
+                          <a:latin typeface="Arial" pitchFamily="34" charset="0"/>
+                          <a:ea typeface="Arial" pitchFamily="34" charset="-122"/>
+                          <a:cs typeface="Arial" pitchFamily="34" charset="-120"/>
+                        </a:rPr>
+                        <a:t>0.663</a:t>
+                      </a:r>
+                      <a:endParaRPr lang="en-US" sz="1600" dirty="0">
+                        <a:latin typeface="Arial" charset="0"/>
+                        <a:ea typeface="Arial" charset="0"/>
+                        <a:cs typeface="Arial" charset="0"/>
+                      </a:endParaRPr>
+                    </a:p>
+                  </a:txBody>
+                  <a:tcPr marL="91440" marR="91440" marT="45720" marB="45720" anchor="ctr">
+                    <a:lnL w="6350" cap="flat" cmpd="sng" algn="ctr">
+                      <a:solidFill>
+                        <a:srgbClr val="DDDDDD"/>
+                      </a:solidFill>
+                      <a:prstDash val="solid"/>
+                      <a:round/>
+                      <a:headEnd type="none" w="med" len="med"/>
+                      <a:tailEnd type="none" w="med" len="med"/>
+                    </a:lnL>
+                    <a:lnR w="6350" cap="flat" cmpd="sng" algn="ctr">
+                      <a:solidFill>
+                        <a:srgbClr val="DDDDDD"/>
+                      </a:solidFill>
+                      <a:prstDash val="solid"/>
+                      <a:round/>
+                      <a:headEnd type="none" w="med" len="med"/>
+                      <a:tailEnd type="none" w="med" len="med"/>
+                    </a:lnR>
+                    <a:lnT w="6350" cap="flat" cmpd="sng" algn="ctr">
+                      <a:solidFill>
+                        <a:srgbClr val="DDDDDD"/>
+                      </a:solidFill>
+                      <a:prstDash val="solid"/>
+                      <a:round/>
+                      <a:headEnd type="none" w="med" len="med"/>
+                      <a:tailEnd type="none" w="med" len="med"/>
+                    </a:lnT>
+                    <a:lnB w="6350" cap="flat" cmpd="sng" algn="ctr">
+                      <a:solidFill>
+                        <a:srgbClr val="DDDDDD"/>
+                      </a:solidFill>
+                      <a:prstDash val="solid"/>
+                      <a:round/>
+                      <a:headEnd type="none" w="med" len="med"/>
+                      <a:tailEnd type="none" w="med" len="med"/>
+                    </a:lnB>
+                    <a:noFill/>
+                  </a:tcPr>
+                </a:tc>
+                <a:tc>
+                  <a:txBody>
+                    <a:bodyPr/>
+                    <a:lstStyle/>
+                    <a:p>
+                      <a:pPr algn="ctr" indent="0" marL="0">
+                        <a:buNone/>
+                      </a:pPr>
+                      <a:r>
+                        <a:rPr lang="en-US" sz="1600" dirty="0" b="0">
+                          <a:solidFill>
+                            <a:srgbClr val="666666"/>
+                          </a:solidFill>
+                          <a:latin typeface="Arial" pitchFamily="34" charset="0"/>
+                          <a:ea typeface="Arial" pitchFamily="34" charset="-122"/>
+                          <a:cs typeface="Arial" pitchFamily="34" charset="-120"/>
+                        </a:rPr>
+                        <a:t>0.911</a:t>
+                      </a:r>
+                      <a:endParaRPr lang="en-US" sz="1600" dirty="0">
+                        <a:latin typeface="Arial" charset="0"/>
+                        <a:ea typeface="Arial" charset="0"/>
+                        <a:cs typeface="Arial" charset="0"/>
+                      </a:endParaRPr>
+                    </a:p>
+                  </a:txBody>
+                  <a:tcPr marL="91440" marR="91440" marT="45720" marB="45720" anchor="ctr">
+                    <a:lnL w="6350" cap="flat" cmpd="sng" algn="ctr">
+                      <a:solidFill>
+                        <a:srgbClr val="DDDDDD"/>
+                      </a:solidFill>
+                      <a:prstDash val="solid"/>
+                      <a:round/>
+                      <a:headEnd type="none" w="med" len="med"/>
+                      <a:tailEnd type="none" w="med" len="med"/>
+                    </a:lnL>
+                    <a:lnR w="6350" cap="flat" cmpd="sng" algn="ctr">
+                      <a:solidFill>
+                        <a:srgbClr val="DDDDDD"/>
+                      </a:solidFill>
+                      <a:prstDash val="solid"/>
+                      <a:round/>
+                      <a:headEnd type="none" w="med" len="med"/>
+                      <a:tailEnd type="none" w="med" len="med"/>
+                    </a:lnR>
+                    <a:lnT w="6350" cap="flat" cmpd="sng" algn="ctr">
+                      <a:solidFill>
+                        <a:srgbClr val="DDDDDD"/>
+                      </a:solidFill>
+                      <a:prstDash val="solid"/>
+                      <a:round/>
+                      <a:headEnd type="none" w="med" len="med"/>
+                      <a:tailEnd type="none" w="med" len="med"/>
+                    </a:lnT>
+                    <a:lnB w="6350" cap="flat" cmpd="sng" algn="ctr">
+                      <a:solidFill>
+                        <a:srgbClr val="DDDDDD"/>
+                      </a:solidFill>
+                      <a:prstDash val="solid"/>
+                      <a:round/>
+                      <a:headEnd type="none" w="med" len="med"/>
+                      <a:tailEnd type="none" w="med" len="med"/>
+                    </a:lnB>
+                    <a:noFill/>
+                  </a:tcPr>
+                </a:tc>
+                <a:tc>
+                  <a:txBody>
+                    <a:bodyPr/>
+                    <a:lstStyle/>
+                    <a:p>
+                      <a:pPr algn="ctr" indent="0" marL="0">
+                        <a:buNone/>
+                      </a:pPr>
+                      <a:r>
+                        <a:rPr lang="en-US" sz="1600" dirty="0" b="0">
+                          <a:solidFill>
+                            <a:srgbClr val="666666"/>
+                          </a:solidFill>
+                          <a:latin typeface="Arial" pitchFamily="34" charset="0"/>
+                          <a:ea typeface="Arial" pitchFamily="34" charset="-122"/>
+                          <a:cs typeface="Arial" pitchFamily="34" charset="-120"/>
+                        </a:rPr>
+                        <a:t>0.768</a:t>
+                      </a:r>
+                      <a:endParaRPr lang="en-US" sz="1600" dirty="0">
+                        <a:latin typeface="Arial" charset="0"/>
+                        <a:ea typeface="Arial" charset="0"/>
+                        <a:cs typeface="Arial" charset="0"/>
+                      </a:endParaRPr>
+                    </a:p>
+                  </a:txBody>
+                  <a:tcPr marL="91440" marR="91440" marT="45720" marB="45720" anchor="ctr">
+                    <a:lnL w="6350" cap="flat" cmpd="sng" algn="ctr">
+                      <a:solidFill>
+                        <a:srgbClr val="DDDDDD"/>
+                      </a:solidFill>
+                      <a:prstDash val="solid"/>
+                      <a:round/>
+                      <a:headEnd type="none" w="med" len="med"/>
+                      <a:tailEnd type="none" w="med" len="med"/>
+                    </a:lnL>
+                    <a:lnR w="6350" cap="flat" cmpd="sng" algn="ctr">
+                      <a:solidFill>
+                        <a:srgbClr val="DDDDDD"/>
+                      </a:solidFill>
+                      <a:prstDash val="solid"/>
+                      <a:round/>
+                      <a:headEnd type="none" w="med" len="med"/>
+                      <a:tailEnd type="none" w="med" len="med"/>
+                    </a:lnR>
+                    <a:lnT w="6350" cap="flat" cmpd="sng" algn="ctr">
+                      <a:solidFill>
+                        <a:srgbClr val="DDDDDD"/>
+                      </a:solidFill>
+                      <a:prstDash val="solid"/>
+                      <a:round/>
+                      <a:headEnd type="none" w="med" len="med"/>
+                      <a:tailEnd type="none" w="med" len="med"/>
+                    </a:lnT>
+                    <a:lnB w="6350" cap="flat" cmpd="sng" algn="ctr">
+                      <a:solidFill>
+                        <a:srgbClr val="DDDDDD"/>
+                      </a:solidFill>
+                      <a:prstDash val="solid"/>
+                      <a:round/>
+                      <a:headEnd type="none" w="med" len="med"/>
+                      <a:tailEnd type="none" w="med" len="med"/>
+                    </a:lnB>
+                    <a:noFill/>
+                  </a:tcPr>
+                </a:tc>
+              </a:tr>
+              <a:tr h="457200">
+                <a:tc>
+                  <a:txBody>
+                    <a:bodyPr/>
+                    <a:lstStyle/>
+                    <a:p>
+                      <a:pPr algn="l" indent="0" marL="0">
+                        <a:buNone/>
+                      </a:pPr>
+                      <a:r>
+                        <a:rPr lang="en-US" sz="1600" b="0" dirty="0">
+                          <a:solidFill>
+                            <a:srgbClr val="666666"/>
+                          </a:solidFill>
+                          <a:latin typeface="Arial" pitchFamily="34" charset="0"/>
+                          <a:ea typeface="Arial" pitchFamily="34" charset="-122"/>
+                          <a:cs typeface="Arial" pitchFamily="34" charset="-120"/>
+                        </a:rPr>
+                        <a:t>  Site 12 (Victoria Reservoir)</a:t>
+                      </a:r>
+                      <a:endParaRPr lang="en-US" sz="1600" dirty="0">
+                        <a:latin typeface="Arial" charset="0"/>
+                        <a:ea typeface="Arial" charset="0"/>
+                        <a:cs typeface="Arial" charset="0"/>
+                      </a:endParaRPr>
+                    </a:p>
+                  </a:txBody>
+                  <a:tcPr marL="91440" marR="91440" marT="45720" marB="45720" anchor="ctr">
+                    <a:lnL w="6350" cap="flat" cmpd="sng" algn="ctr">
+                      <a:solidFill>
+                        <a:srgbClr val="DDDDDD"/>
+                      </a:solidFill>
+                      <a:prstDash val="solid"/>
+                      <a:round/>
+                      <a:headEnd type="none" w="med" len="med"/>
+                      <a:tailEnd type="none" w="med" len="med"/>
+                    </a:lnL>
+                    <a:lnR w="6350" cap="flat" cmpd="sng" algn="ctr">
+                      <a:solidFill>
+                        <a:srgbClr val="DDDDDD"/>
+                      </a:solidFill>
+                      <a:prstDash val="solid"/>
+                      <a:round/>
+                      <a:headEnd type="none" w="med" len="med"/>
+                      <a:tailEnd type="none" w="med" len="med"/>
+                    </a:lnR>
+                    <a:lnT w="6350" cap="flat" cmpd="sng" algn="ctr">
+                      <a:solidFill>
+                        <a:srgbClr val="DDDDDD"/>
+                      </a:solidFill>
+                      <a:prstDash val="solid"/>
+                      <a:round/>
+                      <a:headEnd type="none" w="med" len="med"/>
+                      <a:tailEnd type="none" w="med" len="med"/>
+                    </a:lnT>
+                    <a:lnB w="6350" cap="flat" cmpd="sng" algn="ctr">
+                      <a:solidFill>
+                        <a:srgbClr val="DDDDDD"/>
+                      </a:solidFill>
+                      <a:prstDash val="solid"/>
+                      <a:round/>
+                      <a:headEnd type="none" w="med" len="med"/>
+                      <a:tailEnd type="none" w="med" len="med"/>
+                    </a:lnB>
+                    <a:noFill/>
+                  </a:tcPr>
+                </a:tc>
+                <a:tc>
+                  <a:txBody>
+                    <a:bodyPr/>
+                    <a:lstStyle/>
+                    <a:p>
+                      <a:pPr algn="ctr" indent="0" marL="0">
+                        <a:buNone/>
+                      </a:pPr>
+                      <a:r>
+                        <a:rPr lang="en-US" sz="1600" b="0" dirty="0">
+                          <a:solidFill>
+                            <a:srgbClr val="666666"/>
+                          </a:solidFill>
+                          <a:latin typeface="Arial" pitchFamily="34" charset="0"/>
+                          <a:ea typeface="Arial" pitchFamily="34" charset="-122"/>
+                          <a:cs typeface="Arial" pitchFamily="34" charset="-120"/>
+                        </a:rPr>
+                        <a:t>0.982</a:t>
+                      </a:r>
+                      <a:endParaRPr lang="en-US" sz="1600" dirty="0">
+                        <a:latin typeface="Arial" charset="0"/>
+                        <a:ea typeface="Arial" charset="0"/>
+                        <a:cs typeface="Arial" charset="0"/>
+                      </a:endParaRPr>
+                    </a:p>
+                  </a:txBody>
+                  <a:tcPr marL="91440" marR="91440" marT="45720" marB="45720" anchor="ctr">
+                    <a:lnL w="6350" cap="flat" cmpd="sng" algn="ctr">
+                      <a:solidFill>
+                        <a:srgbClr val="DDDDDD"/>
+                      </a:solidFill>
+                      <a:prstDash val="solid"/>
+                      <a:round/>
+                      <a:headEnd type="none" w="med" len="med"/>
+                      <a:tailEnd type="none" w="med" len="med"/>
+                    </a:lnL>
+                    <a:lnR w="6350" cap="flat" cmpd="sng" algn="ctr">
+                      <a:solidFill>
+                        <a:srgbClr val="DDDDDD"/>
+                      </a:solidFill>
+                      <a:prstDash val="solid"/>
+                      <a:round/>
+                      <a:headEnd type="none" w="med" len="med"/>
+                      <a:tailEnd type="none" w="med" len="med"/>
+                    </a:lnR>
+                    <a:lnT w="6350" cap="flat" cmpd="sng" algn="ctr">
+                      <a:solidFill>
+                        <a:srgbClr val="DDDDDD"/>
+                      </a:solidFill>
+                      <a:prstDash val="solid"/>
+                      <a:round/>
+                      <a:headEnd type="none" w="med" len="med"/>
+                      <a:tailEnd type="none" w="med" len="med"/>
+                    </a:lnT>
+                    <a:lnB w="6350" cap="flat" cmpd="sng" algn="ctr">
+                      <a:solidFill>
+                        <a:srgbClr val="DDDDDD"/>
+                      </a:solidFill>
+                      <a:prstDash val="solid"/>
+                      <a:round/>
+                      <a:headEnd type="none" w="med" len="med"/>
+                      <a:tailEnd type="none" w="med" len="med"/>
+                    </a:lnB>
+                    <a:noFill/>
+                  </a:tcPr>
+                </a:tc>
+                <a:tc>
+                  <a:txBody>
+                    <a:bodyPr/>
+                    <a:lstStyle/>
+                    <a:p>
+                      <a:pPr algn="ctr" indent="0" marL="0">
+                        <a:buNone/>
+                      </a:pPr>
+                      <a:r>
+                        <a:rPr lang="en-US" sz="1600" b="0" dirty="0">
+                          <a:solidFill>
+                            <a:srgbClr val="666666"/>
+                          </a:solidFill>
+                          <a:latin typeface="Arial" pitchFamily="34" charset="0"/>
+                          <a:ea typeface="Arial" pitchFamily="34" charset="-122"/>
+                          <a:cs typeface="Arial" pitchFamily="34" charset="-120"/>
+                        </a:rPr>
+                        <a:t>0.522</a:t>
+                      </a:r>
+                      <a:endParaRPr lang="en-US" sz="1600" dirty="0">
+                        <a:latin typeface="Arial" charset="0"/>
+                        <a:ea typeface="Arial" charset="0"/>
+                        <a:cs typeface="Arial" charset="0"/>
+                      </a:endParaRPr>
+                    </a:p>
+                  </a:txBody>
+                  <a:tcPr marL="91440" marR="91440" marT="45720" marB="45720" anchor="ctr">
+                    <a:lnL w="6350" cap="flat" cmpd="sng" algn="ctr">
+                      <a:solidFill>
+                        <a:srgbClr val="DDDDDD"/>
+                      </a:solidFill>
+                      <a:prstDash val="solid"/>
+                      <a:round/>
+                      <a:headEnd type="none" w="med" len="med"/>
+                      <a:tailEnd type="none" w="med" len="med"/>
+                    </a:lnL>
+                    <a:lnR w="6350" cap="flat" cmpd="sng" algn="ctr">
+                      <a:solidFill>
+                        <a:srgbClr val="DDDDDD"/>
+                      </a:solidFill>
+                      <a:prstDash val="solid"/>
+                      <a:round/>
+                      <a:headEnd type="none" w="med" len="med"/>
+                      <a:tailEnd type="none" w="med" len="med"/>
+                    </a:lnR>
+                    <a:lnT w="6350" cap="flat" cmpd="sng" algn="ctr">
+                      <a:solidFill>
+                        <a:srgbClr val="DDDDDD"/>
+                      </a:solidFill>
+                      <a:prstDash val="solid"/>
+                      <a:round/>
+                      <a:headEnd type="none" w="med" len="med"/>
+                      <a:tailEnd type="none" w="med" len="med"/>
+                    </a:lnT>
+                    <a:lnB w="6350" cap="flat" cmpd="sng" algn="ctr">
+                      <a:solidFill>
+                        <a:srgbClr val="DDDDDD"/>
+                      </a:solidFill>
+                      <a:prstDash val="solid"/>
+                      <a:round/>
+                      <a:headEnd type="none" w="med" len="med"/>
+                      <a:tailEnd type="none" w="med" len="med"/>
+                    </a:lnB>
+                    <a:noFill/>
+                  </a:tcPr>
+                </a:tc>
+                <a:tc>
+                  <a:txBody>
+                    <a:bodyPr/>
+                    <a:lstStyle/>
+                    <a:p>
+                      <a:pPr algn="ctr" indent="0" marL="0">
+                        <a:buNone/>
+                      </a:pPr>
+                      <a:r>
+                        <a:rPr lang="en-US" sz="1600" b="0" dirty="0">
+                          <a:solidFill>
+                            <a:srgbClr val="666666"/>
+                          </a:solidFill>
+                          <a:latin typeface="Arial" pitchFamily="34" charset="0"/>
+                          <a:ea typeface="Arial" pitchFamily="34" charset="-122"/>
+                          <a:cs typeface="Arial" pitchFamily="34" charset="-120"/>
+                        </a:rPr>
+                        <a:t>0.738</a:t>
+                      </a:r>
+                      <a:endParaRPr lang="en-US" sz="1600" dirty="0">
+                        <a:latin typeface="Arial" charset="0"/>
+                        <a:ea typeface="Arial" charset="0"/>
+                        <a:cs typeface="Arial" charset="0"/>
+                      </a:endParaRPr>
+                    </a:p>
+                  </a:txBody>
+                  <a:tcPr marL="91440" marR="91440" marT="45720" marB="45720" anchor="ctr">
+                    <a:lnL w="6350" cap="flat" cmpd="sng" algn="ctr">
+                      <a:solidFill>
+                        <a:srgbClr val="DDDDDD"/>
+                      </a:solidFill>
+                      <a:prstDash val="solid"/>
+                      <a:round/>
+                      <a:headEnd type="none" w="med" len="med"/>
+                      <a:tailEnd type="none" w="med" len="med"/>
+                    </a:lnL>
+                    <a:lnR w="6350" cap="flat" cmpd="sng" algn="ctr">
+                      <a:solidFill>
+                        <a:srgbClr val="DDDDDD"/>
+                      </a:solidFill>
+                      <a:prstDash val="solid"/>
+                      <a:round/>
+                      <a:headEnd type="none" w="med" len="med"/>
+                      <a:tailEnd type="none" w="med" len="med"/>
+                    </a:lnR>
+                    <a:lnT w="6350" cap="flat" cmpd="sng" algn="ctr">
+                      <a:solidFill>
+                        <a:srgbClr val="DDDDDD"/>
+                      </a:solidFill>
+                      <a:prstDash val="solid"/>
+                      <a:round/>
+                      <a:headEnd type="none" w="med" len="med"/>
+                      <a:tailEnd type="none" w="med" len="med"/>
+                    </a:lnT>
+                    <a:lnB w="6350" cap="flat" cmpd="sng" algn="ctr">
+                      <a:solidFill>
+                        <a:srgbClr val="DDDDDD"/>
+                      </a:solidFill>
+                      <a:prstDash val="solid"/>
+                      <a:round/>
+                      <a:headEnd type="none" w="med" len="med"/>
+                      <a:tailEnd type="none" w="med" len="med"/>
+                    </a:lnB>
+                    <a:noFill/>
+                  </a:tcPr>
+                </a:tc>
+                <a:tc>
+                  <a:txBody>
+                    <a:bodyPr/>
+                    <a:lstStyle/>
+                    <a:p>
+                      <a:pPr algn="ctr" indent="0" marL="0">
+                        <a:buNone/>
+                      </a:pPr>
+                      <a:r>
+                        <a:rPr lang="en-US" sz="1600" b="0" dirty="0">
+                          <a:solidFill>
+                            <a:srgbClr val="666666"/>
+                          </a:solidFill>
+                          <a:latin typeface="Arial" pitchFamily="34" charset="0"/>
+                          <a:ea typeface="Arial" pitchFamily="34" charset="-122"/>
+                          <a:cs typeface="Arial" pitchFamily="34" charset="-120"/>
+                        </a:rPr>
+                        <a:t>0.612</a:t>
+                      </a:r>
+                      <a:endParaRPr lang="en-US" sz="1600" dirty="0">
+                        <a:latin typeface="Arial" charset="0"/>
+                        <a:ea typeface="Arial" charset="0"/>
+                        <a:cs typeface="Arial" charset="0"/>
+                      </a:endParaRPr>
+                    </a:p>
+                  </a:txBody>
+                  <a:tcPr marL="91440" marR="91440" marT="45720" marB="45720" anchor="ctr">
+                    <a:lnL w="6350" cap="flat" cmpd="sng" algn="ctr">
+                      <a:solidFill>
+                        <a:srgbClr val="DDDDDD"/>
+                      </a:solidFill>
+                      <a:prstDash val="solid"/>
+                      <a:round/>
+                      <a:headEnd type="none" w="med" len="med"/>
+                      <a:tailEnd type="none" w="med" len="med"/>
+                    </a:lnL>
+                    <a:lnR w="6350" cap="flat" cmpd="sng" algn="ctr">
+                      <a:solidFill>
+                        <a:srgbClr val="DDDDDD"/>
+                      </a:solidFill>
+                      <a:prstDash val="solid"/>
+                      <a:round/>
+                      <a:headEnd type="none" w="med" len="med"/>
+                      <a:tailEnd type="none" w="med" len="med"/>
+                    </a:lnR>
+                    <a:lnT w="6350" cap="flat" cmpd="sng" algn="ctr">
+                      <a:solidFill>
+                        <a:srgbClr val="DDDDDD"/>
+                      </a:solidFill>
+                      <a:prstDash val="solid"/>
+                      <a:round/>
+                      <a:headEnd type="none" w="med" len="med"/>
+                      <a:tailEnd type="none" w="med" len="med"/>
+                    </a:lnT>
+                    <a:lnB w="6350" cap="flat" cmpd="sng" algn="ctr">
+                      <a:solidFill>
+                        <a:srgbClr val="DDDDDD"/>
+                      </a:solidFill>
+                      <a:prstDash val="solid"/>
+                      <a:round/>
+                      <a:headEnd type="none" w="med" len="med"/>
+                      <a:tailEnd type="none" w="med" len="med"/>
+                    </a:lnB>
+                    <a:noFill/>
+                  </a:tcPr>
+                </a:tc>
+              </a:tr>
+              <a:tr h="457200">
+                <a:tc>
+                  <a:txBody>
+                    <a:bodyPr/>
+                    <a:lstStyle/>
+                    <a:p>
+                      <a:pPr algn="l" indent="0" marL="0">
+                        <a:buNone/>
+                      </a:pPr>
+                      <a:r>
+                        <a:rPr lang="en-US" sz="1600" dirty="0" b="0">
+                          <a:solidFill>
+                            <a:srgbClr val="1A1A1A"/>
+                          </a:solidFill>
+                          <a:latin typeface="Arial" pitchFamily="34" charset="0"/>
+                          <a:ea typeface="Arial" pitchFamily="34" charset="-122"/>
+                          <a:cs typeface="Arial" pitchFamily="34" charset="-120"/>
+                        </a:rPr>
+                        <a:t>RGB + Hillshade</a:t>
+                      </a:r>
+                      <a:endParaRPr lang="en-US" sz="1600" dirty="0">
+                        <a:latin typeface="Arial" charset="0"/>
+                        <a:ea typeface="Arial" charset="0"/>
+                        <a:cs typeface="Arial" charset="0"/>
+                      </a:endParaRPr>
+                    </a:p>
+                  </a:txBody>
+                  <a:tcPr marL="91440" marR="91440" marT="45720" marB="45720" anchor="ctr">
+                    <a:lnL w="6350" cap="flat" cmpd="sng" algn="ctr">
+                      <a:solidFill>
+                        <a:srgbClr val="DDDDDD"/>
+                      </a:solidFill>
+                      <a:prstDash val="solid"/>
+                      <a:round/>
+                      <a:headEnd type="none" w="med" len="med"/>
+                      <a:tailEnd type="none" w="med" len="med"/>
+                    </a:lnL>
+                    <a:lnR w="6350" cap="flat" cmpd="sng" algn="ctr">
+                      <a:solidFill>
+                        <a:srgbClr val="DDDDDD"/>
+                      </a:solidFill>
+                      <a:prstDash val="solid"/>
+                      <a:round/>
+                      <a:headEnd type="none" w="med" len="med"/>
+                      <a:tailEnd type="none" w="med" len="med"/>
+                    </a:lnR>
+                    <a:lnT w="6350" cap="flat" cmpd="sng" algn="ctr">
+                      <a:solidFill>
+                        <a:srgbClr val="DDDDDD"/>
+                      </a:solidFill>
+                      <a:prstDash val="solid"/>
+                      <a:round/>
+                      <a:headEnd type="none" w="med" len="med"/>
+                      <a:tailEnd type="none" w="med" len="med"/>
+                    </a:lnT>
+                    <a:lnB w="6350" cap="flat" cmpd="sng" algn="ctr">
+                      <a:solidFill>
+                        <a:srgbClr val="DDDDDD"/>
+                      </a:solidFill>
+                      <a:prstDash val="solid"/>
+                      <a:round/>
+                      <a:headEnd type="none" w="med" len="med"/>
+                      <a:tailEnd type="none" w="med" len="med"/>
+                    </a:lnB>
+                    <a:noFill/>
+                  </a:tcPr>
+                </a:tc>
+                <a:tc>
+                  <a:txBody>
+                    <a:bodyPr/>
+                    <a:lstStyle/>
+                    <a:p>
+                      <a:pPr algn="ctr" indent="0" marL="0">
+                        <a:buNone/>
+                      </a:pPr>
+                      <a:r>
+                        <a:rPr lang="en-US" sz="1600" dirty="0" b="0">
+                          <a:solidFill>
+                            <a:srgbClr val="1A1A1A"/>
+                          </a:solidFill>
+                          <a:latin typeface="Arial" pitchFamily="34" charset="0"/>
+                          <a:ea typeface="Arial" pitchFamily="34" charset="-122"/>
+                          <a:cs typeface="Arial" pitchFamily="34" charset="-120"/>
+                        </a:rPr>
+                        <a:t>0.970</a:t>
+                      </a:r>
+                      <a:endParaRPr lang="en-US" sz="1600" dirty="0">
+                        <a:latin typeface="Arial" charset="0"/>
+                        <a:ea typeface="Arial" charset="0"/>
+                        <a:cs typeface="Arial" charset="0"/>
+                      </a:endParaRPr>
+                    </a:p>
+                  </a:txBody>
+                  <a:tcPr marL="91440" marR="91440" marT="45720" marB="45720" anchor="ctr">
+                    <a:lnL w="6350" cap="flat" cmpd="sng" algn="ctr">
+                      <a:solidFill>
+                        <a:srgbClr val="DDDDDD"/>
+                      </a:solidFill>
+                      <a:prstDash val="solid"/>
+                      <a:round/>
+                      <a:headEnd type="none" w="med" len="med"/>
+                      <a:tailEnd type="none" w="med" len="med"/>
+                    </a:lnL>
+                    <a:lnR w="6350" cap="flat" cmpd="sng" algn="ctr">
+                      <a:solidFill>
+                        <a:srgbClr val="DDDDDD"/>
+                      </a:solidFill>
+                      <a:prstDash val="solid"/>
+                      <a:round/>
+                      <a:headEnd type="none" w="med" len="med"/>
+                      <a:tailEnd type="none" w="med" len="med"/>
+                    </a:lnR>
+                    <a:lnT w="6350" cap="flat" cmpd="sng" algn="ctr">
+                      <a:solidFill>
+                        <a:srgbClr val="DDDDDD"/>
+                      </a:solidFill>
+                      <a:prstDash val="solid"/>
+                      <a:round/>
+                      <a:headEnd type="none" w="med" len="med"/>
+                      <a:tailEnd type="none" w="med" len="med"/>
+                    </a:lnT>
+                    <a:lnB w="6350" cap="flat" cmpd="sng" algn="ctr">
+                      <a:solidFill>
+                        <a:srgbClr val="DDDDDD"/>
+                      </a:solidFill>
+                      <a:prstDash val="solid"/>
+                      <a:round/>
+                      <a:headEnd type="none" w="med" len="med"/>
+                      <a:tailEnd type="none" w="med" len="med"/>
+                    </a:lnB>
+                    <a:noFill/>
+                  </a:tcPr>
+                </a:tc>
+                <a:tc>
+                  <a:txBody>
+                    <a:bodyPr/>
+                    <a:lstStyle/>
+                    <a:p>
+                      <a:pPr algn="ctr" indent="0" marL="0">
+                        <a:buNone/>
+                      </a:pPr>
+                      <a:r>
+                        <a:rPr lang="en-US" sz="1600" dirty="0" b="0">
+                          <a:solidFill>
+                            <a:srgbClr val="1A1A1A"/>
+                          </a:solidFill>
+                          <a:latin typeface="Arial" pitchFamily="34" charset="0"/>
+                          <a:ea typeface="Arial" pitchFamily="34" charset="-122"/>
+                          <a:cs typeface="Arial" pitchFamily="34" charset="-120"/>
+                        </a:rPr>
+                        <a:t>0.420</a:t>
+                      </a:r>
+                      <a:endParaRPr lang="en-US" sz="1600" dirty="0">
+                        <a:latin typeface="Arial" charset="0"/>
+                        <a:ea typeface="Arial" charset="0"/>
+                        <a:cs typeface="Arial" charset="0"/>
+                      </a:endParaRPr>
+                    </a:p>
+                  </a:txBody>
+                  <a:tcPr marL="91440" marR="91440" marT="45720" marB="45720" anchor="ctr">
+                    <a:lnL w="6350" cap="flat" cmpd="sng" algn="ctr">
+                      <a:solidFill>
+                        <a:srgbClr val="DDDDDD"/>
+                      </a:solidFill>
+                      <a:prstDash val="solid"/>
+                      <a:round/>
+                      <a:headEnd type="none" w="med" len="med"/>
+                      <a:tailEnd type="none" w="med" len="med"/>
+                    </a:lnL>
+                    <a:lnR w="6350" cap="flat" cmpd="sng" algn="ctr">
+                      <a:solidFill>
+                        <a:srgbClr val="DDDDDD"/>
+                      </a:solidFill>
+                      <a:prstDash val="solid"/>
+                      <a:round/>
+                      <a:headEnd type="none" w="med" len="med"/>
+                      <a:tailEnd type="none" w="med" len="med"/>
+                    </a:lnR>
+                    <a:lnT w="6350" cap="flat" cmpd="sng" algn="ctr">
+                      <a:solidFill>
+                        <a:srgbClr val="DDDDDD"/>
+                      </a:solidFill>
+                      <a:prstDash val="solid"/>
+                      <a:round/>
+                      <a:headEnd type="none" w="med" len="med"/>
+                      <a:tailEnd type="none" w="med" len="med"/>
+                    </a:lnT>
+                    <a:lnB w="6350" cap="flat" cmpd="sng" algn="ctr">
+                      <a:solidFill>
+                        <a:srgbClr val="DDDDDD"/>
+                      </a:solidFill>
+                      <a:prstDash val="solid"/>
+                      <a:round/>
+                      <a:headEnd type="none" w="med" len="med"/>
+                      <a:tailEnd type="none" w="med" len="med"/>
+                    </a:lnB>
+                    <a:noFill/>
+                  </a:tcPr>
+                </a:tc>
+                <a:tc>
+                  <a:txBody>
+                    <a:bodyPr/>
+                    <a:lstStyle/>
+                    <a:p>
+                      <a:pPr algn="ctr" indent="0" marL="0">
+                        <a:buNone/>
+                      </a:pPr>
+                      <a:r>
+                        <a:rPr lang="en-US" sz="1600" dirty="0" b="0">
+                          <a:solidFill>
+                            <a:srgbClr val="1A1A1A"/>
+                          </a:solidFill>
+                          <a:latin typeface="Arial" pitchFamily="34" charset="0"/>
+                          <a:ea typeface="Arial" pitchFamily="34" charset="-122"/>
+                          <a:cs typeface="Arial" pitchFamily="34" charset="-120"/>
+                        </a:rPr>
+                        <a:t>0.932</a:t>
+                      </a:r>
+                      <a:endParaRPr lang="en-US" sz="1600" dirty="0">
+                        <a:latin typeface="Arial" charset="0"/>
+                        <a:ea typeface="Arial" charset="0"/>
+                        <a:cs typeface="Arial" charset="0"/>
+                      </a:endParaRPr>
+                    </a:p>
+                  </a:txBody>
+                  <a:tcPr marL="91440" marR="91440" marT="45720" marB="45720" anchor="ctr">
+                    <a:lnL w="6350" cap="flat" cmpd="sng" algn="ctr">
+                      <a:solidFill>
+                        <a:srgbClr val="DDDDDD"/>
+                      </a:solidFill>
+                      <a:prstDash val="solid"/>
+                      <a:round/>
+                      <a:headEnd type="none" w="med" len="med"/>
+                      <a:tailEnd type="none" w="med" len="med"/>
+                    </a:lnL>
+                    <a:lnR w="6350" cap="flat" cmpd="sng" algn="ctr">
+                      <a:solidFill>
+                        <a:srgbClr val="DDDDDD"/>
+                      </a:solidFill>
+                      <a:prstDash val="solid"/>
+                      <a:round/>
+                      <a:headEnd type="none" w="med" len="med"/>
+                      <a:tailEnd type="none" w="med" len="med"/>
+                    </a:lnR>
+                    <a:lnT w="6350" cap="flat" cmpd="sng" algn="ctr">
+                      <a:solidFill>
+                        <a:srgbClr val="DDDDDD"/>
+                      </a:solidFill>
+                      <a:prstDash val="solid"/>
+                      <a:round/>
+                      <a:headEnd type="none" w="med" len="med"/>
+                      <a:tailEnd type="none" w="med" len="med"/>
+                    </a:lnT>
+                    <a:lnB w="6350" cap="flat" cmpd="sng" algn="ctr">
+                      <a:solidFill>
+                        <a:srgbClr val="DDDDDD"/>
+                      </a:solidFill>
+                      <a:prstDash val="solid"/>
+                      <a:round/>
+                      <a:headEnd type="none" w="med" len="med"/>
+                      <a:tailEnd type="none" w="med" len="med"/>
+                    </a:lnB>
+                    <a:noFill/>
+                  </a:tcPr>
+                </a:tc>
+                <a:tc>
+                  <a:txBody>
+                    <a:bodyPr/>
+                    <a:lstStyle/>
+                    <a:p>
+                      <a:pPr algn="ctr" indent="0" marL="0">
+                        <a:buNone/>
+                      </a:pPr>
+                      <a:r>
+                        <a:rPr lang="en-US" sz="1600" dirty="0" b="0">
+                          <a:solidFill>
+                            <a:srgbClr val="1A1A1A"/>
+                          </a:solidFill>
+                          <a:latin typeface="Arial" pitchFamily="34" charset="0"/>
+                          <a:ea typeface="Arial" pitchFamily="34" charset="-122"/>
+                          <a:cs typeface="Arial" pitchFamily="34" charset="-120"/>
+                        </a:rPr>
+                        <a:t>0.577</a:t>
+                      </a:r>
+                      <a:endParaRPr lang="en-US" sz="1600" dirty="0">
+                        <a:latin typeface="Arial" charset="0"/>
+                        <a:ea typeface="Arial" charset="0"/>
+                        <a:cs typeface="Arial" charset="0"/>
+                      </a:endParaRPr>
+                    </a:p>
+                  </a:txBody>
+                  <a:tcPr marL="91440" marR="91440" marT="45720" marB="45720" anchor="ctr">
+                    <a:lnL w="6350" cap="flat" cmpd="sng" algn="ctr">
+                      <a:solidFill>
+                        <a:srgbClr val="DDDDDD"/>
+                      </a:solidFill>
+                      <a:prstDash val="solid"/>
+                      <a:round/>
+                      <a:headEnd type="none" w="med" len="med"/>
+                      <a:tailEnd type="none" w="med" len="med"/>
+                    </a:lnL>
+                    <a:lnR w="6350" cap="flat" cmpd="sng" algn="ctr">
+                      <a:solidFill>
+                        <a:srgbClr val="DDDDDD"/>
+                      </a:solidFill>
+                      <a:prstDash val="solid"/>
+                      <a:round/>
+                      <a:headEnd type="none" w="med" len="med"/>
+                      <a:tailEnd type="none" w="med" len="med"/>
+                    </a:lnR>
+                    <a:lnT w="6350" cap="flat" cmpd="sng" algn="ctr">
+                      <a:solidFill>
+                        <a:srgbClr val="DDDDDD"/>
+                      </a:solidFill>
+                      <a:prstDash val="solid"/>
+                      <a:round/>
+                      <a:headEnd type="none" w="med" len="med"/>
+                      <a:tailEnd type="none" w="med" len="med"/>
+                    </a:lnT>
+                    <a:lnB w="6350" cap="flat" cmpd="sng" algn="ctr">
+                      <a:solidFill>
+                        <a:srgbClr val="DDDDDD"/>
+                      </a:solidFill>
+                      <a:prstDash val="solid"/>
+                      <a:round/>
+                      <a:headEnd type="none" w="med" len="med"/>
+                      <a:tailEnd type="none" w="med" len="med"/>
+                    </a:lnB>
+                    <a:noFill/>
+                  </a:tcPr>
+                </a:tc>
+              </a:tr>
+              <a:tr h="457200">
+                <a:tc>
+                  <a:txBody>
+                    <a:bodyPr/>
+                    <a:lstStyle/>
+                    <a:p>
+                      <a:pPr algn="l" indent="0" marL="0">
+                        <a:buNone/>
+                      </a:pPr>
+                      <a:r>
+                        <a:rPr lang="en-US" sz="1600" dirty="0" b="0">
+                          <a:solidFill>
+                            <a:srgbClr val="1A1A1A"/>
+                          </a:solidFill>
+                          <a:latin typeface="Arial" pitchFamily="34" charset="0"/>
+                          <a:ea typeface="Arial" pitchFamily="34" charset="-122"/>
+                          <a:cs typeface="Arial" pitchFamily="34" charset="-120"/>
+                        </a:rPr>
+                        <a:t>RGB + Slope</a:t>
+                      </a:r>
+                      <a:endParaRPr lang="en-US" sz="1600" dirty="0">
+                        <a:latin typeface="Arial" charset="0"/>
+                        <a:ea typeface="Arial" charset="0"/>
+                        <a:cs typeface="Arial" charset="0"/>
+                      </a:endParaRPr>
+                    </a:p>
+                  </a:txBody>
+                  <a:tcPr marL="91440" marR="91440" marT="45720" marB="45720" anchor="ctr">
+                    <a:lnL w="6350" cap="flat" cmpd="sng" algn="ctr">
+                      <a:solidFill>
+                        <a:srgbClr val="DDDDDD"/>
+                      </a:solidFill>
+                      <a:prstDash val="solid"/>
+                      <a:round/>
+                      <a:headEnd type="none" w="med" len="med"/>
+                      <a:tailEnd type="none" w="med" len="med"/>
+                    </a:lnL>
+                    <a:lnR w="6350" cap="flat" cmpd="sng" algn="ctr">
+                      <a:solidFill>
+                        <a:srgbClr val="DDDDDD"/>
+                      </a:solidFill>
+                      <a:prstDash val="solid"/>
+                      <a:round/>
+                      <a:headEnd type="none" w="med" len="med"/>
+                      <a:tailEnd type="none" w="med" len="med"/>
+                    </a:lnR>
+                    <a:lnT w="6350" cap="flat" cmpd="sng" algn="ctr">
+                      <a:solidFill>
+                        <a:srgbClr val="DDDDDD"/>
+                      </a:solidFill>
+                      <a:prstDash val="solid"/>
+                      <a:round/>
+                      <a:headEnd type="none" w="med" len="med"/>
+                      <a:tailEnd type="none" w="med" len="med"/>
+                    </a:lnT>
+                    <a:lnB w="6350" cap="flat" cmpd="sng" algn="ctr">
+                      <a:solidFill>
+                        <a:srgbClr val="DDDDDD"/>
+                      </a:solidFill>
+                      <a:prstDash val="solid"/>
+                      <a:round/>
+                      <a:headEnd type="none" w="med" len="med"/>
+                      <a:tailEnd type="none" w="med" len="med"/>
+                    </a:lnB>
+                    <a:noFill/>
+                  </a:tcPr>
+                </a:tc>
+                <a:tc>
+                  <a:txBody>
+                    <a:bodyPr/>
+                    <a:lstStyle/>
+                    <a:p>
+                      <a:pPr algn="ctr" indent="0" marL="0">
+                        <a:buNone/>
+                      </a:pPr>
+                      <a:r>
+                        <a:rPr lang="en-US" sz="1600" dirty="0" b="0">
+                          <a:solidFill>
+                            <a:srgbClr val="1A1A1A"/>
+                          </a:solidFill>
+                          <a:latin typeface="Arial" pitchFamily="34" charset="0"/>
+                          <a:ea typeface="Arial" pitchFamily="34" charset="-122"/>
+                          <a:cs typeface="Arial" pitchFamily="34" charset="-120"/>
+                        </a:rPr>
+                        <a:t>0.972</a:t>
+                      </a:r>
+                      <a:endParaRPr lang="en-US" sz="1600" dirty="0">
+                        <a:latin typeface="Arial" charset="0"/>
+                        <a:ea typeface="Arial" charset="0"/>
+                        <a:cs typeface="Arial" charset="0"/>
+                      </a:endParaRPr>
+                    </a:p>
+                  </a:txBody>
+                  <a:tcPr marL="91440" marR="91440" marT="45720" marB="45720" anchor="ctr">
+                    <a:lnL w="6350" cap="flat" cmpd="sng" algn="ctr">
+                      <a:solidFill>
+                        <a:srgbClr val="DDDDDD"/>
+                      </a:solidFill>
+                      <a:prstDash val="solid"/>
+                      <a:round/>
+                      <a:headEnd type="none" w="med" len="med"/>
+                      <a:tailEnd type="none" w="med" len="med"/>
+                    </a:lnL>
+                    <a:lnR w="6350" cap="flat" cmpd="sng" algn="ctr">
+                      <a:solidFill>
+                        <a:srgbClr val="DDDDDD"/>
+                      </a:solidFill>
+                      <a:prstDash val="solid"/>
+                      <a:round/>
+                      <a:headEnd type="none" w="med" len="med"/>
+                      <a:tailEnd type="none" w="med" len="med"/>
+                    </a:lnR>
+                    <a:lnT w="6350" cap="flat" cmpd="sng" algn="ctr">
+                      <a:solidFill>
+                        <a:srgbClr val="DDDDDD"/>
+                      </a:solidFill>
+                      <a:prstDash val="solid"/>
+                      <a:round/>
+                      <a:headEnd type="none" w="med" len="med"/>
+                      <a:tailEnd type="none" w="med" len="med"/>
+                    </a:lnT>
+                    <a:lnB w="6350" cap="flat" cmpd="sng" algn="ctr">
+                      <a:solidFill>
+                        <a:srgbClr val="DDDDDD"/>
+                      </a:solidFill>
+                      <a:prstDash val="solid"/>
+                      <a:round/>
+                      <a:headEnd type="none" w="med" len="med"/>
+                      <a:tailEnd type="none" w="med" len="med"/>
+                    </a:lnB>
+                    <a:noFill/>
+                  </a:tcPr>
+                </a:tc>
+                <a:tc>
+                  <a:txBody>
+                    <a:bodyPr/>
+                    <a:lstStyle/>
+                    <a:p>
+                      <a:pPr algn="ctr" indent="0" marL="0">
+                        <a:buNone/>
+                      </a:pPr>
+                      <a:r>
+                        <a:rPr lang="en-US" sz="1600" dirty="0" b="0">
+                          <a:solidFill>
+                            <a:srgbClr val="1A1A1A"/>
+                          </a:solidFill>
+                          <a:latin typeface="Arial" pitchFamily="34" charset="0"/>
+                          <a:ea typeface="Arial" pitchFamily="34" charset="-122"/>
+                          <a:cs typeface="Arial" pitchFamily="34" charset="-120"/>
+                        </a:rPr>
+                        <a:t>0.439</a:t>
+                      </a:r>
+                      <a:endParaRPr lang="en-US" sz="1600" dirty="0">
+                        <a:latin typeface="Arial" charset="0"/>
+                        <a:ea typeface="Arial" charset="0"/>
+                        <a:cs typeface="Arial" charset="0"/>
+                      </a:endParaRPr>
+                    </a:p>
+                  </a:txBody>
+                  <a:tcPr marL="91440" marR="91440" marT="45720" marB="45720" anchor="ctr">
+                    <a:lnL w="6350" cap="flat" cmpd="sng" algn="ctr">
+                      <a:solidFill>
+                        <a:srgbClr val="DDDDDD"/>
+                      </a:solidFill>
+                      <a:prstDash val="solid"/>
+                      <a:round/>
+                      <a:headEnd type="none" w="med" len="med"/>
+                      <a:tailEnd type="none" w="med" len="med"/>
+                    </a:lnL>
+                    <a:lnR w="6350" cap="flat" cmpd="sng" algn="ctr">
+                      <a:solidFill>
+                        <a:srgbClr val="DDDDDD"/>
+                      </a:solidFill>
+                      <a:prstDash val="solid"/>
+                      <a:round/>
+                      <a:headEnd type="none" w="med" len="med"/>
+                      <a:tailEnd type="none" w="med" len="med"/>
+                    </a:lnR>
+                    <a:lnT w="6350" cap="flat" cmpd="sng" algn="ctr">
+                      <a:solidFill>
+                        <a:srgbClr val="DDDDDD"/>
+                      </a:solidFill>
+                      <a:prstDash val="solid"/>
+                      <a:round/>
+                      <a:headEnd type="none" w="med" len="med"/>
+                      <a:tailEnd type="none" w="med" len="med"/>
+                    </a:lnT>
+                    <a:lnB w="6350" cap="flat" cmpd="sng" algn="ctr">
+                      <a:solidFill>
+                        <a:srgbClr val="DDDDDD"/>
+                      </a:solidFill>
+                      <a:prstDash val="solid"/>
+                      <a:round/>
+                      <a:headEnd type="none" w="med" len="med"/>
+                      <a:tailEnd type="none" w="med" len="med"/>
+                    </a:lnB>
+                    <a:noFill/>
+                  </a:tcPr>
+                </a:tc>
+                <a:tc>
+                  <a:txBody>
+                    <a:bodyPr/>
+                    <a:lstStyle/>
+                    <a:p>
+                      <a:pPr algn="ctr" indent="0" marL="0">
+                        <a:buNone/>
+                      </a:pPr>
+                      <a:r>
+                        <a:rPr lang="en-US" sz="1600" dirty="0" b="0">
+                          <a:solidFill>
+                            <a:srgbClr val="1A1A1A"/>
+                          </a:solidFill>
+                          <a:latin typeface="Arial" pitchFamily="34" charset="0"/>
+                          <a:ea typeface="Arial" pitchFamily="34" charset="-122"/>
+                          <a:cs typeface="Arial" pitchFamily="34" charset="-120"/>
+                        </a:rPr>
+                        <a:t>0.911</a:t>
+                      </a:r>
+                      <a:endParaRPr lang="en-US" sz="1600" dirty="0">
+                        <a:latin typeface="Arial" charset="0"/>
+                        <a:ea typeface="Arial" charset="0"/>
+                        <a:cs typeface="Arial" charset="0"/>
+                      </a:endParaRPr>
+                    </a:p>
+                  </a:txBody>
+                  <a:tcPr marL="91440" marR="91440" marT="45720" marB="45720" anchor="ctr">
+                    <a:lnL w="6350" cap="flat" cmpd="sng" algn="ctr">
+                      <a:solidFill>
+                        <a:srgbClr val="DDDDDD"/>
+                      </a:solidFill>
+                      <a:prstDash val="solid"/>
+                      <a:round/>
+                      <a:headEnd type="none" w="med" len="med"/>
+                      <a:tailEnd type="none" w="med" len="med"/>
+                    </a:lnL>
+                    <a:lnR w="6350" cap="flat" cmpd="sng" algn="ctr">
+                      <a:solidFill>
+                        <a:srgbClr val="DDDDDD"/>
+                      </a:solidFill>
+                      <a:prstDash val="solid"/>
+                      <a:round/>
+                      <a:headEnd type="none" w="med" len="med"/>
+                      <a:tailEnd type="none" w="med" len="med"/>
+                    </a:lnR>
+                    <a:lnT w="6350" cap="flat" cmpd="sng" algn="ctr">
+                      <a:solidFill>
+                        <a:srgbClr val="DDDDDD"/>
+                      </a:solidFill>
+                      <a:prstDash val="solid"/>
+                      <a:round/>
+                      <a:headEnd type="none" w="med" len="med"/>
+                      <a:tailEnd type="none" w="med" len="med"/>
+                    </a:lnT>
+                    <a:lnB w="6350" cap="flat" cmpd="sng" algn="ctr">
+                      <a:solidFill>
+                        <a:srgbClr val="DDDDDD"/>
+                      </a:solidFill>
+                      <a:prstDash val="solid"/>
+                      <a:round/>
+                      <a:headEnd type="none" w="med" len="med"/>
+                      <a:tailEnd type="none" w="med" len="med"/>
+                    </a:lnB>
+                    <a:noFill/>
+                  </a:tcPr>
+                </a:tc>
+                <a:tc>
+                  <a:txBody>
+                    <a:bodyPr/>
+                    <a:lstStyle/>
+                    <a:p>
+                      <a:pPr algn="ctr" indent="0" marL="0">
+                        <a:buNone/>
+                      </a:pPr>
+                      <a:r>
+                        <a:rPr lang="en-US" sz="1600" dirty="0" b="0">
                           <a:solidFill>
                             <a:srgbClr val="1A1A1A"/>
                           </a:solidFill>
@@ -8526,663 +9179,7 @@
                       <a:headEnd type="none" w="med" len="med"/>
                       <a:tailEnd type="none" w="med" len="med"/>
                     </a:lnB>
-                    <a:solidFill>
-                      <a:srgbClr val="FFFDE7"/>
-                    </a:solidFill>
-                  </a:tcPr>
-                </a:tc>
-              </a:tr>
-              <a:tr h="457200">
-                <a:tc>
-                  <a:txBody>
-                    <a:bodyPr/>
-                    <a:lstStyle/>
-                    <a:p>
-                      <a:pPr algn="l" indent="0" marL="0">
-                        <a:buNone/>
-                      </a:pPr>
-                      <a:r>
-                        <a:rPr lang="en-US" sz="1600" dirty="0">
-                          <a:solidFill>
-                            <a:srgbClr val="666666"/>
-                          </a:solidFill>
-                          <a:latin typeface="Arial" pitchFamily="34" charset="0"/>
-                          <a:ea typeface="Arial" pitchFamily="34" charset="-122"/>
-                          <a:cs typeface="Arial" pitchFamily="34" charset="-120"/>
-                        </a:rPr>
-                        <a:t>  Site 11 (Uthuwan Kanda)</a:t>
-                      </a:r>
-                      <a:endParaRPr lang="en-US" sz="1600" dirty="0">
-                        <a:latin typeface="Arial" charset="0"/>
-                        <a:ea typeface="Arial" charset="0"/>
-                        <a:cs typeface="Arial" charset="0"/>
-                      </a:endParaRPr>
-                    </a:p>
-                  </a:txBody>
-                  <a:tcPr marL="91440" marR="91440" marT="45720" marB="45720" anchor="ctr">
-                    <a:lnL w="6350" cap="flat" cmpd="sng" algn="ctr">
-                      <a:solidFill>
-                        <a:srgbClr val="DDDDDD"/>
-                      </a:solidFill>
-                      <a:prstDash val="solid"/>
-                      <a:round/>
-                      <a:headEnd type="none" w="med" len="med"/>
-                      <a:tailEnd type="none" w="med" len="med"/>
-                    </a:lnL>
-                    <a:lnR w="6350" cap="flat" cmpd="sng" algn="ctr">
-                      <a:solidFill>
-                        <a:srgbClr val="DDDDDD"/>
-                      </a:solidFill>
-                      <a:prstDash val="solid"/>
-                      <a:round/>
-                      <a:headEnd type="none" w="med" len="med"/>
-                      <a:tailEnd type="none" w="med" len="med"/>
-                    </a:lnR>
-                    <a:lnT w="6350" cap="flat" cmpd="sng" algn="ctr">
-                      <a:solidFill>
-                        <a:srgbClr val="DDDDDD"/>
-                      </a:solidFill>
-                      <a:prstDash val="solid"/>
-                      <a:round/>
-                      <a:headEnd type="none" w="med" len="med"/>
-                      <a:tailEnd type="none" w="med" len="med"/>
-                    </a:lnT>
-                    <a:lnB w="6350" cap="flat" cmpd="sng" algn="ctr">
-                      <a:solidFill>
-                        <a:srgbClr val="DDDDDD"/>
-                      </a:solidFill>
-                      <a:prstDash val="solid"/>
-                      <a:round/>
-                      <a:headEnd type="none" w="med" len="med"/>
-                      <a:tailEnd type="none" w="med" len="med"/>
-                    </a:lnB>
-                  </a:tcPr>
-                </a:tc>
-                <a:tc>
-                  <a:txBody>
-                    <a:bodyPr/>
-                    <a:lstStyle/>
-                    <a:p>
-                      <a:pPr algn="ctr" indent="0" marL="0">
-                        <a:buNone/>
-                      </a:pPr>
-                      <a:r>
-                        <a:rPr lang="en-US" sz="1600" dirty="0">
-                          <a:solidFill>
-                            <a:srgbClr val="666666"/>
-                          </a:solidFill>
-                          <a:latin typeface="Arial" pitchFamily="34" charset="0"/>
-                          <a:ea typeface="Arial" pitchFamily="34" charset="-122"/>
-                          <a:cs typeface="Arial" pitchFamily="34" charset="-120"/>
-                        </a:rPr>
-                        <a:t>0.974</a:t>
-                      </a:r>
-                      <a:endParaRPr lang="en-US" sz="1600" dirty="0">
-                        <a:latin typeface="Arial" charset="0"/>
-                        <a:ea typeface="Arial" charset="0"/>
-                        <a:cs typeface="Arial" charset="0"/>
-                      </a:endParaRPr>
-                    </a:p>
-                  </a:txBody>
-                  <a:tcPr marL="91440" marR="91440" marT="45720" marB="45720" anchor="ctr">
-                    <a:lnL w="6350" cap="flat" cmpd="sng" algn="ctr">
-                      <a:solidFill>
-                        <a:srgbClr val="DDDDDD"/>
-                      </a:solidFill>
-                      <a:prstDash val="solid"/>
-                      <a:round/>
-                      <a:headEnd type="none" w="med" len="med"/>
-                      <a:tailEnd type="none" w="med" len="med"/>
-                    </a:lnL>
-                    <a:lnR w="6350" cap="flat" cmpd="sng" algn="ctr">
-                      <a:solidFill>
-                        <a:srgbClr val="DDDDDD"/>
-                      </a:solidFill>
-                      <a:prstDash val="solid"/>
-                      <a:round/>
-                      <a:headEnd type="none" w="med" len="med"/>
-                      <a:tailEnd type="none" w="med" len="med"/>
-                    </a:lnR>
-                    <a:lnT w="6350" cap="flat" cmpd="sng" algn="ctr">
-                      <a:solidFill>
-                        <a:srgbClr val="DDDDDD"/>
-                      </a:solidFill>
-                      <a:prstDash val="solid"/>
-                      <a:round/>
-                      <a:headEnd type="none" w="med" len="med"/>
-                      <a:tailEnd type="none" w="med" len="med"/>
-                    </a:lnT>
-                    <a:lnB w="6350" cap="flat" cmpd="sng" algn="ctr">
-                      <a:solidFill>
-                        <a:srgbClr val="DDDDDD"/>
-                      </a:solidFill>
-                      <a:prstDash val="solid"/>
-                      <a:round/>
-                      <a:headEnd type="none" w="med" len="med"/>
-                      <a:tailEnd type="none" w="med" len="med"/>
-                    </a:lnB>
-                  </a:tcPr>
-                </a:tc>
-                <a:tc>
-                  <a:txBody>
-                    <a:bodyPr/>
-                    <a:lstStyle/>
-                    <a:p>
-                      <a:pPr algn="ctr" indent="0" marL="0">
-                        <a:buNone/>
-                      </a:pPr>
-                      <a:r>
-                        <a:rPr lang="en-US" sz="1600" dirty="0">
-                          <a:solidFill>
-                            <a:srgbClr val="666666"/>
-                          </a:solidFill>
-                          <a:latin typeface="Arial" pitchFamily="34" charset="0"/>
-                          <a:ea typeface="Arial" pitchFamily="34" charset="-122"/>
-                          <a:cs typeface="Arial" pitchFamily="34" charset="-120"/>
-                        </a:rPr>
-                        <a:t>0.474</a:t>
-                      </a:r>
-                      <a:endParaRPr lang="en-US" sz="1600" dirty="0">
-                        <a:latin typeface="Arial" charset="0"/>
-                        <a:ea typeface="Arial" charset="0"/>
-                        <a:cs typeface="Arial" charset="0"/>
-                      </a:endParaRPr>
-                    </a:p>
-                  </a:txBody>
-                  <a:tcPr marL="91440" marR="91440" marT="45720" marB="45720" anchor="ctr">
-                    <a:lnL w="6350" cap="flat" cmpd="sng" algn="ctr">
-                      <a:solidFill>
-                        <a:srgbClr val="DDDDDD"/>
-                      </a:solidFill>
-                      <a:prstDash val="solid"/>
-                      <a:round/>
-                      <a:headEnd type="none" w="med" len="med"/>
-                      <a:tailEnd type="none" w="med" len="med"/>
-                    </a:lnL>
-                    <a:lnR w="6350" cap="flat" cmpd="sng" algn="ctr">
-                      <a:solidFill>
-                        <a:srgbClr val="DDDDDD"/>
-                      </a:solidFill>
-                      <a:prstDash val="solid"/>
-                      <a:round/>
-                      <a:headEnd type="none" w="med" len="med"/>
-                      <a:tailEnd type="none" w="med" len="med"/>
-                    </a:lnR>
-                    <a:lnT w="6350" cap="flat" cmpd="sng" algn="ctr">
-                      <a:solidFill>
-                        <a:srgbClr val="DDDDDD"/>
-                      </a:solidFill>
-                      <a:prstDash val="solid"/>
-                      <a:round/>
-                      <a:headEnd type="none" w="med" len="med"/>
-                      <a:tailEnd type="none" w="med" len="med"/>
-                    </a:lnT>
-                    <a:lnB w="6350" cap="flat" cmpd="sng" algn="ctr">
-                      <a:solidFill>
-                        <a:srgbClr val="DDDDDD"/>
-                      </a:solidFill>
-                      <a:prstDash val="solid"/>
-                      <a:round/>
-                      <a:headEnd type="none" w="med" len="med"/>
-                      <a:tailEnd type="none" w="med" len="med"/>
-                    </a:lnB>
-                  </a:tcPr>
-                </a:tc>
-                <a:tc>
-                  <a:txBody>
-                    <a:bodyPr/>
-                    <a:lstStyle/>
-                    <a:p>
-                      <a:pPr algn="ctr" indent="0" marL="0">
-                        <a:buNone/>
-                      </a:pPr>
-                      <a:r>
-                        <a:rPr lang="en-US" sz="1600" dirty="0">
-                          <a:solidFill>
-                            <a:srgbClr val="666666"/>
-                          </a:solidFill>
-                          <a:latin typeface="Arial" pitchFamily="34" charset="0"/>
-                          <a:ea typeface="Arial" pitchFamily="34" charset="-122"/>
-                          <a:cs typeface="Arial" pitchFamily="34" charset="-120"/>
-                        </a:rPr>
-                        <a:t>0.841</a:t>
-                      </a:r>
-                      <a:endParaRPr lang="en-US" sz="1600" dirty="0">
-                        <a:latin typeface="Arial" charset="0"/>
-                        <a:ea typeface="Arial" charset="0"/>
-                        <a:cs typeface="Arial" charset="0"/>
-                      </a:endParaRPr>
-                    </a:p>
-                  </a:txBody>
-                  <a:tcPr marL="91440" marR="91440" marT="45720" marB="45720" anchor="ctr">
-                    <a:lnL w="6350" cap="flat" cmpd="sng" algn="ctr">
-                      <a:solidFill>
-                        <a:srgbClr val="DDDDDD"/>
-                      </a:solidFill>
-                      <a:prstDash val="solid"/>
-                      <a:round/>
-                      <a:headEnd type="none" w="med" len="med"/>
-                      <a:tailEnd type="none" w="med" len="med"/>
-                    </a:lnL>
-                    <a:lnR w="6350" cap="flat" cmpd="sng" algn="ctr">
-                      <a:solidFill>
-                        <a:srgbClr val="DDDDDD"/>
-                      </a:solidFill>
-                      <a:prstDash val="solid"/>
-                      <a:round/>
-                      <a:headEnd type="none" w="med" len="med"/>
-                      <a:tailEnd type="none" w="med" len="med"/>
-                    </a:lnR>
-                    <a:lnT w="6350" cap="flat" cmpd="sng" algn="ctr">
-                      <a:solidFill>
-                        <a:srgbClr val="DDDDDD"/>
-                      </a:solidFill>
-                      <a:prstDash val="solid"/>
-                      <a:round/>
-                      <a:headEnd type="none" w="med" len="med"/>
-                      <a:tailEnd type="none" w="med" len="med"/>
-                    </a:lnT>
-                    <a:lnB w="6350" cap="flat" cmpd="sng" algn="ctr">
-                      <a:solidFill>
-                        <a:srgbClr val="DDDDDD"/>
-                      </a:solidFill>
-                      <a:prstDash val="solid"/>
-                      <a:round/>
-                      <a:headEnd type="none" w="med" len="med"/>
-                      <a:tailEnd type="none" w="med" len="med"/>
-                    </a:lnB>
-                  </a:tcPr>
-                </a:tc>
-                <a:tc>
-                  <a:txBody>
-                    <a:bodyPr/>
-                    <a:lstStyle/>
-                    <a:p>
-                      <a:pPr algn="ctr" indent="0" marL="0">
-                        <a:buNone/>
-                      </a:pPr>
-                      <a:r>
-                        <a:rPr lang="en-US" sz="1600" dirty="0">
-                          <a:solidFill>
-                            <a:srgbClr val="666666"/>
-                          </a:solidFill>
-                          <a:latin typeface="Arial" pitchFamily="34" charset="0"/>
-                          <a:ea typeface="Arial" pitchFamily="34" charset="-122"/>
-                          <a:cs typeface="Arial" pitchFamily="34" charset="-120"/>
-                        </a:rPr>
-                        <a:t>0.606</a:t>
-                      </a:r>
-                      <a:endParaRPr lang="en-US" sz="1600" dirty="0">
-                        <a:latin typeface="Arial" charset="0"/>
-                        <a:ea typeface="Arial" charset="0"/>
-                        <a:cs typeface="Arial" charset="0"/>
-                      </a:endParaRPr>
-                    </a:p>
-                  </a:txBody>
-                  <a:tcPr marL="91440" marR="91440" marT="45720" marB="45720" anchor="ctr">
-                    <a:lnL w="6350" cap="flat" cmpd="sng" algn="ctr">
-                      <a:solidFill>
-                        <a:srgbClr val="DDDDDD"/>
-                      </a:solidFill>
-                      <a:prstDash val="solid"/>
-                      <a:round/>
-                      <a:headEnd type="none" w="med" len="med"/>
-                      <a:tailEnd type="none" w="med" len="med"/>
-                    </a:lnL>
-                    <a:lnR w="6350" cap="flat" cmpd="sng" algn="ctr">
-                      <a:solidFill>
-                        <a:srgbClr val="DDDDDD"/>
-                      </a:solidFill>
-                      <a:prstDash val="solid"/>
-                      <a:round/>
-                      <a:headEnd type="none" w="med" len="med"/>
-                      <a:tailEnd type="none" w="med" len="med"/>
-                    </a:lnR>
-                    <a:lnT w="6350" cap="flat" cmpd="sng" algn="ctr">
-                      <a:solidFill>
-                        <a:srgbClr val="DDDDDD"/>
-                      </a:solidFill>
-                      <a:prstDash val="solid"/>
-                      <a:round/>
-                      <a:headEnd type="none" w="med" len="med"/>
-                      <a:tailEnd type="none" w="med" len="med"/>
-                    </a:lnT>
-                    <a:lnB w="6350" cap="flat" cmpd="sng" algn="ctr">
-                      <a:solidFill>
-                        <a:srgbClr val="DDDDDD"/>
-                      </a:solidFill>
-                      <a:prstDash val="solid"/>
-                      <a:round/>
-                      <a:headEnd type="none" w="med" len="med"/>
-                      <a:tailEnd type="none" w="med" len="med"/>
-                    </a:lnB>
-                  </a:tcPr>
-                </a:tc>
-              </a:tr>
-              <a:tr h="457200">
-                <a:tc>
-                  <a:txBody>
-                    <a:bodyPr/>
-                    <a:lstStyle/>
-                    <a:p>
-                      <a:pPr algn="l" indent="0" marL="0">
-                        <a:buNone/>
-                      </a:pPr>
-                      <a:r>
-                        <a:rPr lang="en-US" sz="1600" dirty="0">
-                          <a:solidFill>
-                            <a:srgbClr val="666666"/>
-                          </a:solidFill>
-                          <a:latin typeface="Arial" pitchFamily="34" charset="0"/>
-                          <a:ea typeface="Arial" pitchFamily="34" charset="-122"/>
-                          <a:cs typeface="Arial" pitchFamily="34" charset="-120"/>
-                        </a:rPr>
-                        <a:t>  Site 12 (Victoria Reservoir)</a:t>
-                      </a:r>
-                      <a:endParaRPr lang="en-US" sz="1600" dirty="0">
-                        <a:latin typeface="Arial" charset="0"/>
-                        <a:ea typeface="Arial" charset="0"/>
-                        <a:cs typeface="Arial" charset="0"/>
-                      </a:endParaRPr>
-                    </a:p>
-                  </a:txBody>
-                  <a:tcPr marL="91440" marR="91440" marT="45720" marB="45720" anchor="ctr">
-                    <a:lnL w="6350" cap="flat" cmpd="sng" algn="ctr">
-                      <a:solidFill>
-                        <a:srgbClr val="DDDDDD"/>
-                      </a:solidFill>
-                      <a:prstDash val="solid"/>
-                      <a:round/>
-                      <a:headEnd type="none" w="med" len="med"/>
-                      <a:tailEnd type="none" w="med" len="med"/>
-                    </a:lnL>
-                    <a:lnR w="6350" cap="flat" cmpd="sng" algn="ctr">
-                      <a:solidFill>
-                        <a:srgbClr val="DDDDDD"/>
-                      </a:solidFill>
-                      <a:prstDash val="solid"/>
-                      <a:round/>
-                      <a:headEnd type="none" w="med" len="med"/>
-                      <a:tailEnd type="none" w="med" len="med"/>
-                    </a:lnR>
-                    <a:lnT w="6350" cap="flat" cmpd="sng" algn="ctr">
-                      <a:solidFill>
-                        <a:srgbClr val="DDDDDD"/>
-                      </a:solidFill>
-                      <a:prstDash val="solid"/>
-                      <a:round/>
-                      <a:headEnd type="none" w="med" len="med"/>
-                      <a:tailEnd type="none" w="med" len="med"/>
-                    </a:lnT>
-                    <a:lnB w="6350" cap="flat" cmpd="sng" algn="ctr">
-                      <a:solidFill>
-                        <a:srgbClr val="DDDDDD"/>
-                      </a:solidFill>
-                      <a:prstDash val="solid"/>
-                      <a:round/>
-                      <a:headEnd type="none" w="med" len="med"/>
-                      <a:tailEnd type="none" w="med" len="med"/>
-                    </a:lnB>
-                  </a:tcPr>
-                </a:tc>
-                <a:tc>
-                  <a:txBody>
-                    <a:bodyPr/>
-                    <a:lstStyle/>
-                    <a:p>
-                      <a:pPr algn="ctr" indent="0" marL="0">
-                        <a:buNone/>
-                      </a:pPr>
-                      <a:r>
-                        <a:rPr lang="en-US" sz="1600" dirty="0">
-                          <a:solidFill>
-                            <a:srgbClr val="666666"/>
-                          </a:solidFill>
-                          <a:latin typeface="Arial" pitchFamily="34" charset="0"/>
-                          <a:ea typeface="Arial" pitchFamily="34" charset="-122"/>
-                          <a:cs typeface="Arial" pitchFamily="34" charset="-120"/>
-                        </a:rPr>
-                        <a:t>0.982</a:t>
-                      </a:r>
-                      <a:endParaRPr lang="en-US" sz="1600" dirty="0">
-                        <a:latin typeface="Arial" charset="0"/>
-                        <a:ea typeface="Arial" charset="0"/>
-                        <a:cs typeface="Arial" charset="0"/>
-                      </a:endParaRPr>
-                    </a:p>
-                  </a:txBody>
-                  <a:tcPr marL="91440" marR="91440" marT="45720" marB="45720" anchor="ctr">
-                    <a:lnL w="6350" cap="flat" cmpd="sng" algn="ctr">
-                      <a:solidFill>
-                        <a:srgbClr val="DDDDDD"/>
-                      </a:solidFill>
-                      <a:prstDash val="solid"/>
-                      <a:round/>
-                      <a:headEnd type="none" w="med" len="med"/>
-                      <a:tailEnd type="none" w="med" len="med"/>
-                    </a:lnL>
-                    <a:lnR w="6350" cap="flat" cmpd="sng" algn="ctr">
-                      <a:solidFill>
-                        <a:srgbClr val="DDDDDD"/>
-                      </a:solidFill>
-                      <a:prstDash val="solid"/>
-                      <a:round/>
-                      <a:headEnd type="none" w="med" len="med"/>
-                      <a:tailEnd type="none" w="med" len="med"/>
-                    </a:lnR>
-                    <a:lnT w="6350" cap="flat" cmpd="sng" algn="ctr">
-                      <a:solidFill>
-                        <a:srgbClr val="DDDDDD"/>
-                      </a:solidFill>
-                      <a:prstDash val="solid"/>
-                      <a:round/>
-                      <a:headEnd type="none" w="med" len="med"/>
-                      <a:tailEnd type="none" w="med" len="med"/>
-                    </a:lnT>
-                    <a:lnB w="6350" cap="flat" cmpd="sng" algn="ctr">
-                      <a:solidFill>
-                        <a:srgbClr val="DDDDDD"/>
-                      </a:solidFill>
-                      <a:prstDash val="solid"/>
-                      <a:round/>
-                      <a:headEnd type="none" w="med" len="med"/>
-                      <a:tailEnd type="none" w="med" len="med"/>
-                    </a:lnB>
-                  </a:tcPr>
-                </a:tc>
-                <a:tc>
-                  <a:txBody>
-                    <a:bodyPr/>
-                    <a:lstStyle/>
-                    <a:p>
-                      <a:pPr algn="ctr" indent="0" marL="0">
-                        <a:buNone/>
-                      </a:pPr>
-                      <a:r>
-                        <a:rPr lang="en-US" sz="1600" dirty="0">
-                          <a:solidFill>
-                            <a:srgbClr val="666666"/>
-                          </a:solidFill>
-                          <a:latin typeface="Arial" pitchFamily="34" charset="0"/>
-                          <a:ea typeface="Arial" pitchFamily="34" charset="-122"/>
-                          <a:cs typeface="Arial" pitchFamily="34" charset="-120"/>
-                        </a:rPr>
-                        <a:t>0.536</a:t>
-                      </a:r>
-                      <a:endParaRPr lang="en-US" sz="1600" dirty="0">
-                        <a:latin typeface="Arial" charset="0"/>
-                        <a:ea typeface="Arial" charset="0"/>
-                        <a:cs typeface="Arial" charset="0"/>
-                      </a:endParaRPr>
-                    </a:p>
-                  </a:txBody>
-                  <a:tcPr marL="91440" marR="91440" marT="45720" marB="45720" anchor="ctr">
-                    <a:lnL w="6350" cap="flat" cmpd="sng" algn="ctr">
-                      <a:solidFill>
-                        <a:srgbClr val="DDDDDD"/>
-                      </a:solidFill>
-                      <a:prstDash val="solid"/>
-                      <a:round/>
-                      <a:headEnd type="none" w="med" len="med"/>
-                      <a:tailEnd type="none" w="med" len="med"/>
-                    </a:lnL>
-                    <a:lnR w="6350" cap="flat" cmpd="sng" algn="ctr">
-                      <a:solidFill>
-                        <a:srgbClr val="DDDDDD"/>
-                      </a:solidFill>
-                      <a:prstDash val="solid"/>
-                      <a:round/>
-                      <a:headEnd type="none" w="med" len="med"/>
-                      <a:tailEnd type="none" w="med" len="med"/>
-                    </a:lnR>
-                    <a:lnT w="6350" cap="flat" cmpd="sng" algn="ctr">
-                      <a:solidFill>
-                        <a:srgbClr val="DDDDDD"/>
-                      </a:solidFill>
-                      <a:prstDash val="solid"/>
-                      <a:round/>
-                      <a:headEnd type="none" w="med" len="med"/>
-                      <a:tailEnd type="none" w="med" len="med"/>
-                    </a:lnT>
-                    <a:lnB w="6350" cap="flat" cmpd="sng" algn="ctr">
-                      <a:solidFill>
-                        <a:srgbClr val="DDDDDD"/>
-                      </a:solidFill>
-                      <a:prstDash val="solid"/>
-                      <a:round/>
-                      <a:headEnd type="none" w="med" len="med"/>
-                      <a:tailEnd type="none" w="med" len="med"/>
-                    </a:lnB>
-                  </a:tcPr>
-                </a:tc>
-                <a:tc>
-                  <a:txBody>
-                    <a:bodyPr/>
-                    <a:lstStyle/>
-                    <a:p>
-                      <a:pPr algn="ctr" indent="0" marL="0">
-                        <a:buNone/>
-                      </a:pPr>
-                      <a:r>
-                        <a:rPr lang="en-US" sz="1600" dirty="0">
-                          <a:solidFill>
-                            <a:srgbClr val="666666"/>
-                          </a:solidFill>
-                          <a:latin typeface="Arial" pitchFamily="34" charset="0"/>
-                          <a:ea typeface="Arial" pitchFamily="34" charset="-122"/>
-                          <a:cs typeface="Arial" pitchFamily="34" charset="-120"/>
-                        </a:rPr>
-                        <a:t>0.568</a:t>
-                      </a:r>
-                      <a:endParaRPr lang="en-US" sz="1600" dirty="0">
-                        <a:latin typeface="Arial" charset="0"/>
-                        <a:ea typeface="Arial" charset="0"/>
-                        <a:cs typeface="Arial" charset="0"/>
-                      </a:endParaRPr>
-                    </a:p>
-                  </a:txBody>
-                  <a:tcPr marL="91440" marR="91440" marT="45720" marB="45720" anchor="ctr">
-                    <a:lnL w="6350" cap="flat" cmpd="sng" algn="ctr">
-                      <a:solidFill>
-                        <a:srgbClr val="DDDDDD"/>
-                      </a:solidFill>
-                      <a:prstDash val="solid"/>
-                      <a:round/>
-                      <a:headEnd type="none" w="med" len="med"/>
-                      <a:tailEnd type="none" w="med" len="med"/>
-                    </a:lnL>
-                    <a:lnR w="6350" cap="flat" cmpd="sng" algn="ctr">
-                      <a:solidFill>
-                        <a:srgbClr val="DDDDDD"/>
-                      </a:solidFill>
-                      <a:prstDash val="solid"/>
-                      <a:round/>
-                      <a:headEnd type="none" w="med" len="med"/>
-                      <a:tailEnd type="none" w="med" len="med"/>
-                    </a:lnR>
-                    <a:lnT w="6350" cap="flat" cmpd="sng" algn="ctr">
-                      <a:solidFill>
-                        <a:srgbClr val="DDDDDD"/>
-                      </a:solidFill>
-                      <a:prstDash val="solid"/>
-                      <a:round/>
-                      <a:headEnd type="none" w="med" len="med"/>
-                      <a:tailEnd type="none" w="med" len="med"/>
-                    </a:lnT>
-                    <a:lnB w="6350" cap="flat" cmpd="sng" algn="ctr">
-                      <a:solidFill>
-                        <a:srgbClr val="DDDDDD"/>
-                      </a:solidFill>
-                      <a:prstDash val="solid"/>
-                      <a:round/>
-                      <a:headEnd type="none" w="med" len="med"/>
-                      <a:tailEnd type="none" w="med" len="med"/>
-                    </a:lnB>
-                  </a:tcPr>
-                </a:tc>
-                <a:tc>
-                  <a:txBody>
-                    <a:bodyPr/>
-                    <a:lstStyle/>
-                    <a:p>
-                      <a:pPr algn="ctr" indent="0" marL="0">
-                        <a:buNone/>
-                      </a:pPr>
-                      <a:r>
-                        <a:rPr lang="en-US" sz="1600" dirty="0">
-                          <a:solidFill>
-                            <a:srgbClr val="666666"/>
-                          </a:solidFill>
-                          <a:latin typeface="Arial" pitchFamily="34" charset="0"/>
-                          <a:ea typeface="Arial" pitchFamily="34" charset="-122"/>
-                          <a:cs typeface="Arial" pitchFamily="34" charset="-120"/>
-                        </a:rPr>
-                        <a:t>0.552</a:t>
-                      </a:r>
-                      <a:endParaRPr lang="en-US" sz="1600" dirty="0">
-                        <a:latin typeface="Arial" charset="0"/>
-                        <a:ea typeface="Arial" charset="0"/>
-                        <a:cs typeface="Arial" charset="0"/>
-                      </a:endParaRPr>
-                    </a:p>
-                  </a:txBody>
-                  <a:tcPr marL="91440" marR="91440" marT="45720" marB="45720" anchor="ctr">
-                    <a:lnL w="6350" cap="flat" cmpd="sng" algn="ctr">
-                      <a:solidFill>
-                        <a:srgbClr val="DDDDDD"/>
-                      </a:solidFill>
-                      <a:prstDash val="solid"/>
-                      <a:round/>
-                      <a:headEnd type="none" w="med" len="med"/>
-                      <a:tailEnd type="none" w="med" len="med"/>
-                    </a:lnL>
-                    <a:lnR w="6350" cap="flat" cmpd="sng" algn="ctr">
-                      <a:solidFill>
-                        <a:srgbClr val="DDDDDD"/>
-                      </a:solidFill>
-                      <a:prstDash val="solid"/>
-                      <a:round/>
-                      <a:headEnd type="none" w="med" len="med"/>
-                      <a:tailEnd type="none" w="med" len="med"/>
-                    </a:lnR>
-                    <a:lnT w="6350" cap="flat" cmpd="sng" algn="ctr">
-                      <a:solidFill>
-                        <a:srgbClr val="DDDDDD"/>
-                      </a:solidFill>
-                      <a:prstDash val="solid"/>
-                      <a:round/>
-                      <a:headEnd type="none" w="med" len="med"/>
-                      <a:tailEnd type="none" w="med" len="med"/>
-                    </a:lnT>
-                    <a:lnB w="6350" cap="flat" cmpd="sng" algn="ctr">
-                      <a:solidFill>
-                        <a:srgbClr val="DDDDDD"/>
-                      </a:solidFill>
-                      <a:prstDash val="solid"/>
-                      <a:round/>
-                      <a:headEnd type="none" w="med" len="med"/>
-                      <a:tailEnd type="none" w="med" len="med"/>
-                    </a:lnB>
+                    <a:noFill/>
                   </a:tcPr>
                 </a:tc>
               </a:tr>
@@ -9223,7 +9220,7 @@
                 <a:ea typeface="Arial" pitchFamily="34" charset="-122"/>
                 <a:cs typeface="Arial" pitchFamily="34" charset="-120"/>
               </a:rPr>
-              <a:t>Table 1: Overall metrics on held-out sites 11 and 12. ★ = only model that learned to detect landslides.</a:t>
+              <a:t>Table 1: Overall metrics on held-out sites 11 and 12. ★ = best-performing configuration (highest F1).</a:t>
             </a:r>
             <a:endParaRPr lang="en-US" sz="1300" dirty="0"/>
           </a:p>
@@ -9344,7 +9341,7 @@
                 <a:ea typeface="Arial" pitchFamily="34" charset="-122"/>
                 <a:cs typeface="Arial" pitchFamily="34" charset="-120"/>
               </a:rPr>
-              <a:t>Figure 2: Only RGB+DTM+Hillshade+Slope produced non-zero Recall. All simpler configs predict background only.</a:t>
+              <a:t>Figure 2: RGB + DTM achieves the best F1 (0.690); hillshade underperforms the RGB-only baseline despite deriving from the same DTM.</a:t>
             </a:r>
             <a:endParaRPr lang="en-US" sz="1300" dirty="0"/>
           </a:p>
@@ -9479,7 +9476,7 @@
                 <a:ea typeface="Arial" pitchFamily="34" charset="-122"/>
                 <a:cs typeface="Arial" pitchFamily="34" charset="-120"/>
               </a:rPr>
-              <a:t>Only RGB + DTM + Hillshade + Slope produced a functional detector</a:t>
+              <a:t>All four configurations now produce functional detectors</a:t>
             </a:r>
             <a:pPr indent="0" marL="0">
               <a:lnSpc>
@@ -9496,7 +9493,7 @@
                 <a:ea typeface="Arial" pitchFamily="34" charset="-122"/>
                 <a:cs typeface="Arial" pitchFamily="34" charset="-120"/>
               </a:rPr>
-              <a:t> (F1 = 0.589, Recall = 0.736), correctly flagging the majority of landslide pixels on both held-out sites. All three simpler configurations collapsed to predicting background everywhere.
+              <a:t> — recall ranges 0.825–0.949 and F1 ranges 0.577–0.690 across every variant, with none collapsing to background-only as in an earlier run with an inverted pos_weight. Recall is deliberately weighted above precision, favoring catching real landslides over avoiding false alarms.
 </a:t>
             </a:r>
             <a:pPr indent="0" marL="0">
@@ -9514,7 +9511,7 @@
                 <a:ea typeface="Arial" pitchFamily="34" charset="-122"/>
                 <a:cs typeface="Arial" pitchFamily="34" charset="-120"/>
               </a:rPr>
-              <a:t>Accuracy is misleading</a:t>
+              <a:t>Raw elevation gives the clearest gain: </a:t>
             </a:r>
             <a:pPr indent="0" marL="0">
               <a:lnSpc>
@@ -9531,7 +9528,7 @@
                 <a:ea typeface="Arial" pitchFamily="34" charset="-122"/>
                 <a:cs typeface="Arial" pitchFamily="34" charset="-120"/>
               </a:rPr>
-              <a:t> due to severe class imbalance: landslide pixels account for &lt;2% of each scene. All four models score approximately 97.7–97.8% accuracy, including those that detect nothing. F1 and Recall are the decisive metrics.
+              <a:t>RGB + DTM has the best F1 (0.690) and precision (0.593), improving on the RGB-only baseline (F1 0.599) mainly by reducing false positives — though performance still varies by site (F1 0.768 on Site 11 vs 0.612 on Site 12).
 </a:t>
             </a:r>
             <a:pPr indent="0" marL="0">
@@ -9549,7 +9546,7 @@
                 <a:ea typeface="Arial" pitchFamily="34" charset="-122"/>
                 <a:cs typeface="Arial" pitchFamily="34" charset="-120"/>
               </a:rPr>
-              <a:t>Key limitation — inverted pos_weight: </a:t>
+              <a:t>Hillshade and slope underperform DTM: </a:t>
             </a:r>
             <a:pPr indent="0" marL="0">
               <a:lnSpc>
@@ -9566,7 +9563,7 @@
                 <a:ea typeface="Arial" pitchFamily="34" charset="-122"/>
                 <a:cs typeface="Arial" pitchFamily="34" charset="-120"/>
               </a:rPr>
-              <a:t>The loss used pos_weight = 0.2, which down-weights the minority landslide class instead of up-weighting it. This is the most likely reason 3 of 4 models converged to the trivial "predict background everywhere" solution. Correcting to pos_weight ≈ 5–10 is the most critical fix before treating these as a definitive ablation study.
+              <a:t>despite deriving from the same elevation model, hillshade actually falls below the RGB-only baseline (F1 0.577), suggesting raw elevation carries more usable signal for the network than either derived product.
 </a:t>
             </a:r>
             <a:pPr indent="0" marL="0">
@@ -9584,7 +9581,7 @@
                 <a:ea typeface="Arial" pitchFamily="34" charset="-122"/>
                 <a:cs typeface="Arial" pitchFamily="34" charset="-120"/>
               </a:rPr>
-              <a:t>Terrain shape matters: </a:t>
+              <a:t>Accuracy is uninformative here: </a:t>
             </a:r>
             <a:pPr indent="0" marL="0">
               <a:lnSpc>
@@ -9601,7 +9598,7 @@
                 <a:ea typeface="Arial" pitchFamily="34" charset="-122"/>
                 <a:cs typeface="Arial" pitchFamily="34" charset="-120"/>
               </a:rPr>
-              <a:t>Slope and hillshade capture characteristic terrain discontinuities of landslide scars that spectral colour alone cannot reliably distinguish from other bare surfaces.</a:t>
+              <a:t>all four models score 97.0–98.5% accuracy since landslide pixels are a small minority class; F1 and Recall remain the decisive metrics.</a:t>
             </a:r>
             <a:endParaRPr lang="en-US" sz="1900" dirty="0"/>
           </a:p>
@@ -9753,7 +9750,7 @@
                 <a:ea typeface="Arial" pitchFamily="34" charset="-122"/>
                 <a:cs typeface="Arial" pitchFamily="34" charset="-120"/>
               </a:rPr>
-              <a:t>Correct pos_weight to 5–10 to up-weight the minority landslide class
+              <a:t>Sweep the sigmoid threshold to trade recall for precision, especially for RGB + DTM
 </a:t>
             </a:r>
             <a:pPr indent="0" marL="0">
@@ -9788,7 +9785,7 @@
                 <a:ea typeface="Arial" pitchFamily="34" charset="-122"/>
                 <a:cs typeface="Arial" pitchFamily="34" charset="-120"/>
               </a:rPr>
-              <a:t>Fix random seed for reproducible initialization across all configurations
+              <a:t>Test feature fusion (e.g. RGB + DTM + Slope) now that single features are validated independently
 </a:t>
             </a:r>
             <a:pPr indent="0" marL="0">
@@ -9823,7 +9820,7 @@
                 <a:ea typeface="Arial" pitchFamily="34" charset="-122"/>
                 <a:cs typeface="Arial" pitchFamily="34" charset="-120"/>
               </a:rPr>
-              <a:t>Exhaustive tiling of all 10 training sites (sites 2,4,7,10 currently partial)
+              <a:t>Investigate why hillshade underperforms slope and DTM despite deriving from the same elevation model
 </a:t>
             </a:r>
             <a:pPr indent="0" marL="0">
@@ -9858,7 +9855,7 @@
                 <a:ea typeface="Arial" pitchFamily="34" charset="-122"/>
                 <a:cs typeface="Arial" pitchFamily="34" charset="-120"/>
               </a:rPr>
-              <a:t>Threshold optimization: sweep sigmoid threshold to maximize F1
+              <a:t>Site-stratified cross-validation to reduce site-to-site F1 variance (0.768 vs 0.612 on RGB + DTM)
 </a:t>
             </a:r>
             <a:pPr indent="0" marL="0">
@@ -9893,7 +9890,7 @@
                 <a:ea typeface="Arial" pitchFamily="34" charset="-122"/>
                 <a:cs typeface="Arial" pitchFamily="34" charset="-120"/>
               </a:rPr>
-              <a:t>Focal loss or weighted sampling for better minority-class learning
+              <a:t>Revisit foundation-model backbones (DOFA, SkySense) now that a reliable ResNet50 U-Net baseline exists
 </a:t>
             </a:r>
             <a:pPr indent="0" marL="0">
@@ -9928,7 +9925,7 @@
                 <a:ea typeface="Arial" pitchFamily="34" charset="-122"/>
                 <a:cs typeface="Arial" pitchFamily="34" charset="-120"/>
               </a:rPr>
-              <a:t>Evaluate foundation models (SkySense, DOFA, Prithvi-EO-2.0) as encoder backbones</a:t>
+              <a:t>Extend full-site inference to additional held-out sites as more annotated data becomes available</a:t>
             </a:r>
             <a:endParaRPr lang="en-US" sz="1900" dirty="0"/>
           </a:p>
